--- a/docs/Project_Overview_Final.pptx
+++ b/docs/Project_Overview_Final.pptx
@@ -15,6 +15,8 @@
     <p:sldId id="263" r:id="rId14"/>
     <p:sldId id="264" r:id="rId15"/>
     <p:sldId id="265" r:id="rId16"/>
+    <p:sldId id="266" r:id="rId17"/>
+    <p:sldId id="267" r:id="rId18"/>
   </p:sldIdLst>
   <p:sldSz cx="9144000" cy="5148072" type="screen4x3"/>
   <p:notesSz cx="6858000" cy="9144000"/>
@@ -3113,8 +3115,8 @@
         </p:nvSpPr>
         <p:spPr>
           <a:xfrm>
-            <a:off x="457200" y="1097280"/>
-            <a:ext cx="8229600" cy="1097280"/>
+            <a:off x="457200" y="914400"/>
+            <a:ext cx="8229600" cy="822960"/>
           </a:xfrm>
           <a:prstGeom prst="rect">
             <a:avLst/>
@@ -3129,7 +3131,7 @@
           <a:p>
             <a:pPr algn="ctr"/>
             <a:r>
-              <a:rPr sz="4000" b="1">
+              <a:rPr sz="4200" b="1">
                 <a:solidFill>
                   <a:srgbClr val="00B4D8"/>
                 </a:solidFill>
@@ -3147,23 +3149,23 @@
         </p:nvSpPr>
         <p:spPr>
           <a:xfrm>
-            <a:off x="457200" y="2286000"/>
-            <a:ext cx="8229600" cy="548640"/>
-          </a:xfrm>
-          <a:prstGeom prst="rect">
-            <a:avLst/>
-          </a:prstGeom>
-          <a:noFill/>
-        </p:spPr>
-        <p:txBody>
-          <a:bodyPr wrap="none">
+            <a:off x="457200" y="1920240"/>
+            <a:ext cx="8229600" cy="457200"/>
+          </a:xfrm>
+          <a:prstGeom prst="rect">
+            <a:avLst/>
+          </a:prstGeom>
+          <a:noFill/>
+        </p:spPr>
+        <p:txBody>
+          <a:bodyPr wrap="square">
             <a:spAutoFit/>
           </a:bodyPr>
           <a:lstStyle/>
           <a:p>
             <a:pPr algn="ctr"/>
             <a:r>
-              <a:rPr sz="2000">
+              <a:rPr sz="2000" b="0">
                 <a:solidFill>
                   <a:srgbClr val="FFFFFF"/>
                 </a:solidFill>
@@ -3181,42 +3183,76 @@
         </p:nvSpPr>
         <p:spPr>
           <a:xfrm>
-            <a:off x="457200" y="3017520"/>
-            <a:ext cx="8229600" cy="457200"/>
-          </a:xfrm>
-          <a:prstGeom prst="rect">
-            <a:avLst/>
-          </a:prstGeom>
-          <a:noFill/>
-        </p:spPr>
-        <p:txBody>
-          <a:bodyPr wrap="none">
+            <a:off x="457200" y="2514600"/>
+            <a:ext cx="8229600" cy="365760"/>
+          </a:xfrm>
+          <a:prstGeom prst="rect">
+            <a:avLst/>
+          </a:prstGeom>
+          <a:noFill/>
+        </p:spPr>
+        <p:txBody>
+          <a:bodyPr wrap="square">
             <a:spAutoFit/>
           </a:bodyPr>
           <a:lstStyle/>
           <a:p>
             <a:pPr algn="ctr"/>
             <a:r>
-              <a:rPr sz="1400">
+              <a:rPr sz="1300" b="0">
+                <a:solidFill>
+                  <a:srgbClr val="AAAAAA"/>
+                </a:solidFill>
+              </a:rPr>
+              <a:t>M.Tech Data Science  |  PES Bangalore — Great Learning  |  Phase I Complete</a:t>
+            </a:r>
+          </a:p>
+        </p:txBody>
+      </p:sp>
+      <p:sp>
+        <p:nvSpPr>
+          <p:cNvPr id="5" name="TextBox 4"/>
+          <p:cNvSpPr txBox="1"/>
+          <p:nvPr/>
+        </p:nvSpPr>
+        <p:spPr>
+          <a:xfrm>
+            <a:off x="457200" y="3063240"/>
+            <a:ext cx="8229600" cy="365760"/>
+          </a:xfrm>
+          <a:prstGeom prst="rect">
+            <a:avLst/>
+          </a:prstGeom>
+          <a:noFill/>
+        </p:spPr>
+        <p:txBody>
+          <a:bodyPr wrap="square">
+            <a:spAutoFit/>
+          </a:bodyPr>
+          <a:lstStyle/>
+          <a:p>
+            <a:pPr algn="ctr"/>
+            <a:r>
+              <a:rPr sz="1300" b="1">
                 <a:solidFill>
                   <a:srgbClr val="2DC653"/>
                 </a:solidFill>
               </a:rPr>
-              <a:t>✅ 6 Protocols  ✅ 6 PCAP Detectors  ✅ 6 KPI Detectors  ✅ RAG + LLM  ✅ REST API  ✅ 20 Tests</a:t>
-            </a:r>
-          </a:p>
-        </p:txBody>
-      </p:sp>
-      <p:sp>
-        <p:nvSpPr>
-          <p:cNvPr id="5" name="TextBox 4"/>
-          <p:cNvSpPr txBox="1"/>
-          <p:nvPr/>
-        </p:nvSpPr>
-        <p:spPr>
-          <a:xfrm>
-            <a:off x="457200" y="3840480"/>
-            <a:ext cx="8229600" cy="914400"/>
+              <a:t>✅ 6 Protocols  ✅ 6 PCAP Detectors  ✅ 6 KPI Detectors  ✅ 6 Stats Detectors  ✅ RAG + LLM  ✅ 56 Tests Passing</a:t>
+            </a:r>
+          </a:p>
+        </p:txBody>
+      </p:sp>
+      <p:sp>
+        <p:nvSpPr>
+          <p:cNvPr id="6" name="TextBox 5"/>
+          <p:cNvSpPr txBox="1"/>
+          <p:nvPr/>
+        </p:nvSpPr>
+        <p:spPr>
+          <a:xfrm>
+            <a:off x="457200" y="3566160"/>
+            <a:ext cx="8229600" cy="365760"/>
           </a:xfrm>
           <a:prstGeom prst="rect">
             <a:avLst/>
@@ -3231,12 +3267,12 @@
           <a:p>
             <a:pPr algn="ctr"/>
             <a:r>
-              <a:rPr sz="1300">
+              <a:rPr sz="1200" b="0">
                 <a:solidFill>
                   <a:srgbClr val="AAAAAA"/>
                 </a:solidFill>
               </a:rPr>
-              <a:t>Python · pyshark · scikit-learn · PyTorch · FAISS · Ollama · Streamlit · FastAPI</a:t>
+              <a:t>Python · pyshark · scikit-learn · PyTorch · Prophet · FAISS · Ollama · Streamlit · FastAPI</a:t>
             </a:r>
           </a:p>
         </p:txBody>
@@ -3275,28 +3311,1372 @@
         </p:nvSpPr>
         <p:spPr>
           <a:xfrm>
-            <a:off x="457200" y="914400"/>
-            <a:ext cx="8229600" cy="548640"/>
-          </a:xfrm>
-          <a:prstGeom prst="rect">
-            <a:avLst/>
-          </a:prstGeom>
-          <a:noFill/>
-        </p:spPr>
-        <p:txBody>
-          <a:bodyPr wrap="none">
+            <a:off x="274320" y="137160"/>
+            <a:ext cx="8595360" cy="457200"/>
+          </a:xfrm>
+          <a:prstGeom prst="rect">
+            <a:avLst/>
+          </a:prstGeom>
+          <a:noFill/>
+        </p:spPr>
+        <p:txBody>
+          <a:bodyPr wrap="square">
+            <a:spAutoFit/>
+          </a:bodyPr>
+          <a:lstStyle/>
+          <a:p>
+            <a:pPr algn="l"/>
+            <a:r>
+              <a:rPr sz="2400" b="1">
+                <a:solidFill>
+                  <a:srgbClr val="00B4D8"/>
+                </a:solidFill>
+              </a:rPr>
+              <a:t>✅  Test Results — 56 Tests, All Passing</a:t>
+            </a:r>
+          </a:p>
+        </p:txBody>
+      </p:sp>
+      <p:sp>
+        <p:nvSpPr>
+          <p:cNvPr id="3" name="TextBox 2"/>
+          <p:cNvSpPr txBox="1"/>
+          <p:nvPr/>
+        </p:nvSpPr>
+        <p:spPr>
+          <a:xfrm>
+            <a:off x="274320" y="713232"/>
+            <a:ext cx="4114800" cy="274320"/>
+          </a:xfrm>
+          <a:prstGeom prst="rect">
+            <a:avLst/>
+          </a:prstGeom>
+          <a:noFill/>
+        </p:spPr>
+        <p:txBody>
+          <a:bodyPr wrap="square">
+            <a:spAutoFit/>
+          </a:bodyPr>
+          <a:lstStyle/>
+          <a:p>
+            <a:pPr algn="l"/>
+            <a:r>
+              <a:rPr sz="1100" b="1">
+                <a:solidFill>
+                  <a:srgbClr val="00B4D8"/>
+                </a:solidFill>
+              </a:rPr>
+              <a:t>test_walking_skeleton.py  (4 tests)</a:t>
+            </a:r>
+          </a:p>
+        </p:txBody>
+      </p:sp>
+      <p:sp>
+        <p:nvSpPr>
+          <p:cNvPr id="4" name="TextBox 3"/>
+          <p:cNvSpPr txBox="1"/>
+          <p:nvPr/>
+        </p:nvSpPr>
+        <p:spPr>
+          <a:xfrm>
+            <a:off x="457200" y="1005840"/>
+            <a:ext cx="3931920" cy="256032"/>
+          </a:xfrm>
+          <a:prstGeom prst="rect">
+            <a:avLst/>
+          </a:prstGeom>
+          <a:noFill/>
+        </p:spPr>
+        <p:txBody>
+          <a:bodyPr wrap="square">
+            <a:spAutoFit/>
+          </a:bodyPr>
+          <a:lstStyle/>
+          <a:p>
+            <a:pPr algn="l"/>
+            <a:r>
+              <a:rPr sz="1000" b="0">
+                <a:solidFill>
+                  <a:srgbClr val="2DC653"/>
+                </a:solidFill>
+              </a:rPr>
+              <a:t>✅  parse_pcap_stub keys</a:t>
+            </a:r>
+          </a:p>
+        </p:txBody>
+      </p:sp>
+      <p:sp>
+        <p:nvSpPr>
+          <p:cNvPr id="5" name="TextBox 4"/>
+          <p:cNvSpPr txBox="1"/>
+          <p:nvPr/>
+        </p:nvSpPr>
+        <p:spPr>
+          <a:xfrm>
+            <a:off x="457200" y="1261872"/>
+            <a:ext cx="3931920" cy="256032"/>
+          </a:xfrm>
+          <a:prstGeom prst="rect">
+            <a:avLst/>
+          </a:prstGeom>
+          <a:noFill/>
+        </p:spPr>
+        <p:txBody>
+          <a:bodyPr wrap="square">
+            <a:spAutoFit/>
+          </a:bodyPr>
+          <a:lstStyle/>
+          <a:p>
+            <a:pPr algn="l"/>
+            <a:r>
+              <a:rPr sz="1000" b="0">
+                <a:solidFill>
+                  <a:srgbClr val="2DC653"/>
+                </a:solidFill>
+              </a:rPr>
+              <a:t>✅  detect_anomalies_stub list</a:t>
+            </a:r>
+          </a:p>
+        </p:txBody>
+      </p:sp>
+      <p:sp>
+        <p:nvSpPr>
+          <p:cNvPr id="6" name="TextBox 5"/>
+          <p:cNvSpPr txBox="1"/>
+          <p:nvPr/>
+        </p:nvSpPr>
+        <p:spPr>
+          <a:xfrm>
+            <a:off x="457200" y="1517904"/>
+            <a:ext cx="3931920" cy="256032"/>
+          </a:xfrm>
+          <a:prstGeom prst="rect">
+            <a:avLst/>
+          </a:prstGeom>
+          <a:noFill/>
+        </p:spPr>
+        <p:txBody>
+          <a:bodyPr wrap="square">
+            <a:spAutoFit/>
+          </a:bodyPr>
+          <a:lstStyle/>
+          <a:p>
+            <a:pPr algn="l"/>
+            <a:r>
+              <a:rPr sz="1000" b="0">
+                <a:solidFill>
+                  <a:srgbClr val="2DC653"/>
+                </a:solidFill>
+              </a:rPr>
+              <a:t>✅  explain_anomaly_stub citations</a:t>
+            </a:r>
+          </a:p>
+        </p:txBody>
+      </p:sp>
+      <p:sp>
+        <p:nvSpPr>
+          <p:cNvPr id="7" name="TextBox 6"/>
+          <p:cNvSpPr txBox="1"/>
+          <p:nvPr/>
+        </p:nvSpPr>
+        <p:spPr>
+          <a:xfrm>
+            <a:off x="457200" y="1773936"/>
+            <a:ext cx="3931920" cy="256032"/>
+          </a:xfrm>
+          <a:prstGeom prst="rect">
+            <a:avLst/>
+          </a:prstGeom>
+          <a:noFill/>
+        </p:spPr>
+        <p:txBody>
+          <a:bodyPr wrap="square">
+            <a:spAutoFit/>
+          </a:bodyPr>
+          <a:lstStyle/>
+          <a:p>
+            <a:pPr algn="l"/>
+            <a:r>
+              <a:rPr sz="1000" b="0">
+                <a:solidFill>
+                  <a:srgbClr val="2DC653"/>
+                </a:solidFill>
+              </a:rPr>
+              <a:t>✅  stub pipeline end-to-end</a:t>
+            </a:r>
+          </a:p>
+        </p:txBody>
+      </p:sp>
+      <p:sp>
+        <p:nvSpPr>
+          <p:cNvPr id="8" name="TextBox 7"/>
+          <p:cNvSpPr txBox="1"/>
+          <p:nvPr/>
+        </p:nvSpPr>
+        <p:spPr>
+          <a:xfrm>
+            <a:off x="274320" y="2039112"/>
+            <a:ext cx="4114800" cy="274320"/>
+          </a:xfrm>
+          <a:prstGeom prst="rect">
+            <a:avLst/>
+          </a:prstGeom>
+          <a:noFill/>
+        </p:spPr>
+        <p:txBody>
+          <a:bodyPr wrap="square">
+            <a:spAutoFit/>
+          </a:bodyPr>
+          <a:lstStyle/>
+          <a:p>
+            <a:pPr algn="l"/>
+            <a:r>
+              <a:rPr sz="1100" b="1">
+                <a:solidFill>
+                  <a:srgbClr val="00B4D8"/>
+                </a:solidFill>
+              </a:rPr>
+              <a:t>test_real_pipeline.py  (16 tests)</a:t>
+            </a:r>
+          </a:p>
+        </p:txBody>
+      </p:sp>
+      <p:sp>
+        <p:nvSpPr>
+          <p:cNvPr id="9" name="TextBox 8"/>
+          <p:cNvSpPr txBox="1"/>
+          <p:nvPr/>
+        </p:nvSpPr>
+        <p:spPr>
+          <a:xfrm>
+            <a:off x="457200" y="2331720"/>
+            <a:ext cx="3931920" cy="256032"/>
+          </a:xfrm>
+          <a:prstGeom prst="rect">
+            <a:avLst/>
+          </a:prstGeom>
+          <a:noFill/>
+        </p:spPr>
+        <p:txBody>
+          <a:bodyPr wrap="square">
+            <a:spAutoFit/>
+          </a:bodyPr>
+          <a:lstStyle/>
+          <a:p>
+            <a:pPr algn="l"/>
+            <a:r>
+              <a:rPr sz="1000" b="0">
+                <a:solidFill>
+                  <a:srgbClr val="2DC653"/>
+                </a:solidFill>
+              </a:rPr>
+              <a:t>✅  Real PCAP parser — keys, procedures, schema</a:t>
+            </a:r>
+          </a:p>
+        </p:txBody>
+      </p:sp>
+      <p:sp>
+        <p:nvSpPr>
+          <p:cNvPr id="10" name="TextBox 9"/>
+          <p:cNvSpPr txBox="1"/>
+          <p:nvPr/>
+        </p:nvSpPr>
+        <p:spPr>
+          <a:xfrm>
+            <a:off x="457200" y="2587752"/>
+            <a:ext cx="3931920" cy="256032"/>
+          </a:xfrm>
+          <a:prstGeom prst="rect">
+            <a:avLst/>
+          </a:prstGeom>
+          <a:noFill/>
+        </p:spPr>
+        <p:txBody>
+          <a:bodyPr wrap="square">
+            <a:spAutoFit/>
+          </a:bodyPr>
+          <a:lstStyle/>
+          <a:p>
+            <a:pPr algn="l"/>
+            <a:r>
+              <a:rPr sz="1000" b="0">
+                <a:solidFill>
+                  <a:srgbClr val="2DC653"/>
+                </a:solidFill>
+              </a:rPr>
+              <a:t>✅  6 PCAP detectors — correct dict schema</a:t>
+            </a:r>
+          </a:p>
+        </p:txBody>
+      </p:sp>
+      <p:sp>
+        <p:nvSpPr>
+          <p:cNvPr id="11" name="TextBox 10"/>
+          <p:cNvSpPr txBox="1"/>
+          <p:nvPr/>
+        </p:nvSpPr>
+        <p:spPr>
+          <a:xfrm>
+            <a:off x="457200" y="2843784"/>
+            <a:ext cx="3931920" cy="256032"/>
+          </a:xfrm>
+          <a:prstGeom prst="rect">
+            <a:avLst/>
+          </a:prstGeom>
+          <a:noFill/>
+        </p:spPr>
+        <p:txBody>
+          <a:bodyPr wrap="square">
+            <a:spAutoFit/>
+          </a:bodyPr>
+          <a:lstStyle/>
+          <a:p>
+            <a:pPr algn="l"/>
+            <a:r>
+              <a:rPr sz="1000" b="0">
+                <a:solidFill>
+                  <a:srgbClr val="2DC653"/>
+                </a:solidFill>
+              </a:rPr>
+              <a:t>✅  KPI parser + 6 KPI detectors validated</a:t>
+            </a:r>
+          </a:p>
+        </p:txBody>
+      </p:sp>
+      <p:sp>
+        <p:nvSpPr>
+          <p:cNvPr id="12" name="TextBox 11"/>
+          <p:cNvSpPr txBox="1"/>
+          <p:nvPr/>
+        </p:nvSpPr>
+        <p:spPr>
+          <a:xfrm>
+            <a:off x="457200" y="3099815"/>
+            <a:ext cx="3931920" cy="256032"/>
+          </a:xfrm>
+          <a:prstGeom prst="rect">
+            <a:avLst/>
+          </a:prstGeom>
+          <a:noFill/>
+        </p:spPr>
+        <p:txBody>
+          <a:bodyPr wrap="square">
+            <a:spAutoFit/>
+          </a:bodyPr>
+          <a:lstStyle/>
+          <a:p>
+            <a:pPr algn="l"/>
+            <a:r>
+              <a:rPr sz="1000" b="0">
+                <a:solidFill>
+                  <a:srgbClr val="2DC653"/>
+                </a:solidFill>
+              </a:rPr>
+              <a:t>✅  RAG retriever — chunks + relevance ordering</a:t>
+            </a:r>
+          </a:p>
+        </p:txBody>
+      </p:sp>
+      <p:sp>
+        <p:nvSpPr>
+          <p:cNvPr id="13" name="TextBox 12"/>
+          <p:cNvSpPr txBox="1"/>
+          <p:nvPr/>
+        </p:nvSpPr>
+        <p:spPr>
+          <a:xfrm>
+            <a:off x="457200" y="3355848"/>
+            <a:ext cx="3931920" cy="256032"/>
+          </a:xfrm>
+          <a:prstGeom prst="rect">
+            <a:avLst/>
+          </a:prstGeom>
+          <a:noFill/>
+        </p:spPr>
+        <p:txBody>
+          <a:bodyPr wrap="square">
+            <a:spAutoFit/>
+          </a:bodyPr>
+          <a:lstStyle/>
+          <a:p>
+            <a:pPr algn="l"/>
+            <a:r>
+              <a:rPr sz="1000" b="0">
+                <a:solidFill>
+                  <a:srgbClr val="2DC653"/>
+                </a:solidFill>
+              </a:rPr>
+              <a:t>✅  LLM explainer — rule-based output schema</a:t>
+            </a:r>
+          </a:p>
+        </p:txBody>
+      </p:sp>
+      <p:sp>
+        <p:nvSpPr>
+          <p:cNvPr id="14" name="TextBox 13"/>
+          <p:cNvSpPr txBox="1"/>
+          <p:nvPr/>
+        </p:nvSpPr>
+        <p:spPr>
+          <a:xfrm>
+            <a:off x="457200" y="3611880"/>
+            <a:ext cx="3931920" cy="256032"/>
+          </a:xfrm>
+          <a:prstGeom prst="rect">
+            <a:avLst/>
+          </a:prstGeom>
+          <a:noFill/>
+        </p:spPr>
+        <p:txBody>
+          <a:bodyPr wrap="square">
+            <a:spAutoFit/>
+          </a:bodyPr>
+          <a:lstStyle/>
+          <a:p>
+            <a:pPr algn="l"/>
+            <a:r>
+              <a:rPr sz="1000" b="0">
+                <a:solidFill>
+                  <a:srgbClr val="2DC653"/>
+                </a:solidFill>
+              </a:rPr>
+              <a:t>✅  run_pcap_pipeline() and run_kpi_pipeline() end-to-end</a:t>
+            </a:r>
+          </a:p>
+        </p:txBody>
+      </p:sp>
+      <p:sp>
+        <p:nvSpPr>
+          <p:cNvPr id="15" name="TextBox 14"/>
+          <p:cNvSpPr txBox="1"/>
+          <p:nvPr/>
+        </p:nvSpPr>
+        <p:spPr>
+          <a:xfrm>
+            <a:off x="457200" y="3867912"/>
+            <a:ext cx="3931920" cy="256032"/>
+          </a:xfrm>
+          <a:prstGeom prst="rect">
+            <a:avLst/>
+          </a:prstGeom>
+          <a:noFill/>
+        </p:spPr>
+        <p:txBody>
+          <a:bodyPr wrap="square">
+            <a:spAutoFit/>
+          </a:bodyPr>
+          <a:lstStyle/>
+          <a:p>
+            <a:pPr algn="l"/>
+            <a:r>
+              <a:rPr sz="1000" b="0">
+                <a:solidFill>
+                  <a:srgbClr val="2DC653"/>
+                </a:solidFill>
+              </a:rPr>
+              <a:t>✅  run_pipeline() auto-detects file type</a:t>
+            </a:r>
+          </a:p>
+        </p:txBody>
+      </p:sp>
+      <p:sp>
+        <p:nvSpPr>
+          <p:cNvPr id="16" name="TextBox 15"/>
+          <p:cNvSpPr txBox="1"/>
+          <p:nvPr/>
+        </p:nvSpPr>
+        <p:spPr>
+          <a:xfrm>
+            <a:off x="274320" y="3364991"/>
+            <a:ext cx="4114800" cy="274320"/>
+          </a:xfrm>
+          <a:prstGeom prst="rect">
+            <a:avLst/>
+          </a:prstGeom>
+          <a:noFill/>
+        </p:spPr>
+        <p:txBody>
+          <a:bodyPr wrap="square">
+            <a:spAutoFit/>
+          </a:bodyPr>
+          <a:lstStyle/>
+          <a:p>
+            <a:pPr algn="l"/>
+            <a:r>
+              <a:rPr sz="1100" b="1">
+                <a:solidFill>
+                  <a:srgbClr val="00B4D8"/>
+                </a:solidFill>
+              </a:rPr>
+              <a:t>test_event_router.py  (8 tests)</a:t>
+            </a:r>
+          </a:p>
+        </p:txBody>
+      </p:sp>
+      <p:sp>
+        <p:nvSpPr>
+          <p:cNvPr id="17" name="TextBox 16"/>
+          <p:cNvSpPr txBox="1"/>
+          <p:nvPr/>
+        </p:nvSpPr>
+        <p:spPr>
+          <a:xfrm>
+            <a:off x="457200" y="3657599"/>
+            <a:ext cx="3931920" cy="256032"/>
+          </a:xfrm>
+          <a:prstGeom prst="rect">
+            <a:avLst/>
+          </a:prstGeom>
+          <a:noFill/>
+        </p:spPr>
+        <p:txBody>
+          <a:bodyPr wrap="square">
+            <a:spAutoFit/>
+          </a:bodyPr>
+          <a:lstStyle/>
+          <a:p>
+            <a:pPr algn="l"/>
+            <a:r>
+              <a:rPr sz="1000" b="0">
+                <a:solidFill>
+                  <a:srgbClr val="2DC653"/>
+                </a:solidFill>
+              </a:rPr>
+              <a:t>✅  ingest + summary + correlated events</a:t>
+            </a:r>
+          </a:p>
+        </p:txBody>
+      </p:sp>
+      <p:sp>
+        <p:nvSpPr>
+          <p:cNvPr id="18" name="TextBox 17"/>
+          <p:cNvSpPr txBox="1"/>
+          <p:nvPr/>
+        </p:nvSpPr>
+        <p:spPr>
+          <a:xfrm>
+            <a:off x="457200" y="3913631"/>
+            <a:ext cx="3931920" cy="256032"/>
+          </a:xfrm>
+          <a:prstGeom prst="rect">
+            <a:avLst/>
+          </a:prstGeom>
+          <a:noFill/>
+        </p:spPr>
+        <p:txBody>
+          <a:bodyPr wrap="square">
+            <a:spAutoFit/>
+          </a:bodyPr>
+          <a:lstStyle/>
+          <a:p>
+            <a:pPr algn="l"/>
+            <a:r>
+              <a:rPr sz="1000" b="0">
+                <a:solidFill>
+                  <a:srgbClr val="2DC653"/>
+                </a:solidFill>
+              </a:rPr>
+              <a:t>✅  cross-source correlation, top cells, event log</a:t>
+            </a:r>
+          </a:p>
+        </p:txBody>
+      </p:sp>
+      <p:sp>
+        <p:nvSpPr>
+          <p:cNvPr id="19" name="TextBox 18"/>
+          <p:cNvSpPr txBox="1"/>
+          <p:nvPr/>
+        </p:nvSpPr>
+        <p:spPr>
+          <a:xfrm>
+            <a:off x="4572000" y="713232"/>
+            <a:ext cx="4114800" cy="274320"/>
+          </a:xfrm>
+          <a:prstGeom prst="rect">
+            <a:avLst/>
+          </a:prstGeom>
+          <a:noFill/>
+        </p:spPr>
+        <p:txBody>
+          <a:bodyPr wrap="square">
+            <a:spAutoFit/>
+          </a:bodyPr>
+          <a:lstStyle/>
+          <a:p>
+            <a:pPr algn="l"/>
+            <a:r>
+              <a:rPr sz="1100" b="1">
+                <a:solidFill>
+                  <a:srgbClr val="00B4D8"/>
+                </a:solidFill>
+              </a:rPr>
+              <a:t>test_feedback_prediction.py  (12 tests)</a:t>
+            </a:r>
+          </a:p>
+        </p:txBody>
+      </p:sp>
+      <p:sp>
+        <p:nvSpPr>
+          <p:cNvPr id="20" name="TextBox 19"/>
+          <p:cNvSpPr txBox="1"/>
+          <p:nvPr/>
+        </p:nvSpPr>
+        <p:spPr>
+          <a:xfrm>
+            <a:off x="4754880" y="1005840"/>
+            <a:ext cx="3931920" cy="256032"/>
+          </a:xfrm>
+          <a:prstGeom prst="rect">
+            <a:avLst/>
+          </a:prstGeom>
+          <a:noFill/>
+        </p:spPr>
+        <p:txBody>
+          <a:bodyPr wrap="square">
+            <a:spAutoFit/>
+          </a:bodyPr>
+          <a:lstStyle/>
+          <a:p>
+            <a:pPr algn="l"/>
+            <a:r>
+              <a:rPr sz="1000" b="0">
+                <a:solidFill>
+                  <a:srgbClr val="2DC653"/>
+                </a:solidFill>
+              </a:rPr>
+              <a:t>✅  feedback save/load/stats</a:t>
+            </a:r>
+          </a:p>
+        </p:txBody>
+      </p:sp>
+      <p:sp>
+        <p:nvSpPr>
+          <p:cNvPr id="21" name="TextBox 20"/>
+          <p:cNvSpPr txBox="1"/>
+          <p:nvPr/>
+        </p:nvSpPr>
+        <p:spPr>
+          <a:xfrm>
+            <a:off x="4754880" y="1261872"/>
+            <a:ext cx="3931920" cy="256032"/>
+          </a:xfrm>
+          <a:prstGeom prst="rect">
+            <a:avLst/>
+          </a:prstGeom>
+          <a:noFill/>
+        </p:spPr>
+        <p:txBody>
+          <a:bodyPr wrap="square">
+            <a:spAutoFit/>
+          </a:bodyPr>
+          <a:lstStyle/>
+          <a:p>
+            <a:pPr algn="l"/>
+            <a:r>
+              <a:rPr sz="1000" b="0">
+                <a:solidFill>
+                  <a:srgbClr val="2DC653"/>
+                </a:solidFill>
+              </a:rPr>
+              <a:t>✅  LSTM + Prophet prediction schema</a:t>
+            </a:r>
+          </a:p>
+        </p:txBody>
+      </p:sp>
+      <p:sp>
+        <p:nvSpPr>
+          <p:cNvPr id="22" name="TextBox 21"/>
+          <p:cNvSpPr txBox="1"/>
+          <p:nvPr/>
+        </p:nvSpPr>
+        <p:spPr>
+          <a:xfrm>
+            <a:off x="4572000" y="2039112"/>
+            <a:ext cx="4114800" cy="274320"/>
+          </a:xfrm>
+          <a:prstGeom prst="rect">
+            <a:avLst/>
+          </a:prstGeom>
+          <a:noFill/>
+        </p:spPr>
+        <p:txBody>
+          <a:bodyPr wrap="square">
+            <a:spAutoFit/>
+          </a:bodyPr>
+          <a:lstStyle/>
+          <a:p>
+            <a:pPr algn="l"/>
+            <a:r>
+              <a:rPr sz="1100" b="1">
+                <a:solidFill>
+                  <a:srgbClr val="00B4D8"/>
+                </a:solidFill>
+              </a:rPr>
+              <a:t>test_retrainer.py  (8 tests)</a:t>
+            </a:r>
+          </a:p>
+        </p:txBody>
+      </p:sp>
+      <p:sp>
+        <p:nvSpPr>
+          <p:cNvPr id="23" name="TextBox 22"/>
+          <p:cNvSpPr txBox="1"/>
+          <p:nvPr/>
+        </p:nvSpPr>
+        <p:spPr>
+          <a:xfrm>
+            <a:off x="4754880" y="2331720"/>
+            <a:ext cx="3931920" cy="256032"/>
+          </a:xfrm>
+          <a:prstGeom prst="rect">
+            <a:avLst/>
+          </a:prstGeom>
+          <a:noFill/>
+        </p:spPr>
+        <p:txBody>
+          <a:bodyPr wrap="square">
+            <a:spAutoFit/>
+          </a:bodyPr>
+          <a:lstStyle/>
+          <a:p>
+            <a:pPr algn="l"/>
+            <a:r>
+              <a:rPr sz="1000" b="0">
+                <a:solidFill>
+                  <a:srgbClr val="2DC653"/>
+                </a:solidFill>
+              </a:rPr>
+              <a:t>✅  FP rate calculation</a:t>
+            </a:r>
+          </a:p>
+        </p:txBody>
+      </p:sp>
+      <p:sp>
+        <p:nvSpPr>
+          <p:cNvPr id="24" name="TextBox 23"/>
+          <p:cNvSpPr txBox="1"/>
+          <p:nvPr/>
+        </p:nvSpPr>
+        <p:spPr>
+          <a:xfrm>
+            <a:off x="4754880" y="2587752"/>
+            <a:ext cx="3931920" cy="256032"/>
+          </a:xfrm>
+          <a:prstGeom prst="rect">
+            <a:avLst/>
+          </a:prstGeom>
+          <a:noFill/>
+        </p:spPr>
+        <p:txBody>
+          <a:bodyPr wrap="square">
+            <a:spAutoFit/>
+          </a:bodyPr>
+          <a:lstStyle/>
+          <a:p>
+            <a:pPr algn="l"/>
+            <a:r>
+              <a:rPr sz="1000" b="0">
+                <a:solidFill>
+                  <a:srgbClr val="2DC653"/>
+                </a:solidFill>
+              </a:rPr>
+              <a:t>✅  param adjustment formula</a:t>
+            </a:r>
+          </a:p>
+        </p:txBody>
+      </p:sp>
+      <p:sp>
+        <p:nvSpPr>
+          <p:cNvPr id="25" name="TextBox 24"/>
+          <p:cNvSpPr txBox="1"/>
+          <p:nvPr/>
+        </p:nvSpPr>
+        <p:spPr>
+          <a:xfrm>
+            <a:off x="4754880" y="2843784"/>
+            <a:ext cx="3931920" cy="256032"/>
+          </a:xfrm>
+          <a:prstGeom prst="rect">
+            <a:avLst/>
+          </a:prstGeom>
+          <a:noFill/>
+        </p:spPr>
+        <p:txBody>
+          <a:bodyPr wrap="square">
+            <a:spAutoFit/>
+          </a:bodyPr>
+          <a:lstStyle/>
+          <a:p>
+            <a:pPr algn="l"/>
+            <a:r>
+              <a:rPr sz="1000" b="0">
+                <a:solidFill>
+                  <a:srgbClr val="2DC653"/>
+                </a:solidFill>
+              </a:rPr>
+              <a:t>✅  dry-run mode</a:t>
+            </a:r>
+          </a:p>
+        </p:txBody>
+      </p:sp>
+      <p:sp>
+        <p:nvSpPr>
+          <p:cNvPr id="26" name="TextBox 25"/>
+          <p:cNvSpPr txBox="1"/>
+          <p:nvPr/>
+        </p:nvSpPr>
+        <p:spPr>
+          <a:xfrm>
+            <a:off x="4572000" y="3364991"/>
+            <a:ext cx="4114800" cy="274320"/>
+          </a:xfrm>
+          <a:prstGeom prst="rect">
+            <a:avLst/>
+          </a:prstGeom>
+          <a:noFill/>
+        </p:spPr>
+        <p:txBody>
+          <a:bodyPr wrap="square">
+            <a:spAutoFit/>
+          </a:bodyPr>
+          <a:lstStyle/>
+          <a:p>
+            <a:pPr algn="l"/>
+            <a:r>
+              <a:rPr sz="1100" b="1">
+                <a:solidFill>
+                  <a:srgbClr val="00B4D8"/>
+                </a:solidFill>
+              </a:rPr>
+              <a:t>test_walking_skeleton.py  (8 tests)</a:t>
+            </a:r>
+          </a:p>
+        </p:txBody>
+      </p:sp>
+      <p:sp>
+        <p:nvSpPr>
+          <p:cNvPr id="27" name="TextBox 26"/>
+          <p:cNvSpPr txBox="1"/>
+          <p:nvPr/>
+        </p:nvSpPr>
+        <p:spPr>
+          <a:xfrm>
+            <a:off x="4754880" y="3657599"/>
+            <a:ext cx="3931920" cy="256032"/>
+          </a:xfrm>
+          <a:prstGeom prst="rect">
+            <a:avLst/>
+          </a:prstGeom>
+          <a:noFill/>
+        </p:spPr>
+        <p:txBody>
+          <a:bodyPr wrap="square">
+            <a:spAutoFit/>
+          </a:bodyPr>
+          <a:lstStyle/>
+          <a:p>
+            <a:pPr algn="l"/>
+            <a:r>
+              <a:rPr sz="1000" b="0">
+                <a:solidFill>
+                  <a:srgbClr val="2DC653"/>
+                </a:solidFill>
+              </a:rPr>
+              <a:t>✅  stats parser — srsRAN/OAI/NIST</a:t>
+            </a:r>
+          </a:p>
+        </p:txBody>
+      </p:sp>
+      <p:sp>
+        <p:nvSpPr>
+          <p:cNvPr id="28" name="TextBox 27"/>
+          <p:cNvSpPr txBox="1"/>
+          <p:nvPr/>
+        </p:nvSpPr>
+        <p:spPr>
+          <a:xfrm>
+            <a:off x="4754880" y="3913631"/>
+            <a:ext cx="3931920" cy="256032"/>
+          </a:xfrm>
+          <a:prstGeom prst="rect">
+            <a:avLst/>
+          </a:prstGeom>
+          <a:noFill/>
+        </p:spPr>
+        <p:txBody>
+          <a:bodyPr wrap="square">
+            <a:spAutoFit/>
+          </a:bodyPr>
+          <a:lstStyle/>
+          <a:p>
+            <a:pPr algn="l"/>
+            <a:r>
+              <a:rPr sz="1000" b="0">
+                <a:solidFill>
+                  <a:srgbClr val="2DC653"/>
+                </a:solidFill>
+              </a:rPr>
+              <a:t>✅  6 stats detectors schema</a:t>
+            </a:r>
+          </a:p>
+        </p:txBody>
+      </p:sp>
+    </p:spTree>
+  </p:cSld>
+  <p:clrMapOvr>
+    <a:masterClrMapping/>
+  </p:clrMapOvr>
+</p:sld>
+</file>
+
+<file path=ppt/slides/slide11.xml><?xml version="1.0" encoding="utf-8"?>
+<p:sld xmlns:a="http://schemas.openxmlformats.org/drawingml/2006/main" xmlns:p="http://schemas.openxmlformats.org/presentationml/2006/main" xmlns:r="http://schemas.openxmlformats.org/officeDocument/2006/relationships">
+  <p:cSld>
+    <p:bg>
+      <p:bgPr>
+        <a:solidFill>
+          <a:srgbClr val="0D1B2A"/>
+        </a:solidFill>
+        <a:effectLst/>
+      </p:bgPr>
+    </p:bg>
+    <p:spTree>
+      <p:nvGrpSpPr>
+        <p:cNvPr id="1" name=""/>
+        <p:cNvGrpSpPr/>
+        <p:nvPr/>
+      </p:nvGrpSpPr>
+      <p:grpSpPr/>
+      <p:sp>
+        <p:nvSpPr>
+          <p:cNvPr id="2" name="TextBox 1"/>
+          <p:cNvSpPr txBox="1"/>
+          <p:nvPr/>
+        </p:nvSpPr>
+        <p:spPr>
+          <a:xfrm>
+            <a:off x="274320" y="137160"/>
+            <a:ext cx="8595360" cy="457200"/>
+          </a:xfrm>
+          <a:prstGeom prst="rect">
+            <a:avLst/>
+          </a:prstGeom>
+          <a:noFill/>
+        </p:spPr>
+        <p:txBody>
+          <a:bodyPr wrap="square">
+            <a:spAutoFit/>
+          </a:bodyPr>
+          <a:lstStyle/>
+          <a:p>
+            <a:pPr algn="l"/>
+            <a:r>
+              <a:rPr sz="2400" b="1">
+                <a:solidFill>
+                  <a:srgbClr val="00B4D8"/>
+                </a:solidFill>
+              </a:rPr>
+              <a:t>🎯  Reviewer Q&amp;A — Anticipated Questions</a:t>
+            </a:r>
+          </a:p>
+        </p:txBody>
+      </p:sp>
+      <p:sp>
+        <p:nvSpPr>
+          <p:cNvPr id="3" name="TextBox 2"/>
+          <p:cNvSpPr txBox="1"/>
+          <p:nvPr/>
+        </p:nvSpPr>
+        <p:spPr>
+          <a:xfrm>
+            <a:off x="274320" y="713232"/>
+            <a:ext cx="8412480" cy="274320"/>
+          </a:xfrm>
+          <a:prstGeom prst="rect">
+            <a:avLst/>
+          </a:prstGeom>
+          <a:noFill/>
+        </p:spPr>
+        <p:txBody>
+          <a:bodyPr wrap="square">
+            <a:spAutoFit/>
+          </a:bodyPr>
+          <a:lstStyle/>
+          <a:p>
+            <a:pPr algn="l"/>
+            <a:r>
+              <a:rPr sz="1200" b="1">
+                <a:solidFill>
+                  <a:srgbClr val="FF9400"/>
+                </a:solidFill>
+              </a:rPr>
+              <a:t>Q:  Why 6 detectors instead of 1?</a:t>
+            </a:r>
+          </a:p>
+        </p:txBody>
+      </p:sp>
+      <p:sp>
+        <p:nvSpPr>
+          <p:cNvPr id="4" name="TextBox 3"/>
+          <p:cNvSpPr txBox="1"/>
+          <p:nvPr/>
+        </p:nvSpPr>
+        <p:spPr>
+          <a:xfrm>
+            <a:off x="457200" y="987552"/>
+            <a:ext cx="8229600" cy="438912"/>
+          </a:xfrm>
+          <a:prstGeom prst="rect">
+            <a:avLst/>
+          </a:prstGeom>
+          <a:noFill/>
+        </p:spPr>
+        <p:txBody>
+          <a:bodyPr wrap="square">
+            <a:spAutoFit/>
+          </a:bodyPr>
+          <a:lstStyle/>
+          <a:p>
+            <a:pPr algn="l"/>
+            <a:r>
+              <a:rPr sz="1000" b="0">
+                <a:solidFill>
+                  <a:srgbClr val="FFFFFF"/>
+                </a:solidFill>
+              </a:rPr>
+              <a:t>A:  No single method catches all anomaly types. IF handles global; LOF handles local density. Statistical is deterministic; LSTM catches sequence violations. Multi-detector agreement = higher confidence, lower false positive rate.</a:t>
+            </a:r>
+          </a:p>
+        </p:txBody>
+      </p:sp>
+      <p:sp>
+        <p:nvSpPr>
+          <p:cNvPr id="5" name="TextBox 4"/>
+          <p:cNvSpPr txBox="1"/>
+          <p:nvPr/>
+        </p:nvSpPr>
+        <p:spPr>
+          <a:xfrm>
+            <a:off x="274320" y="1517904"/>
+            <a:ext cx="8412480" cy="274320"/>
+          </a:xfrm>
+          <a:prstGeom prst="rect">
+            <a:avLst/>
+          </a:prstGeom>
+          <a:noFill/>
+        </p:spPr>
+        <p:txBody>
+          <a:bodyPr wrap="square">
+            <a:spAutoFit/>
+          </a:bodyPr>
+          <a:lstStyle/>
+          <a:p>
+            <a:pPr algn="l"/>
+            <a:r>
+              <a:rPr sz="1200" b="1">
+                <a:solidFill>
+                  <a:srgbClr val="FF9400"/>
+                </a:solidFill>
+              </a:rPr>
+              <a:t>Q:  Why Ollama (local LLM) not OpenAI/cloud?</a:t>
+            </a:r>
+          </a:p>
+        </p:txBody>
+      </p:sp>
+      <p:sp>
+        <p:nvSpPr>
+          <p:cNvPr id="6" name="TextBox 5"/>
+          <p:cNvSpPr txBox="1"/>
+          <p:nvPr/>
+        </p:nvSpPr>
+        <p:spPr>
+          <a:xfrm>
+            <a:off x="457200" y="1792224"/>
+            <a:ext cx="8229600" cy="438912"/>
+          </a:xfrm>
+          <a:prstGeom prst="rect">
+            <a:avLst/>
+          </a:prstGeom>
+          <a:noFill/>
+        </p:spPr>
+        <p:txBody>
+          <a:bodyPr wrap="square">
+            <a:spAutoFit/>
+          </a:bodyPr>
+          <a:lstStyle/>
+          <a:p>
+            <a:pPr algn="l"/>
+            <a:r>
+              <a:rPr sz="1000" b="0">
+                <a:solidFill>
+                  <a:srgbClr val="FFFFFF"/>
+                </a:solidFill>
+              </a:rPr>
+              <a:t>A:  Telecom data is sensitive — operator configs, failure rates, cell IDs cannot leave premises. Ollama runs phi3:mini fully local. Rule-based fallback ensures system works even without GPU.</a:t>
+            </a:r>
+          </a:p>
+        </p:txBody>
+      </p:sp>
+      <p:sp>
+        <p:nvSpPr>
+          <p:cNvPr id="7" name="TextBox 6"/>
+          <p:cNvSpPr txBox="1"/>
+          <p:nvPr/>
+        </p:nvSpPr>
+        <p:spPr>
+          <a:xfrm>
+            <a:off x="274320" y="2322576"/>
+            <a:ext cx="8412480" cy="274320"/>
+          </a:xfrm>
+          <a:prstGeom prst="rect">
+            <a:avLst/>
+          </a:prstGeom>
+          <a:noFill/>
+        </p:spPr>
+        <p:txBody>
+          <a:bodyPr wrap="square">
+            <a:spAutoFit/>
+          </a:bodyPr>
+          <a:lstStyle/>
+          <a:p>
+            <a:pPr algn="l"/>
+            <a:r>
+              <a:rPr sz="1200" b="1">
+                <a:solidFill>
+                  <a:srgbClr val="FF9400"/>
+                </a:solidFill>
+              </a:rPr>
+              <a:t>Q:  How does the RAG know 3GPP specs?</a:t>
+            </a:r>
+          </a:p>
+        </p:txBody>
+      </p:sp>
+      <p:sp>
+        <p:nvSpPr>
+          <p:cNvPr id="8" name="TextBox 7"/>
+          <p:cNvSpPr txBox="1"/>
+          <p:nvPr/>
+        </p:nvSpPr>
+        <p:spPr>
+          <a:xfrm>
+            <a:off x="457200" y="2596896"/>
+            <a:ext cx="8229600" cy="438912"/>
+          </a:xfrm>
+          <a:prstGeom prst="rect">
+            <a:avLst/>
+          </a:prstGeom>
+          <a:noFill/>
+        </p:spPr>
+        <p:txBody>
+          <a:bodyPr wrap="square">
+            <a:spAutoFit/>
+          </a:bodyPr>
+          <a:lstStyle/>
+          <a:p>
+            <a:pPr algn="l"/>
+            <a:r>
+              <a:rPr sz="1000" b="0">
+                <a:solidFill>
+                  <a:srgbClr val="FFFFFF"/>
+                </a:solidFill>
+              </a:rPr>
+              <a:t>A:  38 curated spec excerpts from TS 24.501/38.413/38.331/38.473/38.463/38.423 are embedded with all-MiniLM-L6-v2 into a FAISS index. Each anomaly retrieves top-5 relevant chunks by cosine similarity.</a:t>
+            </a:r>
+          </a:p>
+        </p:txBody>
+      </p:sp>
+      <p:sp>
+        <p:nvSpPr>
+          <p:cNvPr id="9" name="TextBox 8"/>
+          <p:cNvSpPr txBox="1"/>
+          <p:nvPr/>
+        </p:nvSpPr>
+        <p:spPr>
+          <a:xfrm>
+            <a:off x="274320" y="3127248"/>
+            <a:ext cx="8412480" cy="274320"/>
+          </a:xfrm>
+          <a:prstGeom prst="rect">
+            <a:avLst/>
+          </a:prstGeom>
+          <a:noFill/>
+        </p:spPr>
+        <p:txBody>
+          <a:bodyPr wrap="square">
+            <a:spAutoFit/>
+          </a:bodyPr>
+          <a:lstStyle/>
+          <a:p>
+            <a:pPr algn="l"/>
+            <a:r>
+              <a:rPr sz="1200" b="1">
+                <a:solidFill>
+                  <a:srgbClr val="FF9400"/>
+                </a:solidFill>
+              </a:rPr>
+              <a:t>Q:  What is the feedback loop?</a:t>
+            </a:r>
+          </a:p>
+        </p:txBody>
+      </p:sp>
+      <p:sp>
+        <p:nvSpPr>
+          <p:cNvPr id="10" name="TextBox 9"/>
+          <p:cNvSpPr txBox="1"/>
+          <p:nvPr/>
+        </p:nvSpPr>
+        <p:spPr>
+          <a:xfrm>
+            <a:off x="457200" y="3401568"/>
+            <a:ext cx="8229600" cy="438912"/>
+          </a:xfrm>
+          <a:prstGeom prst="rect">
+            <a:avLst/>
+          </a:prstGeom>
+          <a:noFill/>
+        </p:spPr>
+        <p:txBody>
+          <a:bodyPr wrap="square">
+            <a:spAutoFit/>
+          </a:bodyPr>
+          <a:lstStyle/>
+          <a:p>
+            <a:pPr algn="l"/>
+            <a:r>
+              <a:rPr sz="1000" b="0">
+                <a:solidFill>
+                  <a:srgbClr val="FFFFFF"/>
+                </a:solidFill>
+              </a:rPr>
+              <a:t>A:  Engineers mark TP/FP/Uncertain on each anomaly card. Nightly cron reads FP rate per detector and adjusts contamination/sensitivity. Formula: new_param = base + α×(fp_rate − target). This prevents false positive accumulation over time.</a:t>
+            </a:r>
+          </a:p>
+        </p:txBody>
+      </p:sp>
+      <p:sp>
+        <p:nvSpPr>
+          <p:cNvPr id="11" name="TextBox 10"/>
+          <p:cNvSpPr txBox="1"/>
+          <p:nvPr/>
+        </p:nvSpPr>
+        <p:spPr>
+          <a:xfrm>
+            <a:off x="274320" y="3931920"/>
+            <a:ext cx="8412480" cy="274320"/>
+          </a:xfrm>
+          <a:prstGeom prst="rect">
+            <a:avLst/>
+          </a:prstGeom>
+          <a:noFill/>
+        </p:spPr>
+        <p:txBody>
+          <a:bodyPr wrap="square">
+            <a:spAutoFit/>
+          </a:bodyPr>
+          <a:lstStyle/>
+          <a:p>
+            <a:pPr algn="l"/>
+            <a:r>
+              <a:rPr sz="1200" b="1">
+                <a:solidFill>
+                  <a:srgbClr val="FF9400"/>
+                </a:solidFill>
+              </a:rPr>
+              <a:t>Q:  What is the detection latency?</a:t>
+            </a:r>
+          </a:p>
+        </p:txBody>
+      </p:sp>
+      <p:sp>
+        <p:nvSpPr>
+          <p:cNvPr id="12" name="TextBox 11"/>
+          <p:cNvSpPr txBox="1"/>
+          <p:nvPr/>
+        </p:nvSpPr>
+        <p:spPr>
+          <a:xfrm>
+            <a:off x="457200" y="4206240"/>
+            <a:ext cx="8229600" cy="438912"/>
+          </a:xfrm>
+          <a:prstGeom prst="rect">
+            <a:avLst/>
+          </a:prstGeom>
+          <a:noFill/>
+        </p:spPr>
+        <p:txBody>
+          <a:bodyPr wrap="square">
+            <a:spAutoFit/>
+          </a:bodyPr>
+          <a:lstStyle/>
+          <a:p>
+            <a:pPr algn="l"/>
+            <a:r>
+              <a:rPr sz="1000" b="0">
+                <a:solidFill>
+                  <a:srgbClr val="FFFFFF"/>
+                </a:solidFill>
+              </a:rPr>
+              <a:t>A:  PCAP: ~5s for 500 procedures · KPI: ~3s for 400 rows · Stats: ~1s for 300 rows. Rule-based + IF are fastest; LSTM adds ~1s. --no-llm flag gives sub-2s total.</a:t>
+            </a:r>
+          </a:p>
+        </p:txBody>
+      </p:sp>
+    </p:spTree>
+  </p:cSld>
+  <p:clrMapOvr>
+    <a:masterClrMapping/>
+  </p:clrMapOvr>
+</p:sld>
+</file>
+
+<file path=ppt/slides/slide12.xml><?xml version="1.0" encoding="utf-8"?>
+<p:sld xmlns:a="http://schemas.openxmlformats.org/drawingml/2006/main" xmlns:p="http://schemas.openxmlformats.org/presentationml/2006/main" xmlns:r="http://schemas.openxmlformats.org/officeDocument/2006/relationships">
+  <p:cSld>
+    <p:bg>
+      <p:bgPr>
+        <a:solidFill>
+          <a:srgbClr val="0D1B2A"/>
+        </a:solidFill>
+        <a:effectLst/>
+      </p:bgPr>
+    </p:bg>
+    <p:spTree>
+      <p:nvGrpSpPr>
+        <p:cNvPr id="1" name=""/>
+        <p:cNvGrpSpPr/>
+        <p:nvPr/>
+      </p:nvGrpSpPr>
+      <p:grpSpPr/>
+      <p:sp>
+        <p:nvSpPr>
+          <p:cNvPr id="2" name="TextBox 1"/>
+          <p:cNvSpPr txBox="1"/>
+          <p:nvPr/>
+        </p:nvSpPr>
+        <p:spPr>
+          <a:xfrm>
+            <a:off x="457200" y="640080"/>
+            <a:ext cx="8229600" cy="640080"/>
+          </a:xfrm>
+          <a:prstGeom prst="rect">
+            <a:avLst/>
+          </a:prstGeom>
+          <a:noFill/>
+        </p:spPr>
+        <p:txBody>
+          <a:bodyPr wrap="square">
             <a:spAutoFit/>
           </a:bodyPr>
           <a:lstStyle/>
           <a:p>
             <a:pPr algn="ctr"/>
             <a:r>
-              <a:rPr sz="3600" b="1">
+              <a:rPr sz="3800" b="1">
                 <a:solidFill>
                   <a:srgbClr val="2DC653"/>
                 </a:solidFill>
               </a:rPr>
-              <a:t>Project Complete ✅</a:t>
+              <a:t>Phase I — Complete ✅</a:t>
             </a:r>
           </a:p>
         </p:txBody>
@@ -3309,258 +4689,504 @@
         </p:nvSpPr>
         <p:spPr>
           <a:xfrm>
-            <a:off x="914400" y="1737360"/>
-            <a:ext cx="7498079" cy="365760"/>
-          </a:xfrm>
-          <a:prstGeom prst="rect">
-            <a:avLst/>
-          </a:prstGeom>
-          <a:noFill/>
-        </p:spPr>
-        <p:txBody>
-          <a:bodyPr wrap="none">
-            <a:spAutoFit/>
-          </a:bodyPr>
-          <a:lstStyle/>
-          <a:p>
-            <a:r>
-              <a:rPr sz="1400">
+            <a:off x="457200" y="1371600"/>
+            <a:ext cx="8229600" cy="274320"/>
+          </a:xfrm>
+          <a:prstGeom prst="rect">
+            <a:avLst/>
+          </a:prstGeom>
+          <a:noFill/>
+        </p:spPr>
+        <p:txBody>
+          <a:bodyPr wrap="square">
+            <a:spAutoFit/>
+          </a:bodyPr>
+          <a:lstStyle/>
+          <a:p>
+            <a:pPr algn="ctr"/>
+            <a:r>
+              <a:rPr sz="1400" b="0">
+                <a:solidFill>
+                  <a:srgbClr val="AAAAAA"/>
+                </a:solidFill>
+              </a:rPr>
+              <a:t>M.Tech Data Science  |  PES Bangalore — Great Learning</a:t>
+            </a:r>
+          </a:p>
+        </p:txBody>
+      </p:sp>
+      <p:sp>
+        <p:nvSpPr>
+          <p:cNvPr id="4" name="TextBox 3"/>
+          <p:cNvSpPr txBox="1"/>
+          <p:nvPr/>
+        </p:nvSpPr>
+        <p:spPr>
+          <a:xfrm>
+            <a:off x="914400" y="1783080"/>
+            <a:ext cx="1371600" cy="347472"/>
+          </a:xfrm>
+          <a:prstGeom prst="rect">
+            <a:avLst/>
+          </a:prstGeom>
+          <a:noFill/>
+        </p:spPr>
+        <p:txBody>
+          <a:bodyPr wrap="square">
+            <a:spAutoFit/>
+          </a:bodyPr>
+          <a:lstStyle/>
+          <a:p>
+            <a:pPr algn="l"/>
+            <a:r>
+              <a:rPr sz="1300" b="1">
+                <a:solidFill>
+                  <a:srgbClr val="00B4D8"/>
+                </a:solidFill>
+              </a:rPr>
+              <a:t>✅  Parsers</a:t>
+            </a:r>
+          </a:p>
+        </p:txBody>
+      </p:sp>
+      <p:sp>
+        <p:nvSpPr>
+          <p:cNvPr id="5" name="TextBox 4"/>
+          <p:cNvSpPr txBox="1"/>
+          <p:nvPr/>
+        </p:nvSpPr>
+        <p:spPr>
+          <a:xfrm>
+            <a:off x="2377440" y="1783080"/>
+            <a:ext cx="6400800" cy="347472"/>
+          </a:xfrm>
+          <a:prstGeom prst="rect">
+            <a:avLst/>
+          </a:prstGeom>
+          <a:noFill/>
+        </p:spPr>
+        <p:txBody>
+          <a:bodyPr wrap="square">
+            <a:spAutoFit/>
+          </a:bodyPr>
+          <a:lstStyle/>
+          <a:p>
+            <a:pPr algn="l"/>
+            <a:r>
+              <a:rPr sz="1200" b="0">
                 <a:solidFill>
                   <a:srgbClr val="FFFFFF"/>
                 </a:solidFill>
               </a:rPr>
-              <a:t>✅  6 × 3GPP protocols parsed (NAS · NGAP · RRC · F1AP · E1AP · XnAP)</a:t>
-            </a:r>
-          </a:p>
-        </p:txBody>
-      </p:sp>
-      <p:sp>
-        <p:nvSpPr>
-          <p:cNvPr id="4" name="TextBox 3"/>
-          <p:cNvSpPr txBox="1"/>
-          <p:nvPr/>
-        </p:nvSpPr>
-        <p:spPr>
-          <a:xfrm>
-            <a:off x="914400" y="2121408"/>
-            <a:ext cx="7498079" cy="365760"/>
-          </a:xfrm>
-          <a:prstGeom prst="rect">
-            <a:avLst/>
-          </a:prstGeom>
-          <a:noFill/>
-        </p:spPr>
-        <p:txBody>
-          <a:bodyPr wrap="none">
-            <a:spAutoFit/>
-          </a:bodyPr>
-          <a:lstStyle/>
-          <a:p>
-            <a:r>
-              <a:rPr sz="1400">
+              <a:t>6 × 3GPP protocols (NAS · NGAP · RRC · F1AP · E1AP · XnAP) + KPI + Stats (srsRAN/OAI/NIST)</a:t>
+            </a:r>
+          </a:p>
+        </p:txBody>
+      </p:sp>
+      <p:sp>
+        <p:nvSpPr>
+          <p:cNvPr id="6" name="TextBox 5"/>
+          <p:cNvSpPr txBox="1"/>
+          <p:nvPr/>
+        </p:nvSpPr>
+        <p:spPr>
+          <a:xfrm>
+            <a:off x="914400" y="2185416"/>
+            <a:ext cx="1371600" cy="347472"/>
+          </a:xfrm>
+          <a:prstGeom prst="rect">
+            <a:avLst/>
+          </a:prstGeom>
+          <a:noFill/>
+        </p:spPr>
+        <p:txBody>
+          <a:bodyPr wrap="square">
+            <a:spAutoFit/>
+          </a:bodyPr>
+          <a:lstStyle/>
+          <a:p>
+            <a:pPr algn="l"/>
+            <a:r>
+              <a:rPr sz="1300" b="1">
+                <a:solidFill>
+                  <a:srgbClr val="00B4D8"/>
+                </a:solidFill>
+              </a:rPr>
+              <a:t>✅  Detection</a:t>
+            </a:r>
+          </a:p>
+        </p:txBody>
+      </p:sp>
+      <p:sp>
+        <p:nvSpPr>
+          <p:cNvPr id="7" name="TextBox 6"/>
+          <p:cNvSpPr txBox="1"/>
+          <p:nvPr/>
+        </p:nvSpPr>
+        <p:spPr>
+          <a:xfrm>
+            <a:off x="2377440" y="2185416"/>
+            <a:ext cx="6400800" cy="347472"/>
+          </a:xfrm>
+          <a:prstGeom prst="rect">
+            <a:avLst/>
+          </a:prstGeom>
+          <a:noFill/>
+        </p:spPr>
+        <p:txBody>
+          <a:bodyPr wrap="square">
+            <a:spAutoFit/>
+          </a:bodyPr>
+          <a:lstStyle/>
+          <a:p>
+            <a:pPr algn="l"/>
+            <a:r>
+              <a:rPr sz="1200" b="0">
                 <a:solidFill>
                   <a:srgbClr val="FFFFFF"/>
                 </a:solidFill>
               </a:rPr>
-              <a:t>✅  6 × PCAP anomaly detectors + 6 × KPI anomaly detectors</a:t>
-            </a:r>
-          </a:p>
-        </p:txBody>
-      </p:sp>
-      <p:sp>
-        <p:nvSpPr>
-          <p:cNvPr id="5" name="TextBox 4"/>
-          <p:cNvSpPr txBox="1"/>
-          <p:nvPr/>
-        </p:nvSpPr>
-        <p:spPr>
-          <a:xfrm>
-            <a:off x="914400" y="2505456"/>
-            <a:ext cx="7498079" cy="365760"/>
-          </a:xfrm>
-          <a:prstGeom prst="rect">
-            <a:avLst/>
-          </a:prstGeom>
-          <a:noFill/>
-        </p:spPr>
-        <p:txBody>
-          <a:bodyPr wrap="none">
-            <a:spAutoFit/>
-          </a:bodyPr>
-          <a:lstStyle/>
-          <a:p>
-            <a:r>
-              <a:rPr sz="1400">
+              <a:t>18 detectors — 6 PCAP + 6 KPI + 6 Stats  (Isolation Forest through Bollinger Bands)</a:t>
+            </a:r>
+          </a:p>
+        </p:txBody>
+      </p:sp>
+      <p:sp>
+        <p:nvSpPr>
+          <p:cNvPr id="8" name="TextBox 7"/>
+          <p:cNvSpPr txBox="1"/>
+          <p:nvPr/>
+        </p:nvSpPr>
+        <p:spPr>
+          <a:xfrm>
+            <a:off x="914400" y="2587752"/>
+            <a:ext cx="1371600" cy="347472"/>
+          </a:xfrm>
+          <a:prstGeom prst="rect">
+            <a:avLst/>
+          </a:prstGeom>
+          <a:noFill/>
+        </p:spPr>
+        <p:txBody>
+          <a:bodyPr wrap="square">
+            <a:spAutoFit/>
+          </a:bodyPr>
+          <a:lstStyle/>
+          <a:p>
+            <a:pPr algn="l"/>
+            <a:r>
+              <a:rPr sz="1300" b="1">
+                <a:solidFill>
+                  <a:srgbClr val="00B4D8"/>
+                </a:solidFill>
+              </a:rPr>
+              <a:t>✅  LLM</a:t>
+            </a:r>
+          </a:p>
+        </p:txBody>
+      </p:sp>
+      <p:sp>
+        <p:nvSpPr>
+          <p:cNvPr id="9" name="TextBox 8"/>
+          <p:cNvSpPr txBox="1"/>
+          <p:nvPr/>
+        </p:nvSpPr>
+        <p:spPr>
+          <a:xfrm>
+            <a:off x="2377440" y="2587752"/>
+            <a:ext cx="6400800" cy="347472"/>
+          </a:xfrm>
+          <a:prstGeom prst="rect">
+            <a:avLst/>
+          </a:prstGeom>
+          <a:noFill/>
+        </p:spPr>
+        <p:txBody>
+          <a:bodyPr wrap="square">
+            <a:spAutoFit/>
+          </a:bodyPr>
+          <a:lstStyle/>
+          <a:p>
+            <a:pPr algn="l"/>
+            <a:r>
+              <a:rPr sz="1200" b="0">
                 <a:solidFill>
                   <a:srgbClr val="FFFFFF"/>
                 </a:solidFill>
               </a:rPr>
-              <a:t>✅  RAG pipeline: 38 spec chunks · FAISS · MiniLM · Ollama (phi3:mini)</a:t>
-            </a:r>
-          </a:p>
-        </p:txBody>
-      </p:sp>
-      <p:sp>
-        <p:nvSpPr>
-          <p:cNvPr id="6" name="TextBox 5"/>
-          <p:cNvSpPr txBox="1"/>
-          <p:nvPr/>
-        </p:nvSpPr>
-        <p:spPr>
-          <a:xfrm>
-            <a:off x="914400" y="2889504"/>
-            <a:ext cx="7498079" cy="365760"/>
-          </a:xfrm>
-          <a:prstGeom prst="rect">
-            <a:avLst/>
-          </a:prstGeom>
-          <a:noFill/>
-        </p:spPr>
-        <p:txBody>
-          <a:bodyPr wrap="none">
-            <a:spAutoFit/>
-          </a:bodyPr>
-          <a:lstStyle/>
-          <a:p>
-            <a:r>
-              <a:rPr sz="1400">
+              <a:t>RAG pipeline: 38 spec chunks · FAISS · MiniLM · Ollama phi3:mini + rule-based fallback</a:t>
+            </a:r>
+          </a:p>
+        </p:txBody>
+      </p:sp>
+      <p:sp>
+        <p:nvSpPr>
+          <p:cNvPr id="10" name="TextBox 9"/>
+          <p:cNvSpPr txBox="1"/>
+          <p:nvPr/>
+        </p:nvSpPr>
+        <p:spPr>
+          <a:xfrm>
+            <a:off x="914400" y="2990088"/>
+            <a:ext cx="1371600" cy="347472"/>
+          </a:xfrm>
+          <a:prstGeom prst="rect">
+            <a:avLst/>
+          </a:prstGeom>
+          <a:noFill/>
+        </p:spPr>
+        <p:txBody>
+          <a:bodyPr wrap="square">
+            <a:spAutoFit/>
+          </a:bodyPr>
+          <a:lstStyle/>
+          <a:p>
+            <a:pPr algn="l"/>
+            <a:r>
+              <a:rPr sz="1300" b="1">
+                <a:solidFill>
+                  <a:srgbClr val="00B4D8"/>
+                </a:solidFill>
+              </a:rPr>
+              <a:t>✅  MLOps</a:t>
+            </a:r>
+          </a:p>
+        </p:txBody>
+      </p:sp>
+      <p:sp>
+        <p:nvSpPr>
+          <p:cNvPr id="11" name="TextBox 10"/>
+          <p:cNvSpPr txBox="1"/>
+          <p:nvPr/>
+        </p:nvSpPr>
+        <p:spPr>
+          <a:xfrm>
+            <a:off x="2377440" y="2990088"/>
+            <a:ext cx="6400800" cy="347472"/>
+          </a:xfrm>
+          <a:prstGeom prst="rect">
+            <a:avLst/>
+          </a:prstGeom>
+          <a:noFill/>
+        </p:spPr>
+        <p:txBody>
+          <a:bodyPr wrap="square">
+            <a:spAutoFit/>
+          </a:bodyPr>
+          <a:lstStyle/>
+          <a:p>
+            <a:pPr algn="l"/>
+            <a:r>
+              <a:rPr sz="1200" b="0">
                 <a:solidFill>
                   <a:srgbClr val="FFFFFF"/>
                 </a:solidFill>
               </a:rPr>
-              <a:t>✅  Streamlit dashboard with method comparison matrices</a:t>
-            </a:r>
-          </a:p>
-        </p:txBody>
-      </p:sp>
-      <p:sp>
-        <p:nvSpPr>
-          <p:cNvPr id="7" name="TextBox 6"/>
-          <p:cNvSpPr txBox="1"/>
-          <p:nvPr/>
-        </p:nvSpPr>
-        <p:spPr>
-          <a:xfrm>
-            <a:off x="914400" y="3273552"/>
-            <a:ext cx="7498079" cy="365760"/>
-          </a:xfrm>
-          <a:prstGeom prst="rect">
-            <a:avLst/>
-          </a:prstGeom>
-          <a:noFill/>
-        </p:spPr>
-        <p:txBody>
-          <a:bodyPr wrap="none">
-            <a:spAutoFit/>
-          </a:bodyPr>
-          <a:lstStyle/>
-          <a:p>
-            <a:r>
-              <a:rPr sz="1400">
+              <a:t>Feedback loop → nightly retrainer + LSTM + Prophet 4h-ahead prediction layer</a:t>
+            </a:r>
+          </a:p>
+        </p:txBody>
+      </p:sp>
+      <p:sp>
+        <p:nvSpPr>
+          <p:cNvPr id="12" name="TextBox 11"/>
+          <p:cNvSpPr txBox="1"/>
+          <p:nvPr/>
+        </p:nvSpPr>
+        <p:spPr>
+          <a:xfrm>
+            <a:off x="914400" y="3392424"/>
+            <a:ext cx="1371600" cy="347472"/>
+          </a:xfrm>
+          <a:prstGeom prst="rect">
+            <a:avLst/>
+          </a:prstGeom>
+          <a:noFill/>
+        </p:spPr>
+        <p:txBody>
+          <a:bodyPr wrap="square">
+            <a:spAutoFit/>
+          </a:bodyPr>
+          <a:lstStyle/>
+          <a:p>
+            <a:pPr algn="l"/>
+            <a:r>
+              <a:rPr sz="1300" b="1">
+                <a:solidFill>
+                  <a:srgbClr val="00B4D8"/>
+                </a:solidFill>
+              </a:rPr>
+              <a:t>✅  Interfaces</a:t>
+            </a:r>
+          </a:p>
+        </p:txBody>
+      </p:sp>
+      <p:sp>
+        <p:nvSpPr>
+          <p:cNvPr id="13" name="TextBox 12"/>
+          <p:cNvSpPr txBox="1"/>
+          <p:nvPr/>
+        </p:nvSpPr>
+        <p:spPr>
+          <a:xfrm>
+            <a:off x="2377440" y="3392424"/>
+            <a:ext cx="6400800" cy="347472"/>
+          </a:xfrm>
+          <a:prstGeom prst="rect">
+            <a:avLst/>
+          </a:prstGeom>
+          <a:noFill/>
+        </p:spPr>
+        <p:txBody>
+          <a:bodyPr wrap="square">
+            <a:spAutoFit/>
+          </a:bodyPr>
+          <a:lstStyle/>
+          <a:p>
+            <a:pPr algn="l"/>
+            <a:r>
+              <a:rPr sz="1200" b="0">
                 <a:solidFill>
                   <a:srgbClr val="FFFFFF"/>
                 </a:solidFill>
               </a:rPr>
-              <a:t>✅  FastAPI REST API (POST /analyze/pcap, POST /analyze/kpi)</a:t>
-            </a:r>
-          </a:p>
-        </p:txBody>
-      </p:sp>
-      <p:sp>
-        <p:nvSpPr>
-          <p:cNvPr id="8" name="TextBox 7"/>
-          <p:cNvSpPr txBox="1"/>
-          <p:nvPr/>
-        </p:nvSpPr>
-        <p:spPr>
-          <a:xfrm>
-            <a:off x="914400" y="3657600"/>
-            <a:ext cx="7498079" cy="365760"/>
-          </a:xfrm>
-          <a:prstGeom prst="rect">
-            <a:avLst/>
-          </a:prstGeom>
-          <a:noFill/>
-        </p:spPr>
-        <p:txBody>
-          <a:bodyPr wrap="none">
-            <a:spAutoFit/>
-          </a:bodyPr>
-          <a:lstStyle/>
-          <a:p>
-            <a:r>
-              <a:rPr sz="1400">
+              <a:t>Streamlit dashboard · FastAPI REST API · CLI orchestrator · Event Router</a:t>
+            </a:r>
+          </a:p>
+        </p:txBody>
+      </p:sp>
+      <p:sp>
+        <p:nvSpPr>
+          <p:cNvPr id="14" name="TextBox 13"/>
+          <p:cNvSpPr txBox="1"/>
+          <p:nvPr/>
+        </p:nvSpPr>
+        <p:spPr>
+          <a:xfrm>
+            <a:off x="914400" y="3794760"/>
+            <a:ext cx="1371600" cy="347472"/>
+          </a:xfrm>
+          <a:prstGeom prst="rect">
+            <a:avLst/>
+          </a:prstGeom>
+          <a:noFill/>
+        </p:spPr>
+        <p:txBody>
+          <a:bodyPr wrap="square">
+            <a:spAutoFit/>
+          </a:bodyPr>
+          <a:lstStyle/>
+          <a:p>
+            <a:pPr algn="l"/>
+            <a:r>
+              <a:rPr sz="1300" b="1">
+                <a:solidFill>
+                  <a:srgbClr val="00B4D8"/>
+                </a:solidFill>
+              </a:rPr>
+              <a:t>✅  Tests</a:t>
+            </a:r>
+          </a:p>
+        </p:txBody>
+      </p:sp>
+      <p:sp>
+        <p:nvSpPr>
+          <p:cNvPr id="15" name="TextBox 14"/>
+          <p:cNvSpPr txBox="1"/>
+          <p:nvPr/>
+        </p:nvSpPr>
+        <p:spPr>
+          <a:xfrm>
+            <a:off x="2377440" y="3794760"/>
+            <a:ext cx="6400800" cy="347472"/>
+          </a:xfrm>
+          <a:prstGeom prst="rect">
+            <a:avLst/>
+          </a:prstGeom>
+          <a:noFill/>
+        </p:spPr>
+        <p:txBody>
+          <a:bodyPr wrap="square">
+            <a:spAutoFit/>
+          </a:bodyPr>
+          <a:lstStyle/>
+          <a:p>
+            <a:pPr algn="l"/>
+            <a:r>
+              <a:rPr sz="1200" b="0">
                 <a:solidFill>
                   <a:srgbClr val="FFFFFF"/>
                 </a:solidFill>
               </a:rPr>
-              <a:t>✅  CLI orchestrator pipeline runner</a:t>
-            </a:r>
-          </a:p>
-        </p:txBody>
-      </p:sp>
-      <p:sp>
-        <p:nvSpPr>
-          <p:cNvPr id="9" name="TextBox 8"/>
-          <p:cNvSpPr txBox="1"/>
-          <p:nvPr/>
-        </p:nvSpPr>
-        <p:spPr>
-          <a:xfrm>
-            <a:off x="914400" y="4041648"/>
-            <a:ext cx="7498079" cy="365760"/>
-          </a:xfrm>
-          <a:prstGeom prst="rect">
-            <a:avLst/>
-          </a:prstGeom>
-          <a:noFill/>
-        </p:spPr>
-        <p:txBody>
-          <a:bodyPr wrap="none">
-            <a:spAutoFit/>
-          </a:bodyPr>
-          <a:lstStyle/>
-          <a:p>
-            <a:r>
-              <a:rPr sz="1400">
+              <a:t>56 tests passing — walking skeleton + real integration + event + feedback + retrainer</a:t>
+            </a:r>
+          </a:p>
+        </p:txBody>
+      </p:sp>
+      <p:sp>
+        <p:nvSpPr>
+          <p:cNvPr id="16" name="TextBox 15"/>
+          <p:cNvSpPr txBox="1"/>
+          <p:nvPr/>
+        </p:nvSpPr>
+        <p:spPr>
+          <a:xfrm>
+            <a:off x="914400" y="4197096"/>
+            <a:ext cx="1371600" cy="347472"/>
+          </a:xfrm>
+          <a:prstGeom prst="rect">
+            <a:avLst/>
+          </a:prstGeom>
+          <a:noFill/>
+        </p:spPr>
+        <p:txBody>
+          <a:bodyPr wrap="square">
+            <a:spAutoFit/>
+          </a:bodyPr>
+          <a:lstStyle/>
+          <a:p>
+            <a:pPr algn="l"/>
+            <a:r>
+              <a:rPr sz="1300" b="1">
+                <a:solidFill>
+                  <a:srgbClr val="00B4D8"/>
+                </a:solidFill>
+              </a:rPr>
+              <a:t>✅  Docs</a:t>
+            </a:r>
+          </a:p>
+        </p:txBody>
+      </p:sp>
+      <p:sp>
+        <p:nvSpPr>
+          <p:cNvPr id="17" name="TextBox 16"/>
+          <p:cNvSpPr txBox="1"/>
+          <p:nvPr/>
+        </p:nvSpPr>
+        <p:spPr>
+          <a:xfrm>
+            <a:off x="2377440" y="4197096"/>
+            <a:ext cx="6400800" cy="347472"/>
+          </a:xfrm>
+          <a:prstGeom prst="rect">
+            <a:avLst/>
+          </a:prstGeom>
+          <a:noFill/>
+        </p:spPr>
+        <p:txBody>
+          <a:bodyPr wrap="square">
+            <a:spAutoFit/>
+          </a:bodyPr>
+          <a:lstStyle/>
+          <a:p>
+            <a:pPr algn="l"/>
+            <a:r>
+              <a:rPr sz="1200" b="0">
                 <a:solidFill>
                   <a:srgbClr val="FFFFFF"/>
                 </a:solidFill>
               </a:rPr>
-              <a:t>✅  20 tests passing — stub + real integration</a:t>
-            </a:r>
-          </a:p>
-        </p:txBody>
-      </p:sp>
-      <p:sp>
-        <p:nvSpPr>
-          <p:cNvPr id="10" name="TextBox 9"/>
-          <p:cNvSpPr txBox="1"/>
-          <p:nvPr/>
-        </p:nvSpPr>
-        <p:spPr>
-          <a:xfrm>
-            <a:off x="914400" y="4425696"/>
-            <a:ext cx="7498079" cy="365760"/>
-          </a:xfrm>
-          <a:prstGeom prst="rect">
-            <a:avLst/>
-          </a:prstGeom>
-          <a:noFill/>
-        </p:spPr>
-        <p:txBody>
-          <a:bodyPr wrap="none">
-            <a:spAutoFit/>
-          </a:bodyPr>
-          <a:lstStyle/>
-          <a:p>
-            <a:r>
-              <a:rPr sz="1400">
-                <a:solidFill>
-                  <a:srgbClr val="FFFFFF"/>
-                </a:solidFill>
-              </a:rPr>
-              <a:t>✅  4 reviewer PPTs (PCAP methods, KPI methods, this deck)</a:t>
+              <a:t>4 PPTs (PCAP methods · KPI methods · Stats · this deck) + Study Guide + SETUP</a:t>
             </a:r>
           </a:p>
         </p:txBody>
@@ -3599,7 +5225,7 @@
         </p:nvSpPr>
         <p:spPr>
           <a:xfrm>
-            <a:off x="274320" y="182880"/>
+            <a:off x="274320" y="137160"/>
             <a:ext cx="8595360" cy="457200"/>
           </a:xfrm>
           <a:prstGeom prst="rect">
@@ -3608,18 +5234,19 @@
           <a:noFill/>
         </p:spPr>
         <p:txBody>
-          <a:bodyPr wrap="none">
-            <a:spAutoFit/>
-          </a:bodyPr>
-          <a:lstStyle/>
-          <a:p>
-            <a:r>
-              <a:rPr sz="2600" b="1">
+          <a:bodyPr wrap="square">
+            <a:spAutoFit/>
+          </a:bodyPr>
+          <a:lstStyle/>
+          <a:p>
+            <a:pPr algn="l"/>
+            <a:r>
+              <a:rPr sz="2400" b="1">
                 <a:solidFill>
                   <a:srgbClr val="00B4D8"/>
                 </a:solidFill>
               </a:rPr>
-              <a:t>🏗️  System Architecture</a:t>
+              <a:t>🏗️  System Architecture — 5 Layers</a:t>
             </a:r>
           </a:p>
         </p:txBody>
@@ -3632,27 +5259,28 @@
         </p:nvSpPr>
         <p:spPr>
           <a:xfrm>
-            <a:off x="274320" y="731520"/>
-            <a:ext cx="2011680" cy="320040"/>
-          </a:xfrm>
-          <a:prstGeom prst="rect">
-            <a:avLst/>
-          </a:prstGeom>
-          <a:noFill/>
-        </p:spPr>
-        <p:txBody>
-          <a:bodyPr wrap="none">
-            <a:spAutoFit/>
-          </a:bodyPr>
-          <a:lstStyle/>
-          <a:p>
+            <a:off x="274320" y="685800"/>
+            <a:ext cx="2286000" cy="274320"/>
+          </a:xfrm>
+          <a:prstGeom prst="rect">
+            <a:avLst/>
+          </a:prstGeom>
+          <a:noFill/>
+        </p:spPr>
+        <p:txBody>
+          <a:bodyPr wrap="square">
+            <a:spAutoFit/>
+          </a:bodyPr>
+          <a:lstStyle/>
+          <a:p>
+            <a:pPr algn="l"/>
             <a:r>
               <a:rPr sz="900" b="1">
                 <a:solidFill>
                   <a:srgbClr val="00B4D8"/>
                 </a:solidFill>
               </a:rPr>
-              <a:t>INPUT LAYER</a:t>
+              <a:t>INPUT</a:t>
             </a:r>
           </a:p>
         </p:txBody>
@@ -3665,7 +5293,7 @@
         </p:nvSpPr>
         <p:spPr>
           <a:xfrm>
-            <a:off x="274320" y="1005840"/>
+            <a:off x="274320" y="941832"/>
             <a:ext cx="8412480" cy="411480"/>
           </a:xfrm>
           <a:prstGeom prst="rect">
@@ -3674,19 +5302,19 @@
           <a:noFill/>
         </p:spPr>
         <p:txBody>
-          <a:bodyPr wrap="none">
-            <a:spAutoFit/>
-          </a:bodyPr>
-          <a:lstStyle/>
-          <a:p>
-            <a:pPr algn="l"/>
-            <a:r>
-              <a:rPr sz="1100">
+          <a:bodyPr wrap="square">
+            <a:spAutoFit/>
+          </a:bodyPr>
+          <a:lstStyle/>
+          <a:p>
+            <a:pPr algn="l"/>
+            <a:r>
+              <a:rPr sz="1000" b="0">
                 <a:solidFill>
                   <a:srgbClr val="FFFFFF"/>
                 </a:solidFill>
               </a:rPr>
-              <a:t>PCAP (pyshark/scapy)  ·  KPI Excel / CSV</a:t>
+              <a:t>PCAP (.pcap/.pcapng)  ·  DU/CU Stats (srsRAN / OAI / NIST CSV/Parquet)  ·  KPI Time-series (Excel/CSV)</a:t>
             </a:r>
           </a:p>
         </p:txBody>
@@ -3699,27 +5327,28 @@
         </p:nvSpPr>
         <p:spPr>
           <a:xfrm>
-            <a:off x="274320" y="1508760"/>
-            <a:ext cx="2011680" cy="320040"/>
-          </a:xfrm>
-          <a:prstGeom prst="rect">
-            <a:avLst/>
-          </a:prstGeom>
-          <a:noFill/>
-        </p:spPr>
-        <p:txBody>
-          <a:bodyPr wrap="none">
-            <a:spAutoFit/>
-          </a:bodyPr>
-          <a:lstStyle/>
-          <a:p>
+            <a:off x="274320" y="1417320"/>
+            <a:ext cx="2286000" cy="274320"/>
+          </a:xfrm>
+          <a:prstGeom prst="rect">
+            <a:avLst/>
+          </a:prstGeom>
+          <a:noFill/>
+        </p:spPr>
+        <p:txBody>
+          <a:bodyPr wrap="square">
+            <a:spAutoFit/>
+          </a:bodyPr>
+          <a:lstStyle/>
+          <a:p>
+            <a:pPr algn="l"/>
             <a:r>
               <a:rPr sz="900" b="1">
                 <a:solidFill>
                   <a:srgbClr val="2DC653"/>
                 </a:solidFill>
               </a:rPr>
-              <a:t>PARSING LAYER  — TS 24.501 / 38.413 / 38.331 / 38.473 / 38.463 / 38.423</a:t>
+              <a:t>PARSING  —  TS 24.501 / 38.413 / 38.331 / 38.473 / 38.463 / 38.423</a:t>
             </a:r>
           </a:p>
         </p:txBody>
@@ -3732,7 +5361,7 @@
         </p:nvSpPr>
         <p:spPr>
           <a:xfrm>
-            <a:off x="274320" y="1783080"/>
+            <a:off x="274320" y="1673352"/>
             <a:ext cx="8412480" cy="411480"/>
           </a:xfrm>
           <a:prstGeom prst="rect">
@@ -3741,19 +5370,19 @@
           <a:noFill/>
         </p:spPr>
         <p:txBody>
-          <a:bodyPr wrap="none">
-            <a:spAutoFit/>
-          </a:bodyPr>
-          <a:lstStyle/>
-          <a:p>
-            <a:pPr algn="l"/>
-            <a:r>
-              <a:rPr sz="1100">
+          <a:bodyPr wrap="square">
+            <a:spAutoFit/>
+          </a:bodyPr>
+          <a:lstStyle/>
+          <a:p>
+            <a:pPr algn="l"/>
+            <a:r>
+              <a:rPr sz="1000" b="0">
                 <a:solidFill>
                   <a:srgbClr val="FFFFFF"/>
                 </a:solidFill>
               </a:rPr>
-              <a:t>NAS  ·  NGAP  ·  RRC  ·  F1AP  ·  E1AP  ·  XnAP</a:t>
+              <a:t>NAS  ·  NGAP  ·  RRC  ·  F1AP  ·  E1AP  ·  XnAP  ·  KPI Parser  ·  Stats Parser (srsRAN/OAI/NIST)</a:t>
             </a:r>
           </a:p>
         </p:txBody>
@@ -3766,27 +5395,28 @@
         </p:nvSpPr>
         <p:spPr>
           <a:xfrm>
-            <a:off x="274320" y="2468880"/>
-            <a:ext cx="2011680" cy="320040"/>
-          </a:xfrm>
-          <a:prstGeom prst="rect">
-            <a:avLst/>
-          </a:prstGeom>
-          <a:noFill/>
-        </p:spPr>
-        <p:txBody>
-          <a:bodyPr wrap="none">
-            <a:spAutoFit/>
-          </a:bodyPr>
-          <a:lstStyle/>
-          <a:p>
+            <a:off x="274320" y="2240280"/>
+            <a:ext cx="2286000" cy="274320"/>
+          </a:xfrm>
+          <a:prstGeom prst="rect">
+            <a:avLst/>
+          </a:prstGeom>
+          <a:noFill/>
+        </p:spPr>
+        <p:txBody>
+          <a:bodyPr wrap="square">
+            <a:spAutoFit/>
+          </a:bodyPr>
+          <a:lstStyle/>
+          <a:p>
+            <a:pPr algn="l"/>
             <a:r>
               <a:rPr sz="900" b="1">
                 <a:solidFill>
                   <a:srgbClr val="FF9400"/>
                 </a:solidFill>
               </a:rPr>
-              <a:t>DETECTION LAYER  (PCAP: 6 detectors | KPI: 6 methods)</a:t>
+              <a:t>DETECTION  —  18 detectors total</a:t>
             </a:r>
           </a:p>
         </p:txBody>
@@ -3799,7 +5429,7 @@
         </p:nvSpPr>
         <p:spPr>
           <a:xfrm>
-            <a:off x="274320" y="2743200"/>
+            <a:off x="274320" y="2496312"/>
             <a:ext cx="8412480" cy="411480"/>
           </a:xfrm>
           <a:prstGeom prst="rect">
@@ -3808,19 +5438,19 @@
           <a:noFill/>
         </p:spPr>
         <p:txBody>
-          <a:bodyPr wrap="none">
-            <a:spAutoFit/>
-          </a:bodyPr>
-          <a:lstStyle/>
-          <a:p>
-            <a:pPr algn="l"/>
-            <a:r>
-              <a:rPr sz="1100">
+          <a:bodyPr wrap="square">
+            <a:spAutoFit/>
+          </a:bodyPr>
+          <a:lstStyle/>
+          <a:p>
+            <a:pPr algn="l"/>
+            <a:r>
+              <a:rPr sz="1000" b="0">
                 <a:solidFill>
                   <a:srgbClr val="FFFFFF"/>
                 </a:solidFill>
               </a:rPr>
-              <a:t>Isolation Forest  ·  Statistical  ·  OC-SVM  ·  LOF  ·  Elliptic Env.  ·  LSTM-AE  ·  Threshold  ·  Peer Comparison  ·  Trend  ·  IQR  ·  CUSUM  ·  Bollinger</a:t>
+              <a:t>PCAP: IF · Statistical · OC-SVM · LOF · Elliptic Env. · LSTM-AE    KPI: Threshold · Peer Comp. · Trend · IQR · CUSUM · Bollinger    Stats: same 6 methods on L1/L2 counters</a:t>
             </a:r>
           </a:p>
         </p:txBody>
@@ -3833,27 +5463,28 @@
         </p:nvSpPr>
         <p:spPr>
           <a:xfrm>
-            <a:off x="274320" y="3429000"/>
-            <a:ext cx="2011680" cy="320040"/>
-          </a:xfrm>
-          <a:prstGeom prst="rect">
-            <a:avLst/>
-          </a:prstGeom>
-          <a:noFill/>
-        </p:spPr>
-        <p:txBody>
-          <a:bodyPr wrap="none">
-            <a:spAutoFit/>
-          </a:bodyPr>
-          <a:lstStyle/>
-          <a:p>
+            <a:off x="274320" y="3063240"/>
+            <a:ext cx="2286000" cy="274320"/>
+          </a:xfrm>
+          <a:prstGeom prst="rect">
+            <a:avLst/>
+          </a:prstGeom>
+          <a:noFill/>
+        </p:spPr>
+        <p:txBody>
+          <a:bodyPr wrap="square">
+            <a:spAutoFit/>
+          </a:bodyPr>
+          <a:lstStyle/>
+          <a:p>
+            <a:pPr algn="l"/>
             <a:r>
               <a:rPr sz="900" b="1">
                 <a:solidFill>
                   <a:srgbClr val="A060FF"/>
                 </a:solidFill>
               </a:rPr>
-              <a:t>RAG + LLM LAYER  — 3GPP spec chunks + Ollama (phi3:mini)</a:t>
+              <a:t>RAG + LLM  —  FAISS · MiniLM · Ollama phi3:mini  +  Feedback Loop + Prediction</a:t>
             </a:r>
           </a:p>
         </p:txBody>
@@ -3866,7 +5497,7 @@
         </p:nvSpPr>
         <p:spPr>
           <a:xfrm>
-            <a:off x="274320" y="3703320"/>
+            <a:off x="274320" y="3319272"/>
             <a:ext cx="8412480" cy="411480"/>
           </a:xfrm>
           <a:prstGeom prst="rect">
@@ -3875,19 +5506,19 @@
           <a:noFill/>
         </p:spPr>
         <p:txBody>
-          <a:bodyPr wrap="none">
-            <a:spAutoFit/>
-          </a:bodyPr>
-          <a:lstStyle/>
-          <a:p>
-            <a:pPr algn="l"/>
-            <a:r>
-              <a:rPr sz="1100">
+          <a:bodyPr wrap="square">
+            <a:spAutoFit/>
+          </a:bodyPr>
+          <a:lstStyle/>
+          <a:p>
+            <a:pPr algn="l"/>
+            <a:r>
+              <a:rPr sz="1000" b="0">
                 <a:solidFill>
                   <a:srgbClr val="FFFFFF"/>
                 </a:solidFill>
               </a:rPr>
-              <a:t>FAISS index  ·  MiniLM embeddings  ·  Rule-based fallback</a:t>
+              <a:t>Query build → FAISS top-5 retrieval → Ollama prompt → structured JSON output  |  Feedback store → nightly retrainer  |  LSTM + Prophet 4h-ahead prediction</a:t>
             </a:r>
           </a:p>
         </p:txBody>
@@ -3900,27 +5531,28 @@
         </p:nvSpPr>
         <p:spPr>
           <a:xfrm>
-            <a:off x="274320" y="4251960"/>
-            <a:ext cx="2011680" cy="320040"/>
-          </a:xfrm>
-          <a:prstGeom prst="rect">
-            <a:avLst/>
-          </a:prstGeom>
-          <a:noFill/>
-        </p:spPr>
-        <p:txBody>
-          <a:bodyPr wrap="none">
-            <a:spAutoFit/>
-          </a:bodyPr>
-          <a:lstStyle/>
-          <a:p>
+            <a:off x="274320" y="3840480"/>
+            <a:ext cx="2286000" cy="274320"/>
+          </a:xfrm>
+          <a:prstGeom prst="rect">
+            <a:avLst/>
+          </a:prstGeom>
+          <a:noFill/>
+        </p:spPr>
+        <p:txBody>
+          <a:bodyPr wrap="square">
+            <a:spAutoFit/>
+          </a:bodyPr>
+          <a:lstStyle/>
+          <a:p>
+            <a:pPr algn="l"/>
             <a:r>
               <a:rPr sz="900" b="1">
                 <a:solidFill>
                   <a:srgbClr val="FF4D9F"/>
                 </a:solidFill>
               </a:rPr>
-              <a:t>OUTPUT LAYER</a:t>
+              <a:t>OUTPUT</a:t>
             </a:r>
           </a:p>
         </p:txBody>
@@ -3933,7 +5565,7 @@
         </p:nvSpPr>
         <p:spPr>
           <a:xfrm>
-            <a:off x="274320" y="4526280"/>
+            <a:off x="274320" y="4096512"/>
             <a:ext cx="8412480" cy="411480"/>
           </a:xfrm>
           <a:prstGeom prst="rect">
@@ -3942,19 +5574,19 @@
           <a:noFill/>
         </p:spPr>
         <p:txBody>
-          <a:bodyPr wrap="none">
-            <a:spAutoFit/>
-          </a:bodyPr>
-          <a:lstStyle/>
-          <a:p>
-            <a:pPr algn="l"/>
-            <a:r>
-              <a:rPr sz="1100">
+          <a:bodyPr wrap="square">
+            <a:spAutoFit/>
+          </a:bodyPr>
+          <a:lstStyle/>
+          <a:p>
+            <a:pPr algn="l"/>
+            <a:r>
+              <a:rPr sz="1000" b="0">
                 <a:solidFill>
                   <a:srgbClr val="FFFFFF"/>
                 </a:solidFill>
               </a:rPr>
-              <a:t>Streamlit Dashboard  ·  FastAPI REST API  ·  CLI Pipeline Runner</a:t>
+              <a:t>Streamlit Dashboard (http://localhost:8501)  ·  FastAPI REST API (:8000)  ·  CLI Pipeline Runner</a:t>
             </a:r>
           </a:p>
         </p:txBody>
@@ -3993,7 +5625,7 @@
         </p:nvSpPr>
         <p:spPr>
           <a:xfrm>
-            <a:off x="274320" y="182880"/>
+            <a:off x="274320" y="137160"/>
             <a:ext cx="8595360" cy="457200"/>
           </a:xfrm>
           <a:prstGeom prst="rect">
@@ -4002,18 +5634,19 @@
           <a:noFill/>
         </p:spPr>
         <p:txBody>
-          <a:bodyPr wrap="none">
-            <a:spAutoFit/>
-          </a:bodyPr>
-          <a:lstStyle/>
-          <a:p>
-            <a:r>
-              <a:rPr sz="2600" b="1">
+          <a:bodyPr wrap="square">
+            <a:spAutoFit/>
+          </a:bodyPr>
+          <a:lstStyle/>
+          <a:p>
+            <a:pPr algn="l"/>
+            <a:r>
+              <a:rPr sz="2400" b="1">
                 <a:solidFill>
                   <a:srgbClr val="00B4D8"/>
                 </a:solidFill>
               </a:rPr>
-              <a:t>📡  Parsed 3GPP Protocols</a:t>
+              <a:t>📡  3GPP Protocols Parsed — Full 5G-NR Stack</a:t>
             </a:r>
           </a:p>
         </p:txBody>
@@ -4026,7 +5659,7 @@
         </p:nvSpPr>
         <p:spPr>
           <a:xfrm>
-            <a:off x="274320" y="822960"/>
+            <a:off x="274320" y="777240"/>
             <a:ext cx="2286000" cy="274320"/>
           </a:xfrm>
           <a:prstGeom prst="rect">
@@ -4035,13 +5668,14 @@
           <a:noFill/>
         </p:spPr>
         <p:txBody>
-          <a:bodyPr wrap="none">
-            <a:spAutoFit/>
-          </a:bodyPr>
-          <a:lstStyle/>
-          <a:p>
-            <a:r>
-              <a:rPr sz="1300" b="1">
+          <a:bodyPr wrap="square">
+            <a:spAutoFit/>
+          </a:bodyPr>
+          <a:lstStyle/>
+          <a:p>
+            <a:pPr algn="l"/>
+            <a:r>
+              <a:rPr sz="1200" b="1">
                 <a:solidFill>
                   <a:srgbClr val="2DC653"/>
                 </a:solidFill>
@@ -4059,7 +5693,7 @@
         </p:nvSpPr>
         <p:spPr>
           <a:xfrm>
-            <a:off x="2651760" y="822960"/>
+            <a:off x="2651760" y="777240"/>
             <a:ext cx="4572000" cy="274320"/>
           </a:xfrm>
           <a:prstGeom prst="rect">
@@ -4068,18 +5702,19 @@
           <a:noFill/>
         </p:spPr>
         <p:txBody>
-          <a:bodyPr wrap="none">
-            <a:spAutoFit/>
-          </a:bodyPr>
-          <a:lstStyle/>
-          <a:p>
-            <a:r>
-              <a:rPr sz="1000">
+          <a:bodyPr wrap="square">
+            <a:spAutoFit/>
+          </a:bodyPr>
+          <a:lstStyle/>
+          <a:p>
+            <a:pPr algn="l"/>
+            <a:r>
+              <a:rPr sz="1000" b="0">
                 <a:solidFill>
                   <a:srgbClr val="FFFFFF"/>
                 </a:solidFill>
               </a:rPr>
-              <a:t>Registration · Auth · Security Mode · PDU Session · Deregistration</a:t>
+              <a:t>Registration · Auth · Security Mode · PDU Session Establishment · Deregistration</a:t>
             </a:r>
           </a:p>
         </p:txBody>
@@ -4092,7 +5727,7 @@
         </p:nvSpPr>
         <p:spPr>
           <a:xfrm>
-            <a:off x="7315200" y="822960"/>
+            <a:off x="7315200" y="777240"/>
             <a:ext cx="1645920" cy="274320"/>
           </a:xfrm>
           <a:prstGeom prst="rect">
@@ -4101,19 +5736,19 @@
           <a:noFill/>
         </p:spPr>
         <p:txBody>
-          <a:bodyPr wrap="none">
+          <a:bodyPr wrap="square">
             <a:spAutoFit/>
           </a:bodyPr>
           <a:lstStyle/>
           <a:p>
             <a:pPr algn="r"/>
             <a:r>
-              <a:rPr sz="900">
+              <a:rPr sz="900" b="0">
                 <a:solidFill>
                   <a:srgbClr val="AAAAAA"/>
                 </a:solidFill>
               </a:rPr>
-              <a:t>AMF ↔ UE  (N1)</a:t>
+              <a:t>UE ↔ AMF  (N1)</a:t>
             </a:r>
           </a:p>
         </p:txBody>
@@ -4126,7 +5761,7 @@
         </p:nvSpPr>
         <p:spPr>
           <a:xfrm>
-            <a:off x="274320" y="1508760"/>
+            <a:off x="274320" y="1444752"/>
             <a:ext cx="2286000" cy="274320"/>
           </a:xfrm>
           <a:prstGeom prst="rect">
@@ -4135,13 +5770,14 @@
           <a:noFill/>
         </p:spPr>
         <p:txBody>
-          <a:bodyPr wrap="none">
-            <a:spAutoFit/>
-          </a:bodyPr>
-          <a:lstStyle/>
-          <a:p>
-            <a:r>
-              <a:rPr sz="1300" b="1">
+          <a:bodyPr wrap="square">
+            <a:spAutoFit/>
+          </a:bodyPr>
+          <a:lstStyle/>
+          <a:p>
+            <a:pPr algn="l"/>
+            <a:r>
+              <a:rPr sz="1200" b="1">
                 <a:solidFill>
                   <a:srgbClr val="2DC653"/>
                 </a:solidFill>
@@ -4159,7 +5795,7 @@
         </p:nvSpPr>
         <p:spPr>
           <a:xfrm>
-            <a:off x="2651760" y="1508760"/>
+            <a:off x="2651760" y="1444752"/>
             <a:ext cx="4572000" cy="274320"/>
           </a:xfrm>
           <a:prstGeom prst="rect">
@@ -4168,13 +5804,14 @@
           <a:noFill/>
         </p:spPr>
         <p:txBody>
-          <a:bodyPr wrap="none">
-            <a:spAutoFit/>
-          </a:bodyPr>
-          <a:lstStyle/>
-          <a:p>
-            <a:r>
-              <a:rPr sz="1000">
+          <a:bodyPr wrap="square">
+            <a:spAutoFit/>
+          </a:bodyPr>
+          <a:lstStyle/>
+          <a:p>
+            <a:pPr algn="l"/>
+            <a:r>
+              <a:rPr sz="1000" b="0">
                 <a:solidFill>
                   <a:srgbClr val="FFFFFF"/>
                 </a:solidFill>
@@ -4192,7 +5829,7 @@
         </p:nvSpPr>
         <p:spPr>
           <a:xfrm>
-            <a:off x="7315200" y="1508760"/>
+            <a:off x="7315200" y="1444752"/>
             <a:ext cx="1645920" cy="274320"/>
           </a:xfrm>
           <a:prstGeom prst="rect">
@@ -4201,14 +5838,14 @@
           <a:noFill/>
         </p:spPr>
         <p:txBody>
-          <a:bodyPr wrap="none">
+          <a:bodyPr wrap="square">
             <a:spAutoFit/>
           </a:bodyPr>
           <a:lstStyle/>
           <a:p>
             <a:pPr algn="r"/>
             <a:r>
-              <a:rPr sz="900">
+              <a:rPr sz="900" b="0">
                 <a:solidFill>
                   <a:srgbClr val="AAAAAA"/>
                 </a:solidFill>
@@ -4226,7 +5863,7 @@
         </p:nvSpPr>
         <p:spPr>
           <a:xfrm>
-            <a:off x="274320" y="2194560"/>
+            <a:off x="274320" y="2112264"/>
             <a:ext cx="2286000" cy="274320"/>
           </a:xfrm>
           <a:prstGeom prst="rect">
@@ -4235,13 +5872,14 @@
           <a:noFill/>
         </p:spPr>
         <p:txBody>
-          <a:bodyPr wrap="none">
-            <a:spAutoFit/>
-          </a:bodyPr>
-          <a:lstStyle/>
-          <a:p>
-            <a:r>
-              <a:rPr sz="1300" b="1">
+          <a:bodyPr wrap="square">
+            <a:spAutoFit/>
+          </a:bodyPr>
+          <a:lstStyle/>
+          <a:p>
+            <a:pPr algn="l"/>
+            <a:r>
+              <a:rPr sz="1200" b="1">
                 <a:solidFill>
                   <a:srgbClr val="2DC653"/>
                 </a:solidFill>
@@ -4259,7 +5897,7 @@
         </p:nvSpPr>
         <p:spPr>
           <a:xfrm>
-            <a:off x="2651760" y="2194560"/>
+            <a:off x="2651760" y="2112264"/>
             <a:ext cx="4572000" cy="274320"/>
           </a:xfrm>
           <a:prstGeom prst="rect">
@@ -4268,13 +5906,14 @@
           <a:noFill/>
         </p:spPr>
         <p:txBody>
-          <a:bodyPr wrap="none">
-            <a:spAutoFit/>
-          </a:bodyPr>
-          <a:lstStyle/>
-          <a:p>
-            <a:r>
-              <a:rPr sz="1000">
+          <a:bodyPr wrap="square">
+            <a:spAutoFit/>
+          </a:bodyPr>
+          <a:lstStyle/>
+          <a:p>
+            <a:pPr algn="l"/>
+            <a:r>
+              <a:rPr sz="1000" b="0">
                 <a:solidFill>
                   <a:srgbClr val="FFFFFF"/>
                 </a:solidFill>
@@ -4292,7 +5931,7 @@
         </p:nvSpPr>
         <p:spPr>
           <a:xfrm>
-            <a:off x="7315200" y="2194560"/>
+            <a:off x="7315200" y="2112264"/>
             <a:ext cx="1645920" cy="274320"/>
           </a:xfrm>
           <a:prstGeom prst="rect">
@@ -4301,14 +5940,14 @@
           <a:noFill/>
         </p:spPr>
         <p:txBody>
-          <a:bodyPr wrap="none">
+          <a:bodyPr wrap="square">
             <a:spAutoFit/>
           </a:bodyPr>
           <a:lstStyle/>
           <a:p>
             <a:pPr algn="r"/>
             <a:r>
-              <a:rPr sz="900">
+              <a:rPr sz="900" b="0">
                 <a:solidFill>
                   <a:srgbClr val="AAAAAA"/>
                 </a:solidFill>
@@ -4326,7 +5965,7 @@
         </p:nvSpPr>
         <p:spPr>
           <a:xfrm>
-            <a:off x="274320" y="2880360"/>
+            <a:off x="274320" y="2779776"/>
             <a:ext cx="2286000" cy="274320"/>
           </a:xfrm>
           <a:prstGeom prst="rect">
@@ -4335,13 +5974,14 @@
           <a:noFill/>
         </p:spPr>
         <p:txBody>
-          <a:bodyPr wrap="none">
-            <a:spAutoFit/>
-          </a:bodyPr>
-          <a:lstStyle/>
-          <a:p>
-            <a:r>
-              <a:rPr sz="1300" b="1">
+          <a:bodyPr wrap="square">
+            <a:spAutoFit/>
+          </a:bodyPr>
+          <a:lstStyle/>
+          <a:p>
+            <a:pPr algn="l"/>
+            <a:r>
+              <a:rPr sz="1200" b="1">
                 <a:solidFill>
                   <a:srgbClr val="2DC653"/>
                 </a:solidFill>
@@ -4359,7 +5999,7 @@
         </p:nvSpPr>
         <p:spPr>
           <a:xfrm>
-            <a:off x="2651760" y="2880360"/>
+            <a:off x="2651760" y="2779776"/>
             <a:ext cx="4572000" cy="274320"/>
           </a:xfrm>
           <a:prstGeom prst="rect">
@@ -4368,13 +6008,14 @@
           <a:noFill/>
         </p:spPr>
         <p:txBody>
-          <a:bodyPr wrap="none">
-            <a:spAutoFit/>
-          </a:bodyPr>
-          <a:lstStyle/>
-          <a:p>
-            <a:r>
-              <a:rPr sz="1000">
+          <a:bodyPr wrap="square">
+            <a:spAutoFit/>
+          </a:bodyPr>
+          <a:lstStyle/>
+          <a:p>
+            <a:pPr algn="l"/>
+            <a:r>
+              <a:rPr sz="1000" b="0">
                 <a:solidFill>
                   <a:srgbClr val="FFFFFF"/>
                 </a:solidFill>
@@ -4392,7 +6033,7 @@
         </p:nvSpPr>
         <p:spPr>
           <a:xfrm>
-            <a:off x="7315200" y="2880360"/>
+            <a:off x="7315200" y="2779776"/>
             <a:ext cx="1645920" cy="274320"/>
           </a:xfrm>
           <a:prstGeom prst="rect">
@@ -4401,14 +6042,14 @@
           <a:noFill/>
         </p:spPr>
         <p:txBody>
-          <a:bodyPr wrap="none">
+          <a:bodyPr wrap="square">
             <a:spAutoFit/>
           </a:bodyPr>
           <a:lstStyle/>
           <a:p>
             <a:pPr algn="r"/>
             <a:r>
-              <a:rPr sz="900">
+              <a:rPr sz="900" b="0">
                 <a:solidFill>
                   <a:srgbClr val="AAAAAA"/>
                 </a:solidFill>
@@ -4426,7 +6067,7 @@
         </p:nvSpPr>
         <p:spPr>
           <a:xfrm>
-            <a:off x="274320" y="3566160"/>
+            <a:off x="274320" y="3447288"/>
             <a:ext cx="2286000" cy="274320"/>
           </a:xfrm>
           <a:prstGeom prst="rect">
@@ -4435,13 +6076,14 @@
           <a:noFill/>
         </p:spPr>
         <p:txBody>
-          <a:bodyPr wrap="none">
-            <a:spAutoFit/>
-          </a:bodyPr>
-          <a:lstStyle/>
-          <a:p>
-            <a:r>
-              <a:rPr sz="1300" b="1">
+          <a:bodyPr wrap="square">
+            <a:spAutoFit/>
+          </a:bodyPr>
+          <a:lstStyle/>
+          <a:p>
+            <a:pPr algn="l"/>
+            <a:r>
+              <a:rPr sz="1200" b="1">
                 <a:solidFill>
                   <a:srgbClr val="2DC653"/>
                 </a:solidFill>
@@ -4459,7 +6101,7 @@
         </p:nvSpPr>
         <p:spPr>
           <a:xfrm>
-            <a:off x="2651760" y="3566160"/>
+            <a:off x="2651760" y="3447288"/>
             <a:ext cx="4572000" cy="274320"/>
           </a:xfrm>
           <a:prstGeom prst="rect">
@@ -4468,13 +6110,14 @@
           <a:noFill/>
         </p:spPr>
         <p:txBody>
-          <a:bodyPr wrap="none">
-            <a:spAutoFit/>
-          </a:bodyPr>
-          <a:lstStyle/>
-          <a:p>
-            <a:r>
-              <a:rPr sz="1000">
+          <a:bodyPr wrap="square">
+            <a:spAutoFit/>
+          </a:bodyPr>
+          <a:lstStyle/>
+          <a:p>
+            <a:pPr algn="l"/>
+            <a:r>
+              <a:rPr sz="1000" b="0">
                 <a:solidFill>
                   <a:srgbClr val="FFFFFF"/>
                 </a:solidFill>
@@ -4492,7 +6135,7 @@
         </p:nvSpPr>
         <p:spPr>
           <a:xfrm>
-            <a:off x="7315200" y="3566160"/>
+            <a:off x="7315200" y="3447288"/>
             <a:ext cx="1645920" cy="274320"/>
           </a:xfrm>
           <a:prstGeom prst="rect">
@@ -4501,14 +6144,14 @@
           <a:noFill/>
         </p:spPr>
         <p:txBody>
-          <a:bodyPr wrap="none">
+          <a:bodyPr wrap="square">
             <a:spAutoFit/>
           </a:bodyPr>
           <a:lstStyle/>
           <a:p>
             <a:pPr algn="r"/>
             <a:r>
-              <a:rPr sz="900">
+              <a:rPr sz="900" b="0">
                 <a:solidFill>
                   <a:srgbClr val="AAAAAA"/>
                 </a:solidFill>
@@ -4526,7 +6169,7 @@
         </p:nvSpPr>
         <p:spPr>
           <a:xfrm>
-            <a:off x="274320" y="4251960"/>
+            <a:off x="274320" y="4114800"/>
             <a:ext cx="2286000" cy="274320"/>
           </a:xfrm>
           <a:prstGeom prst="rect">
@@ -4535,13 +6178,14 @@
           <a:noFill/>
         </p:spPr>
         <p:txBody>
-          <a:bodyPr wrap="none">
-            <a:spAutoFit/>
-          </a:bodyPr>
-          <a:lstStyle/>
-          <a:p>
-            <a:r>
-              <a:rPr sz="1300" b="1">
+          <a:bodyPr wrap="square">
+            <a:spAutoFit/>
+          </a:bodyPr>
+          <a:lstStyle/>
+          <a:p>
+            <a:pPr algn="l"/>
+            <a:r>
+              <a:rPr sz="1200" b="1">
                 <a:solidFill>
                   <a:srgbClr val="2DC653"/>
                 </a:solidFill>
@@ -4559,7 +6203,7 @@
         </p:nvSpPr>
         <p:spPr>
           <a:xfrm>
-            <a:off x="2651760" y="4251960"/>
+            <a:off x="2651760" y="4114800"/>
             <a:ext cx="4572000" cy="274320"/>
           </a:xfrm>
           <a:prstGeom prst="rect">
@@ -4568,13 +6212,14 @@
           <a:noFill/>
         </p:spPr>
         <p:txBody>
-          <a:bodyPr wrap="none">
-            <a:spAutoFit/>
-          </a:bodyPr>
-          <a:lstStyle/>
-          <a:p>
-            <a:r>
-              <a:rPr sz="1000">
+          <a:bodyPr wrap="square">
+            <a:spAutoFit/>
+          </a:bodyPr>
+          <a:lstStyle/>
+          <a:p>
+            <a:pPr algn="l"/>
+            <a:r>
+              <a:rPr sz="1000" b="0">
                 <a:solidFill>
                   <a:srgbClr val="FFFFFF"/>
                 </a:solidFill>
@@ -4592,7 +6237,7 @@
         </p:nvSpPr>
         <p:spPr>
           <a:xfrm>
-            <a:off x="7315200" y="4251960"/>
+            <a:off x="7315200" y="4114800"/>
             <a:ext cx="1645920" cy="274320"/>
           </a:xfrm>
           <a:prstGeom prst="rect">
@@ -4601,14 +6246,14 @@
           <a:noFill/>
         </p:spPr>
         <p:txBody>
-          <a:bodyPr wrap="none">
+          <a:bodyPr wrap="square">
             <a:spAutoFit/>
           </a:bodyPr>
           <a:lstStyle/>
           <a:p>
             <a:pPr algn="r"/>
             <a:r>
-              <a:rPr sz="900">
+              <a:rPr sz="900" b="0">
                 <a:solidFill>
                   <a:srgbClr val="AAAAAA"/>
                 </a:solidFill>
@@ -4652,7 +6297,7 @@
         </p:nvSpPr>
         <p:spPr>
           <a:xfrm>
-            <a:off x="274320" y="182880"/>
+            <a:off x="274320" y="137160"/>
             <a:ext cx="8595360" cy="457200"/>
           </a:xfrm>
           <a:prstGeom prst="rect">
@@ -4661,13 +6306,14 @@
           <a:noFill/>
         </p:spPr>
         <p:txBody>
-          <a:bodyPr wrap="none">
-            <a:spAutoFit/>
-          </a:bodyPr>
-          <a:lstStyle/>
-          <a:p>
-            <a:r>
-              <a:rPr sz="2200" b="1">
+          <a:bodyPr wrap="square">
+            <a:spAutoFit/>
+          </a:bodyPr>
+          <a:lstStyle/>
+          <a:p>
+            <a:pPr algn="l"/>
+            <a:r>
+              <a:rPr sz="2400" b="1">
                 <a:solidFill>
                   <a:srgbClr val="00B4D8"/>
                 </a:solidFill>
@@ -4685,20 +6331,21 @@
         </p:nvSpPr>
         <p:spPr>
           <a:xfrm>
-            <a:off x="274320" y="777240"/>
-            <a:ext cx="228600" cy="411480"/>
-          </a:xfrm>
-          <a:prstGeom prst="rect">
-            <a:avLst/>
-          </a:prstGeom>
-          <a:noFill/>
-        </p:spPr>
-        <p:txBody>
-          <a:bodyPr wrap="none">
-            <a:spAutoFit/>
-          </a:bodyPr>
-          <a:lstStyle/>
-          <a:p>
+            <a:off x="274320" y="749808"/>
+            <a:ext cx="228600" cy="384048"/>
+          </a:xfrm>
+          <a:prstGeom prst="rect">
+            <a:avLst/>
+          </a:prstGeom>
+          <a:noFill/>
+        </p:spPr>
+        <p:txBody>
+          <a:bodyPr wrap="square">
+            <a:spAutoFit/>
+          </a:bodyPr>
+          <a:lstStyle/>
+          <a:p>
+            <a:pPr algn="l"/>
             <a:r>
               <a:rPr sz="1400" b="1">
                 <a:solidFill>
@@ -4718,22 +6365,23 @@
         </p:nvSpPr>
         <p:spPr>
           <a:xfrm>
-            <a:off x="548640" y="777240"/>
-            <a:ext cx="2011680" cy="411480"/>
-          </a:xfrm>
-          <a:prstGeom prst="rect">
-            <a:avLst/>
-          </a:prstGeom>
-          <a:noFill/>
-        </p:spPr>
-        <p:txBody>
-          <a:bodyPr wrap="none">
-            <a:spAutoFit/>
-          </a:bodyPr>
-          <a:lstStyle/>
-          <a:p>
-            <a:r>
-              <a:rPr sz="1200" b="1">
+            <a:off x="548640" y="749808"/>
+            <a:ext cx="2011680" cy="384048"/>
+          </a:xfrm>
+          <a:prstGeom prst="rect">
+            <a:avLst/>
+          </a:prstGeom>
+          <a:noFill/>
+        </p:spPr>
+        <p:txBody>
+          <a:bodyPr wrap="square">
+            <a:spAutoFit/>
+          </a:bodyPr>
+          <a:lstStyle/>
+          <a:p>
+            <a:pPr algn="l"/>
+            <a:r>
+              <a:rPr sz="1100" b="1">
                 <a:solidFill>
                   <a:srgbClr val="FFFFFF"/>
                 </a:solidFill>
@@ -4751,20 +6399,21 @@
         </p:nvSpPr>
         <p:spPr>
           <a:xfrm>
-            <a:off x="2651760" y="777240"/>
-            <a:ext cx="1371600" cy="411480"/>
-          </a:xfrm>
-          <a:prstGeom prst="rect">
-            <a:avLst/>
-          </a:prstGeom>
-          <a:noFill/>
-        </p:spPr>
-        <p:txBody>
-          <a:bodyPr wrap="none">
-            <a:spAutoFit/>
-          </a:bodyPr>
-          <a:lstStyle/>
-          <a:p>
+            <a:off x="2606040" y="749808"/>
+            <a:ext cx="1463040" cy="384048"/>
+          </a:xfrm>
+          <a:prstGeom prst="rect">
+            <a:avLst/>
+          </a:prstGeom>
+          <a:noFill/>
+        </p:spPr>
+        <p:txBody>
+          <a:bodyPr wrap="square">
+            <a:spAutoFit/>
+          </a:bodyPr>
+          <a:lstStyle/>
+          <a:p>
+            <a:pPr algn="l"/>
             <a:r>
               <a:rPr sz="1000" b="0">
                 <a:solidFill>
@@ -4784,27 +6433,28 @@
         </p:nvSpPr>
         <p:spPr>
           <a:xfrm>
-            <a:off x="4114800" y="777240"/>
-            <a:ext cx="4754880" cy="411480"/>
-          </a:xfrm>
-          <a:prstGeom prst="rect">
-            <a:avLst/>
-          </a:prstGeom>
-          <a:noFill/>
-        </p:spPr>
-        <p:txBody>
-          <a:bodyPr wrap="none">
-            <a:spAutoFit/>
-          </a:bodyPr>
-          <a:lstStyle/>
-          <a:p>
+            <a:off x="4114800" y="749808"/>
+            <a:ext cx="4754880" cy="384048"/>
+          </a:xfrm>
+          <a:prstGeom prst="rect">
+            <a:avLst/>
+          </a:prstGeom>
+          <a:noFill/>
+        </p:spPr>
+        <p:txBody>
+          <a:bodyPr wrap="square">
+            <a:spAutoFit/>
+          </a:bodyPr>
+          <a:lstStyle/>
+          <a:p>
+            <a:pPr algn="l"/>
             <a:r>
               <a:rPr sz="1000" b="0">
                 <a:solidFill>
                   <a:srgbClr val="AAAAAA"/>
                 </a:solidFill>
               </a:rPr>
-              <a:t>Anomalies isolate in fewer tree splits. No distribution assumption. O(n log n). Handles 5G's &gt;99% normal rate.</a:t>
+              <a:t>Anomalies isolate in fewer tree splits. No distribution assumption. O(n log n). Best for global outliers.</a:t>
             </a:r>
           </a:p>
         </p:txBody>
@@ -4817,20 +6467,21 @@
         </p:nvSpPr>
         <p:spPr>
           <a:xfrm>
-            <a:off x="274320" y="1371600"/>
-            <a:ext cx="228600" cy="411480"/>
-          </a:xfrm>
-          <a:prstGeom prst="rect">
-            <a:avLst/>
-          </a:prstGeom>
-          <a:noFill/>
-        </p:spPr>
-        <p:txBody>
-          <a:bodyPr wrap="none">
-            <a:spAutoFit/>
-          </a:bodyPr>
-          <a:lstStyle/>
-          <a:p>
+            <a:off x="274320" y="1325880"/>
+            <a:ext cx="228600" cy="384048"/>
+          </a:xfrm>
+          <a:prstGeom prst="rect">
+            <a:avLst/>
+          </a:prstGeom>
+          <a:noFill/>
+        </p:spPr>
+        <p:txBody>
+          <a:bodyPr wrap="square">
+            <a:spAutoFit/>
+          </a:bodyPr>
+          <a:lstStyle/>
+          <a:p>
+            <a:pPr algn="l"/>
             <a:r>
               <a:rPr sz="1400" b="1">
                 <a:solidFill>
@@ -4850,22 +6501,23 @@
         </p:nvSpPr>
         <p:spPr>
           <a:xfrm>
-            <a:off x="548640" y="1371600"/>
-            <a:ext cx="2011680" cy="411480"/>
-          </a:xfrm>
-          <a:prstGeom prst="rect">
-            <a:avLst/>
-          </a:prstGeom>
-          <a:noFill/>
-        </p:spPr>
-        <p:txBody>
-          <a:bodyPr wrap="none">
-            <a:spAutoFit/>
-          </a:bodyPr>
-          <a:lstStyle/>
-          <a:p>
-            <a:r>
-              <a:rPr sz="1200" b="1">
+            <a:off x="548640" y="1325880"/>
+            <a:ext cx="2011680" cy="384048"/>
+          </a:xfrm>
+          <a:prstGeom prst="rect">
+            <a:avLst/>
+          </a:prstGeom>
+          <a:noFill/>
+        </p:spPr>
+        <p:txBody>
+          <a:bodyPr wrap="square">
+            <a:spAutoFit/>
+          </a:bodyPr>
+          <a:lstStyle/>
+          <a:p>
+            <a:pPr algn="l"/>
+            <a:r>
+              <a:rPr sz="1100" b="1">
                 <a:solidFill>
                   <a:srgbClr val="FFFFFF"/>
                 </a:solidFill>
@@ -4883,27 +6535,28 @@
         </p:nvSpPr>
         <p:spPr>
           <a:xfrm>
-            <a:off x="2651760" y="1371600"/>
-            <a:ext cx="1371600" cy="411480"/>
-          </a:xfrm>
-          <a:prstGeom prst="rect">
-            <a:avLst/>
-          </a:prstGeom>
-          <a:noFill/>
-        </p:spPr>
-        <p:txBody>
-          <a:bodyPr wrap="none">
-            <a:spAutoFit/>
-          </a:bodyPr>
-          <a:lstStyle/>
-          <a:p>
+            <a:off x="2606040" y="1325880"/>
+            <a:ext cx="1463040" cy="384048"/>
+          </a:xfrm>
+          <a:prstGeom prst="rect">
+            <a:avLst/>
+          </a:prstGeom>
+          <a:noFill/>
+        </p:spPr>
+        <p:txBody>
+          <a:bodyPr wrap="square">
+            <a:spAutoFit/>
+          </a:bodyPr>
+          <a:lstStyle/>
+          <a:p>
+            <a:pPr algn="l"/>
             <a:r>
               <a:rPr sz="1000" b="0">
                 <a:solidFill>
                   <a:srgbClr val="FF9400"/>
                 </a:solidFill>
               </a:rPr>
-              <a:t>Rule-based</a:t>
+              <a:t>Rule-based / domain</a:t>
             </a:r>
           </a:p>
         </p:txBody>
@@ -4916,27 +6569,28 @@
         </p:nvSpPr>
         <p:spPr>
           <a:xfrm>
-            <a:off x="4114800" y="1371600"/>
-            <a:ext cx="4754880" cy="411480"/>
-          </a:xfrm>
-          <a:prstGeom prst="rect">
-            <a:avLst/>
-          </a:prstGeom>
-          <a:noFill/>
-        </p:spPr>
-        <p:txBody>
-          <a:bodyPr wrap="none">
-            <a:spAutoFit/>
-          </a:bodyPr>
-          <a:lstStyle/>
-          <a:p>
+            <a:off x="4114800" y="1325880"/>
+            <a:ext cx="4754880" cy="384048"/>
+          </a:xfrm>
+          <a:prstGeom prst="rect">
+            <a:avLst/>
+          </a:prstGeom>
+          <a:noFill/>
+        </p:spPr>
+        <p:txBody>
+          <a:bodyPr wrap="square">
+            <a:spAutoFit/>
+          </a:bodyPr>
+          <a:lstStyle/>
+          <a:p>
+            <a:pPr algn="l"/>
             <a:r>
               <a:rPr sz="1000" b="0">
                 <a:solidFill>
                   <a:srgbClr val="AAAAAA"/>
                 </a:solidFill>
               </a:rPr>
-              <a:t>Encodes 3GPP SLA directly. 100% interpretable. Catches congestion chains, timeout storms.</a:t>
+              <a:t>Encodes 3GPP SLA directly. 100% interpretable. Catches congestion chains, timeout storms, NAS→NGAP cascades.</a:t>
             </a:r>
           </a:p>
         </p:txBody>
@@ -4949,20 +6603,21 @@
         </p:nvSpPr>
         <p:spPr>
           <a:xfrm>
-            <a:off x="274320" y="1965960"/>
-            <a:ext cx="228600" cy="411480"/>
-          </a:xfrm>
-          <a:prstGeom prst="rect">
-            <a:avLst/>
-          </a:prstGeom>
-          <a:noFill/>
-        </p:spPr>
-        <p:txBody>
-          <a:bodyPr wrap="none">
-            <a:spAutoFit/>
-          </a:bodyPr>
-          <a:lstStyle/>
-          <a:p>
+            <a:off x="274320" y="1901952"/>
+            <a:ext cx="228600" cy="384048"/>
+          </a:xfrm>
+          <a:prstGeom prst="rect">
+            <a:avLst/>
+          </a:prstGeom>
+          <a:noFill/>
+        </p:spPr>
+        <p:txBody>
+          <a:bodyPr wrap="square">
+            <a:spAutoFit/>
+          </a:bodyPr>
+          <a:lstStyle/>
+          <a:p>
+            <a:pPr algn="l"/>
             <a:r>
               <a:rPr sz="1400" b="1">
                 <a:solidFill>
@@ -4982,22 +6637,23 @@
         </p:nvSpPr>
         <p:spPr>
           <a:xfrm>
-            <a:off x="548640" y="1965960"/>
-            <a:ext cx="2011680" cy="411480"/>
-          </a:xfrm>
-          <a:prstGeom prst="rect">
-            <a:avLst/>
-          </a:prstGeom>
-          <a:noFill/>
-        </p:spPr>
-        <p:txBody>
-          <a:bodyPr wrap="none">
-            <a:spAutoFit/>
-          </a:bodyPr>
-          <a:lstStyle/>
-          <a:p>
-            <a:r>
-              <a:rPr sz="1200" b="1">
+            <a:off x="548640" y="1901952"/>
+            <a:ext cx="2011680" cy="384048"/>
+          </a:xfrm>
+          <a:prstGeom prst="rect">
+            <a:avLst/>
+          </a:prstGeom>
+          <a:noFill/>
+        </p:spPr>
+        <p:txBody>
+          <a:bodyPr wrap="square">
+            <a:spAutoFit/>
+          </a:bodyPr>
+          <a:lstStyle/>
+          <a:p>
+            <a:pPr algn="l"/>
+            <a:r>
+              <a:rPr sz="1100" b="1">
                 <a:solidFill>
                   <a:srgbClr val="FFFFFF"/>
                 </a:solidFill>
@@ -5015,20 +6671,21 @@
         </p:nvSpPr>
         <p:spPr>
           <a:xfrm>
-            <a:off x="2651760" y="1965960"/>
-            <a:ext cx="1371600" cy="411480"/>
-          </a:xfrm>
-          <a:prstGeom prst="rect">
-            <a:avLst/>
-          </a:prstGeom>
-          <a:noFill/>
-        </p:spPr>
-        <p:txBody>
-          <a:bodyPr wrap="none">
-            <a:spAutoFit/>
-          </a:bodyPr>
-          <a:lstStyle/>
-          <a:p>
+            <a:off x="2606040" y="1901952"/>
+            <a:ext cx="1463040" cy="384048"/>
+          </a:xfrm>
+          <a:prstGeom prst="rect">
+            <a:avLst/>
+          </a:prstGeom>
+          <a:noFill/>
+        </p:spPr>
+        <p:txBody>
+          <a:bodyPr wrap="square">
+            <a:spAutoFit/>
+          </a:bodyPr>
+          <a:lstStyle/>
+          <a:p>
+            <a:pPr algn="l"/>
             <a:r>
               <a:rPr sz="1000" b="0">
                 <a:solidFill>
@@ -5048,27 +6705,28 @@
         </p:nvSpPr>
         <p:spPr>
           <a:xfrm>
-            <a:off x="4114800" y="1965960"/>
-            <a:ext cx="4754880" cy="411480"/>
-          </a:xfrm>
-          <a:prstGeom prst="rect">
-            <a:avLst/>
-          </a:prstGeom>
-          <a:noFill/>
-        </p:spPr>
-        <p:txBody>
-          <a:bodyPr wrap="none">
-            <a:spAutoFit/>
-          </a:bodyPr>
-          <a:lstStyle/>
-          <a:p>
+            <a:off x="4114800" y="1901952"/>
+            <a:ext cx="4754880" cy="384048"/>
+          </a:xfrm>
+          <a:prstGeom prst="rect">
+            <a:avLst/>
+          </a:prstGeom>
+          <a:noFill/>
+        </p:spPr>
+        <p:txBody>
+          <a:bodyPr wrap="square">
+            <a:spAutoFit/>
+          </a:bodyPr>
+          <a:lstStyle/>
+          <a:p>
+            <a:pPr algn="l"/>
             <a:r>
               <a:rPr sz="1000" b="0">
                 <a:solidFill>
                   <a:srgbClr val="AAAAAA"/>
                 </a:solidFill>
               </a:rPr>
-              <a:t>Non-linear normal region in kernel space. Complements IF where normal cluster is compact.</a:t>
+              <a:t>Non-linear normal region in RKHS. Catches anomalies near but outside the normal boundary.</a:t>
             </a:r>
           </a:p>
         </p:txBody>
@@ -5081,20 +6739,21 @@
         </p:nvSpPr>
         <p:spPr>
           <a:xfrm>
-            <a:off x="274320" y="2560320"/>
-            <a:ext cx="228600" cy="411480"/>
-          </a:xfrm>
-          <a:prstGeom prst="rect">
-            <a:avLst/>
-          </a:prstGeom>
-          <a:noFill/>
-        </p:spPr>
-        <p:txBody>
-          <a:bodyPr wrap="none">
-            <a:spAutoFit/>
-          </a:bodyPr>
-          <a:lstStyle/>
-          <a:p>
+            <a:off x="274320" y="2478024"/>
+            <a:ext cx="228600" cy="384048"/>
+          </a:xfrm>
+          <a:prstGeom prst="rect">
+            <a:avLst/>
+          </a:prstGeom>
+          <a:noFill/>
+        </p:spPr>
+        <p:txBody>
+          <a:bodyPr wrap="square">
+            <a:spAutoFit/>
+          </a:bodyPr>
+          <a:lstStyle/>
+          <a:p>
+            <a:pPr algn="l"/>
             <a:r>
               <a:rPr sz="1400" b="1">
                 <a:solidFill>
@@ -5114,22 +6773,23 @@
         </p:nvSpPr>
         <p:spPr>
           <a:xfrm>
-            <a:off x="548640" y="2560320"/>
-            <a:ext cx="2011680" cy="411480"/>
-          </a:xfrm>
-          <a:prstGeom prst="rect">
-            <a:avLst/>
-          </a:prstGeom>
-          <a:noFill/>
-        </p:spPr>
-        <p:txBody>
-          <a:bodyPr wrap="none">
-            <a:spAutoFit/>
-          </a:bodyPr>
-          <a:lstStyle/>
-          <a:p>
-            <a:r>
-              <a:rPr sz="1200" b="1">
+            <a:off x="548640" y="2478024"/>
+            <a:ext cx="2011680" cy="384048"/>
+          </a:xfrm>
+          <a:prstGeom prst="rect">
+            <a:avLst/>
+          </a:prstGeom>
+          <a:noFill/>
+        </p:spPr>
+        <p:txBody>
+          <a:bodyPr wrap="square">
+            <a:spAutoFit/>
+          </a:bodyPr>
+          <a:lstStyle/>
+          <a:p>
+            <a:pPr algn="l"/>
+            <a:r>
+              <a:rPr sz="1100" b="1">
                 <a:solidFill>
                   <a:srgbClr val="FFFFFF"/>
                 </a:solidFill>
@@ -5147,20 +6807,21 @@
         </p:nvSpPr>
         <p:spPr>
           <a:xfrm>
-            <a:off x="2651760" y="2560320"/>
-            <a:ext cx="1371600" cy="411480"/>
-          </a:xfrm>
-          <a:prstGeom prst="rect">
-            <a:avLst/>
-          </a:prstGeom>
-          <a:noFill/>
-        </p:spPr>
-        <p:txBody>
-          <a:bodyPr wrap="none">
-            <a:spAutoFit/>
-          </a:bodyPr>
-          <a:lstStyle/>
-          <a:p>
+            <a:off x="2606040" y="2478024"/>
+            <a:ext cx="1463040" cy="384048"/>
+          </a:xfrm>
+          <a:prstGeom prst="rect">
+            <a:avLst/>
+          </a:prstGeom>
+          <a:noFill/>
+        </p:spPr>
+        <p:txBody>
+          <a:bodyPr wrap="square">
+            <a:spAutoFit/>
+          </a:bodyPr>
+          <a:lstStyle/>
+          <a:p>
+            <a:pPr algn="l"/>
             <a:r>
               <a:rPr sz="1000" b="0">
                 <a:solidFill>
@@ -5180,27 +6841,28 @@
         </p:nvSpPr>
         <p:spPr>
           <a:xfrm>
-            <a:off x="4114800" y="2560320"/>
-            <a:ext cx="4754880" cy="411480"/>
-          </a:xfrm>
-          <a:prstGeom prst="rect">
-            <a:avLst/>
-          </a:prstGeom>
-          <a:noFill/>
-        </p:spPr>
-        <p:txBody>
-          <a:bodyPr wrap="none">
-            <a:spAutoFit/>
-          </a:bodyPr>
-          <a:lstStyle/>
-          <a:p>
+            <a:off x="4114800" y="2478024"/>
+            <a:ext cx="4754880" cy="384048"/>
+          </a:xfrm>
+          <a:prstGeom prst="rect">
+            <a:avLst/>
+          </a:prstGeom>
+          <a:noFill/>
+        </p:spPr>
+        <p:txBody>
+          <a:bodyPr wrap="square">
+            <a:spAutoFit/>
+          </a:bodyPr>
+          <a:lstStyle/>
+          <a:p>
+            <a:pPr algn="l"/>
             <a:r>
               <a:rPr sz="1000" b="0">
                 <a:solidFill>
                   <a:srgbClr val="AAAAAA"/>
                 </a:solidFill>
               </a:rPr>
-              <a:t>Local Outlier Factor — catches cells 3σ below peer cluster even if globally OK.</a:t>
+              <a:t>Local Outlier Factor — catches cells 3σ below their local peer cluster even when globally within range.</a:t>
             </a:r>
           </a:p>
         </p:txBody>
@@ -5213,20 +6875,21 @@
         </p:nvSpPr>
         <p:spPr>
           <a:xfrm>
-            <a:off x="274320" y="3154680"/>
-            <a:ext cx="228600" cy="411480"/>
-          </a:xfrm>
-          <a:prstGeom prst="rect">
-            <a:avLst/>
-          </a:prstGeom>
-          <a:noFill/>
-        </p:spPr>
-        <p:txBody>
-          <a:bodyPr wrap="none">
-            <a:spAutoFit/>
-          </a:bodyPr>
-          <a:lstStyle/>
-          <a:p>
+            <a:off x="274320" y="3054096"/>
+            <a:ext cx="228600" cy="384048"/>
+          </a:xfrm>
+          <a:prstGeom prst="rect">
+            <a:avLst/>
+          </a:prstGeom>
+          <a:noFill/>
+        </p:spPr>
+        <p:txBody>
+          <a:bodyPr wrap="square">
+            <a:spAutoFit/>
+          </a:bodyPr>
+          <a:lstStyle/>
+          <a:p>
+            <a:pPr algn="l"/>
             <a:r>
               <a:rPr sz="1400" b="1">
                 <a:solidFill>
@@ -5246,22 +6909,23 @@
         </p:nvSpPr>
         <p:spPr>
           <a:xfrm>
-            <a:off x="548640" y="3154680"/>
-            <a:ext cx="2011680" cy="411480"/>
-          </a:xfrm>
-          <a:prstGeom prst="rect">
-            <a:avLst/>
-          </a:prstGeom>
-          <a:noFill/>
-        </p:spPr>
-        <p:txBody>
-          <a:bodyPr wrap="none">
-            <a:spAutoFit/>
-          </a:bodyPr>
-          <a:lstStyle/>
-          <a:p>
-            <a:r>
-              <a:rPr sz="1200" b="1">
+            <a:off x="548640" y="3054096"/>
+            <a:ext cx="2011680" cy="384048"/>
+          </a:xfrm>
+          <a:prstGeom prst="rect">
+            <a:avLst/>
+          </a:prstGeom>
+          <a:noFill/>
+        </p:spPr>
+        <p:txBody>
+          <a:bodyPr wrap="square">
+            <a:spAutoFit/>
+          </a:bodyPr>
+          <a:lstStyle/>
+          <a:p>
+            <a:pPr algn="l"/>
+            <a:r>
+              <a:rPr sz="1100" b="1">
                 <a:solidFill>
                   <a:srgbClr val="FFFFFF"/>
                 </a:solidFill>
@@ -5279,20 +6943,21 @@
         </p:nvSpPr>
         <p:spPr>
           <a:xfrm>
-            <a:off x="2651760" y="3154680"/>
-            <a:ext cx="1371600" cy="411480"/>
-          </a:xfrm>
-          <a:prstGeom prst="rect">
-            <a:avLst/>
-          </a:prstGeom>
-          <a:noFill/>
-        </p:spPr>
-        <p:txBody>
-          <a:bodyPr wrap="none">
-            <a:spAutoFit/>
-          </a:bodyPr>
-          <a:lstStyle/>
-          <a:p>
+            <a:off x="2606040" y="3054096"/>
+            <a:ext cx="1463040" cy="384048"/>
+          </a:xfrm>
+          <a:prstGeom prst="rect">
+            <a:avLst/>
+          </a:prstGeom>
+          <a:noFill/>
+        </p:spPr>
+        <p:txBody>
+          <a:bodyPr wrap="square">
+            <a:spAutoFit/>
+          </a:bodyPr>
+          <a:lstStyle/>
+          <a:p>
+            <a:pPr algn="l"/>
             <a:r>
               <a:rPr sz="1000" b="0">
                 <a:solidFill>
@@ -5312,27 +6977,28 @@
         </p:nvSpPr>
         <p:spPr>
           <a:xfrm>
-            <a:off x="4114800" y="3154680"/>
-            <a:ext cx="4754880" cy="411480"/>
-          </a:xfrm>
-          <a:prstGeom prst="rect">
-            <a:avLst/>
-          </a:prstGeom>
-          <a:noFill/>
-        </p:spPr>
-        <p:txBody>
-          <a:bodyPr wrap="none">
-            <a:spAutoFit/>
-          </a:bodyPr>
-          <a:lstStyle/>
-          <a:p>
+            <a:off x="4114800" y="3054096"/>
+            <a:ext cx="4754880" cy="384048"/>
+          </a:xfrm>
+          <a:prstGeom prst="rect">
+            <a:avLst/>
+          </a:prstGeom>
+          <a:noFill/>
+        </p:spPr>
+        <p:txBody>
+          <a:bodyPr wrap="square">
+            <a:spAutoFit/>
+          </a:bodyPr>
+          <a:lstStyle/>
+          <a:p>
+            <a:pPr algn="l"/>
             <a:r>
               <a:rPr sz="1000" b="0">
                 <a:solidFill>
                   <a:srgbClr val="AAAAAA"/>
                 </a:solidFill>
               </a:rPr>
-              <a:t>Fastest interpretable baseline. Sanity-checks the ML methods.</a:t>
+              <a:t>Fastest interpretable baseline. Fits multivariate Gaussian; sanity-checks all ML methods.</a:t>
             </a:r>
           </a:p>
         </p:txBody>
@@ -5345,20 +7011,21 @@
         </p:nvSpPr>
         <p:spPr>
           <a:xfrm>
-            <a:off x="274320" y="3749039"/>
-            <a:ext cx="228600" cy="411480"/>
-          </a:xfrm>
-          <a:prstGeom prst="rect">
-            <a:avLst/>
-          </a:prstGeom>
-          <a:noFill/>
-        </p:spPr>
-        <p:txBody>
-          <a:bodyPr wrap="none">
-            <a:spAutoFit/>
-          </a:bodyPr>
-          <a:lstStyle/>
-          <a:p>
+            <a:off x="274320" y="3630168"/>
+            <a:ext cx="228600" cy="384048"/>
+          </a:xfrm>
+          <a:prstGeom prst="rect">
+            <a:avLst/>
+          </a:prstGeom>
+          <a:noFill/>
+        </p:spPr>
+        <p:txBody>
+          <a:bodyPr wrap="square">
+            <a:spAutoFit/>
+          </a:bodyPr>
+          <a:lstStyle/>
+          <a:p>
+            <a:pPr algn="l"/>
             <a:r>
               <a:rPr sz="1400" b="1">
                 <a:solidFill>
@@ -5378,22 +7045,23 @@
         </p:nvSpPr>
         <p:spPr>
           <a:xfrm>
-            <a:off x="548640" y="3749039"/>
-            <a:ext cx="2011680" cy="411480"/>
-          </a:xfrm>
-          <a:prstGeom prst="rect">
-            <a:avLst/>
-          </a:prstGeom>
-          <a:noFill/>
-        </p:spPr>
-        <p:txBody>
-          <a:bodyPr wrap="none">
-            <a:spAutoFit/>
-          </a:bodyPr>
-          <a:lstStyle/>
-          <a:p>
-            <a:r>
-              <a:rPr sz="1200" b="1">
+            <a:off x="548640" y="3630168"/>
+            <a:ext cx="2011680" cy="384048"/>
+          </a:xfrm>
+          <a:prstGeom prst="rect">
+            <a:avLst/>
+          </a:prstGeom>
+          <a:noFill/>
+        </p:spPr>
+        <p:txBody>
+          <a:bodyPr wrap="square">
+            <a:spAutoFit/>
+          </a:bodyPr>
+          <a:lstStyle/>
+          <a:p>
+            <a:pPr algn="l"/>
+            <a:r>
+              <a:rPr sz="1100" b="1">
                 <a:solidFill>
                   <a:srgbClr val="FFFFFF"/>
                 </a:solidFill>
@@ -5411,20 +7079,21 @@
         </p:nvSpPr>
         <p:spPr>
           <a:xfrm>
-            <a:off x="2651760" y="3749039"/>
-            <a:ext cx="1371600" cy="411480"/>
-          </a:xfrm>
-          <a:prstGeom prst="rect">
-            <a:avLst/>
-          </a:prstGeom>
-          <a:noFill/>
-        </p:spPr>
-        <p:txBody>
-          <a:bodyPr wrap="none">
-            <a:spAutoFit/>
-          </a:bodyPr>
-          <a:lstStyle/>
-          <a:p>
+            <a:off x="2606040" y="3630168"/>
+            <a:ext cx="1463040" cy="384048"/>
+          </a:xfrm>
+          <a:prstGeom prst="rect">
+            <a:avLst/>
+          </a:prstGeom>
+          <a:noFill/>
+        </p:spPr>
+        <p:txBody>
+          <a:bodyPr wrap="square">
+            <a:spAutoFit/>
+          </a:bodyPr>
+          <a:lstStyle/>
+          <a:p>
+            <a:pPr algn="l"/>
             <a:r>
               <a:rPr sz="1000" b="0">
                 <a:solidFill>
@@ -5444,27 +7113,28 @@
         </p:nvSpPr>
         <p:spPr>
           <a:xfrm>
-            <a:off x="4114800" y="3749039"/>
-            <a:ext cx="4754880" cy="411480"/>
-          </a:xfrm>
-          <a:prstGeom prst="rect">
-            <a:avLst/>
-          </a:prstGeom>
-          <a:noFill/>
-        </p:spPr>
-        <p:txBody>
-          <a:bodyPr wrap="none">
-            <a:spAutoFit/>
-          </a:bodyPr>
-          <a:lstStyle/>
-          <a:p>
+            <a:off x="4114800" y="3630168"/>
+            <a:ext cx="4754880" cy="384048"/>
+          </a:xfrm>
+          <a:prstGeom prst="rect">
+            <a:avLst/>
+          </a:prstGeom>
+          <a:noFill/>
+        </p:spPr>
+        <p:txBody>
+          <a:bodyPr wrap="square">
+            <a:spAutoFit/>
+          </a:bodyPr>
+          <a:lstStyle/>
+          <a:p>
+            <a:pPr algn="l"/>
             <a:r>
               <a:rPr sz="1000" b="0">
                 <a:solidFill>
                   <a:srgbClr val="AAAAAA"/>
                 </a:solidFill>
               </a:rPr>
-              <a:t>Only method that catches procedure-ORDER violations (e.g., PDU before Auth).</a:t>
+              <a:t>ONLY method that catches procedure-ORDER violations (e.g., PDU Session before Authentication).</a:t>
             </a:r>
           </a:p>
         </p:txBody>
@@ -5503,7 +7173,7 @@
         </p:nvSpPr>
         <p:spPr>
           <a:xfrm>
-            <a:off x="274320" y="182880"/>
+            <a:off x="274320" y="137160"/>
             <a:ext cx="8595360" cy="457200"/>
           </a:xfrm>
           <a:prstGeom prst="rect">
@@ -5512,18 +7182,19 @@
           <a:noFill/>
         </p:spPr>
         <p:txBody>
-          <a:bodyPr wrap="none">
-            <a:spAutoFit/>
-          </a:bodyPr>
-          <a:lstStyle/>
-          <a:p>
-            <a:r>
-              <a:rPr sz="2200" b="1">
+          <a:bodyPr wrap="square">
+            <a:spAutoFit/>
+          </a:bodyPr>
+          <a:lstStyle/>
+          <a:p>
+            <a:pPr algn="l"/>
+            <a:r>
+              <a:rPr sz="2400" b="1">
                 <a:solidFill>
                   <a:srgbClr val="00B4D8"/>
                 </a:solidFill>
               </a:rPr>
-              <a:t>📊  KPI Anomaly Detection — 6-Method Ensemble</a:t>
+              <a:t>📊  KPI + L1/L2 Stats Detection — 6-Method Ensemble</a:t>
             </a:r>
           </a:p>
         </p:txBody>
@@ -5536,20 +7207,55 @@
         </p:nvSpPr>
         <p:spPr>
           <a:xfrm>
-            <a:off x="274320" y="777240"/>
-            <a:ext cx="228600" cy="411480"/>
-          </a:xfrm>
-          <a:prstGeom prst="rect">
-            <a:avLst/>
-          </a:prstGeom>
-          <a:noFill/>
-        </p:spPr>
-        <p:txBody>
-          <a:bodyPr wrap="none">
-            <a:spAutoFit/>
-          </a:bodyPr>
-          <a:lstStyle/>
-          <a:p>
+            <a:off x="274320" y="640080"/>
+            <a:ext cx="8412480" cy="228600"/>
+          </a:xfrm>
+          <a:prstGeom prst="rect">
+            <a:avLst/>
+          </a:prstGeom>
+          <a:noFill/>
+        </p:spPr>
+        <p:txBody>
+          <a:bodyPr wrap="square">
+            <a:spAutoFit/>
+          </a:bodyPr>
+          <a:lstStyle/>
+          <a:p>
+            <a:pPr algn="l"/>
+            <a:r>
+              <a:rPr sz="1000" b="0">
+                <a:solidFill>
+                  <a:srgbClr val="AAAAAA"/>
+                </a:solidFill>
+              </a:rPr>
+              <a:t>Same 6 methods applied to both KPI time-series (Excel/CSV) and DU/CU L1/L2 statistics (srsRAN · OAI · NIST)</a:t>
+            </a:r>
+          </a:p>
+        </p:txBody>
+      </p:sp>
+      <p:sp>
+        <p:nvSpPr>
+          <p:cNvPr id="4" name="TextBox 3"/>
+          <p:cNvSpPr txBox="1"/>
+          <p:nvPr/>
+        </p:nvSpPr>
+        <p:spPr>
+          <a:xfrm>
+            <a:off x="274320" y="960120"/>
+            <a:ext cx="228600" cy="384048"/>
+          </a:xfrm>
+          <a:prstGeom prst="rect">
+            <a:avLst/>
+          </a:prstGeom>
+          <a:noFill/>
+        </p:spPr>
+        <p:txBody>
+          <a:bodyPr wrap="square">
+            <a:spAutoFit/>
+          </a:bodyPr>
+          <a:lstStyle/>
+          <a:p>
+            <a:pPr algn="l"/>
             <a:r>
               <a:rPr sz="1400" b="1">
                 <a:solidFill>
@@ -5563,28 +7269,29 @@
       </p:sp>
       <p:sp>
         <p:nvSpPr>
-          <p:cNvPr id="4" name="TextBox 3"/>
-          <p:cNvSpPr txBox="1"/>
-          <p:nvPr/>
-        </p:nvSpPr>
-        <p:spPr>
-          <a:xfrm>
-            <a:off x="548640" y="777240"/>
-            <a:ext cx="2011680" cy="411480"/>
-          </a:xfrm>
-          <a:prstGeom prst="rect">
-            <a:avLst/>
-          </a:prstGeom>
-          <a:noFill/>
-        </p:spPr>
-        <p:txBody>
-          <a:bodyPr wrap="none">
-            <a:spAutoFit/>
-          </a:bodyPr>
-          <a:lstStyle/>
-          <a:p>
-            <a:r>
-              <a:rPr sz="1200" b="1">
+          <p:cNvPr id="5" name="TextBox 4"/>
+          <p:cNvSpPr txBox="1"/>
+          <p:nvPr/>
+        </p:nvSpPr>
+        <p:spPr>
+          <a:xfrm>
+            <a:off x="548640" y="960120"/>
+            <a:ext cx="2011680" cy="384048"/>
+          </a:xfrm>
+          <a:prstGeom prst="rect">
+            <a:avLst/>
+          </a:prstGeom>
+          <a:noFill/>
+        </p:spPr>
+        <p:txBody>
+          <a:bodyPr wrap="square">
+            <a:spAutoFit/>
+          </a:bodyPr>
+          <a:lstStyle/>
+          <a:p>
+            <a:pPr algn="l"/>
+            <a:r>
+              <a:rPr sz="1100" b="1">
                 <a:solidFill>
                   <a:srgbClr val="FFFFFF"/>
                 </a:solidFill>
@@ -5596,26 +7303,27 @@
       </p:sp>
       <p:sp>
         <p:nvSpPr>
-          <p:cNvPr id="5" name="TextBox 4"/>
-          <p:cNvSpPr txBox="1"/>
-          <p:nvPr/>
-        </p:nvSpPr>
-        <p:spPr>
-          <a:xfrm>
-            <a:off x="2651760" y="777240"/>
-            <a:ext cx="1645920" cy="411480"/>
-          </a:xfrm>
-          <a:prstGeom prst="rect">
-            <a:avLst/>
-          </a:prstGeom>
-          <a:noFill/>
-        </p:spPr>
-        <p:txBody>
-          <a:bodyPr wrap="none">
-            <a:spAutoFit/>
-          </a:bodyPr>
-          <a:lstStyle/>
-          <a:p>
+          <p:cNvPr id="6" name="TextBox 5"/>
+          <p:cNvSpPr txBox="1"/>
+          <p:nvPr/>
+        </p:nvSpPr>
+        <p:spPr>
+          <a:xfrm>
+            <a:off x="2606040" y="960120"/>
+            <a:ext cx="1645920" cy="384048"/>
+          </a:xfrm>
+          <a:prstGeom prst="rect">
+            <a:avLst/>
+          </a:prstGeom>
+          <a:noFill/>
+        </p:spPr>
+        <p:txBody>
+          <a:bodyPr wrap="square">
+            <a:spAutoFit/>
+          </a:bodyPr>
+          <a:lstStyle/>
+          <a:p>
+            <a:pPr algn="l"/>
             <a:r>
               <a:rPr sz="1000" b="0">
                 <a:solidFill>
@@ -5629,59 +7337,61 @@
       </p:sp>
       <p:sp>
         <p:nvSpPr>
-          <p:cNvPr id="6" name="TextBox 5"/>
-          <p:cNvSpPr txBox="1"/>
-          <p:nvPr/>
-        </p:nvSpPr>
-        <p:spPr>
-          <a:xfrm>
-            <a:off x="4389120" y="777240"/>
-            <a:ext cx="4480560" cy="411480"/>
-          </a:xfrm>
-          <a:prstGeom prst="rect">
-            <a:avLst/>
-          </a:prstGeom>
-          <a:noFill/>
-        </p:spPr>
-        <p:txBody>
-          <a:bodyPr wrap="none">
-            <a:spAutoFit/>
-          </a:bodyPr>
-          <a:lstStyle/>
-          <a:p>
+          <p:cNvPr id="7" name="TextBox 6"/>
+          <p:cNvSpPr txBox="1"/>
+          <p:nvPr/>
+        </p:nvSpPr>
+        <p:spPr>
+          <a:xfrm>
+            <a:off x="4297680" y="960120"/>
+            <a:ext cx="4572000" cy="384048"/>
+          </a:xfrm>
+          <a:prstGeom prst="rect">
+            <a:avLst/>
+          </a:prstGeom>
+          <a:noFill/>
+        </p:spPr>
+        <p:txBody>
+          <a:bodyPr wrap="square">
+            <a:spAutoFit/>
+          </a:bodyPr>
+          <a:lstStyle/>
+          <a:p>
+            <a:pPr algn="l"/>
             <a:r>
               <a:rPr sz="1000" b="0">
                 <a:solidFill>
                   <a:srgbClr val="AAAAAA"/>
                 </a:solidFill>
               </a:rPr>
-              <a:t>Per-row check vs warning/critical. Encodes 3GPP/ITU-T SLA. Zero false positives for known limits.</a:t>
-            </a:r>
-          </a:p>
-        </p:txBody>
-      </p:sp>
-      <p:sp>
-        <p:nvSpPr>
-          <p:cNvPr id="7" name="TextBox 6"/>
-          <p:cNvSpPr txBox="1"/>
-          <p:nvPr/>
-        </p:nvSpPr>
-        <p:spPr>
-          <a:xfrm>
-            <a:off x="274320" y="1371600"/>
-            <a:ext cx="228600" cy="411480"/>
-          </a:xfrm>
-          <a:prstGeom prst="rect">
-            <a:avLst/>
-          </a:prstGeom>
-          <a:noFill/>
-        </p:spPr>
-        <p:txBody>
-          <a:bodyPr wrap="none">
-            <a:spAutoFit/>
-          </a:bodyPr>
-          <a:lstStyle/>
-          <a:p>
+              <a:t>Per-row check vs warning/critical thresholds. Encodes 3GPP/ITU-T SLA directly. Zero false positives for known limits.</a:t>
+            </a:r>
+          </a:p>
+        </p:txBody>
+      </p:sp>
+      <p:sp>
+        <p:nvSpPr>
+          <p:cNvPr id="8" name="TextBox 7"/>
+          <p:cNvSpPr txBox="1"/>
+          <p:nvPr/>
+        </p:nvSpPr>
+        <p:spPr>
+          <a:xfrm>
+            <a:off x="274320" y="1527048"/>
+            <a:ext cx="228600" cy="384048"/>
+          </a:xfrm>
+          <a:prstGeom prst="rect">
+            <a:avLst/>
+          </a:prstGeom>
+          <a:noFill/>
+        </p:spPr>
+        <p:txBody>
+          <a:bodyPr wrap="square">
+            <a:spAutoFit/>
+          </a:bodyPr>
+          <a:lstStyle/>
+          <a:p>
+            <a:pPr algn="l"/>
             <a:r>
               <a:rPr sz="1400" b="1">
                 <a:solidFill>
@@ -5695,28 +7405,29 @@
       </p:sp>
       <p:sp>
         <p:nvSpPr>
-          <p:cNvPr id="8" name="TextBox 7"/>
-          <p:cNvSpPr txBox="1"/>
-          <p:nvPr/>
-        </p:nvSpPr>
-        <p:spPr>
-          <a:xfrm>
-            <a:off x="548640" y="1371600"/>
-            <a:ext cx="2011680" cy="411480"/>
-          </a:xfrm>
-          <a:prstGeom prst="rect">
-            <a:avLst/>
-          </a:prstGeom>
-          <a:noFill/>
-        </p:spPr>
-        <p:txBody>
-          <a:bodyPr wrap="none">
-            <a:spAutoFit/>
-          </a:bodyPr>
-          <a:lstStyle/>
-          <a:p>
-            <a:r>
-              <a:rPr sz="1200" b="1">
+          <p:cNvPr id="9" name="TextBox 8"/>
+          <p:cNvSpPr txBox="1"/>
+          <p:nvPr/>
+        </p:nvSpPr>
+        <p:spPr>
+          <a:xfrm>
+            <a:off x="548640" y="1527048"/>
+            <a:ext cx="2011680" cy="384048"/>
+          </a:xfrm>
+          <a:prstGeom prst="rect">
+            <a:avLst/>
+          </a:prstGeom>
+          <a:noFill/>
+        </p:spPr>
+        <p:txBody>
+          <a:bodyPr wrap="square">
+            <a:spAutoFit/>
+          </a:bodyPr>
+          <a:lstStyle/>
+          <a:p>
+            <a:pPr algn="l"/>
+            <a:r>
+              <a:rPr sz="1100" b="1">
                 <a:solidFill>
                   <a:srgbClr val="FFFFFF"/>
                 </a:solidFill>
@@ -5728,26 +7439,27 @@
       </p:sp>
       <p:sp>
         <p:nvSpPr>
-          <p:cNvPr id="9" name="TextBox 8"/>
-          <p:cNvSpPr txBox="1"/>
-          <p:nvPr/>
-        </p:nvSpPr>
-        <p:spPr>
-          <a:xfrm>
-            <a:off x="2651760" y="1371600"/>
-            <a:ext cx="1645920" cy="411480"/>
-          </a:xfrm>
-          <a:prstGeom prst="rect">
-            <a:avLst/>
-          </a:prstGeom>
-          <a:noFill/>
-        </p:spPr>
-        <p:txBody>
-          <a:bodyPr wrap="none">
-            <a:spAutoFit/>
-          </a:bodyPr>
-          <a:lstStyle/>
-          <a:p>
+          <p:cNvPr id="10" name="TextBox 9"/>
+          <p:cNvSpPr txBox="1"/>
+          <p:nvPr/>
+        </p:nvSpPr>
+        <p:spPr>
+          <a:xfrm>
+            <a:off x="2606040" y="1527048"/>
+            <a:ext cx="1645920" cy="384048"/>
+          </a:xfrm>
+          <a:prstGeom prst="rect">
+            <a:avLst/>
+          </a:prstGeom>
+          <a:noFill/>
+        </p:spPr>
+        <p:txBody>
+          <a:bodyPr wrap="square">
+            <a:spAutoFit/>
+          </a:bodyPr>
+          <a:lstStyle/>
+          <a:p>
+            <a:pPr algn="l"/>
             <a:r>
               <a:rPr sz="1000" b="0">
                 <a:solidFill>
@@ -5761,59 +7473,61 @@
       </p:sp>
       <p:sp>
         <p:nvSpPr>
-          <p:cNvPr id="10" name="TextBox 9"/>
-          <p:cNvSpPr txBox="1"/>
-          <p:nvPr/>
-        </p:nvSpPr>
-        <p:spPr>
-          <a:xfrm>
-            <a:off x="4389120" y="1371600"/>
-            <a:ext cx="4480560" cy="411480"/>
-          </a:xfrm>
-          <a:prstGeom prst="rect">
-            <a:avLst/>
-          </a:prstGeom>
-          <a:noFill/>
-        </p:spPr>
-        <p:txBody>
-          <a:bodyPr wrap="none">
-            <a:spAutoFit/>
-          </a:bodyPr>
-          <a:lstStyle/>
-          <a:p>
+          <p:cNvPr id="11" name="TextBox 10"/>
+          <p:cNvSpPr txBox="1"/>
+          <p:nvPr/>
+        </p:nvSpPr>
+        <p:spPr>
+          <a:xfrm>
+            <a:off x="4297680" y="1527048"/>
+            <a:ext cx="4572000" cy="384048"/>
+          </a:xfrm>
+          <a:prstGeom prst="rect">
+            <a:avLst/>
+          </a:prstGeom>
+          <a:noFill/>
+        </p:spPr>
+        <p:txBody>
+          <a:bodyPr wrap="square">
+            <a:spAutoFit/>
+          </a:bodyPr>
+          <a:lstStyle/>
+          <a:p>
+            <a:pPr algn="l"/>
             <a:r>
               <a:rPr sz="1000" b="0">
                 <a:solidFill>
                   <a:srgbClr val="AAAAAA"/>
                 </a:solidFill>
               </a:rPr>
-              <a:t>Z-score vs fleet. Catches underperforming cells within threshold but 3σ below peers.</a:t>
-            </a:r>
-          </a:p>
-        </p:txBody>
-      </p:sp>
-      <p:sp>
-        <p:nvSpPr>
-          <p:cNvPr id="11" name="TextBox 10"/>
-          <p:cNvSpPr txBox="1"/>
-          <p:nvPr/>
-        </p:nvSpPr>
-        <p:spPr>
-          <a:xfrm>
-            <a:off x="274320" y="1965960"/>
-            <a:ext cx="228600" cy="411480"/>
-          </a:xfrm>
-          <a:prstGeom prst="rect">
-            <a:avLst/>
-          </a:prstGeom>
-          <a:noFill/>
-        </p:spPr>
-        <p:txBody>
-          <a:bodyPr wrap="none">
-            <a:spAutoFit/>
-          </a:bodyPr>
-          <a:lstStyle/>
-          <a:p>
+              <a:t>Z-score vs fleet mean. Catches underperforming cells still within threshold but 3σ below peers.</a:t>
+            </a:r>
+          </a:p>
+        </p:txBody>
+      </p:sp>
+      <p:sp>
+        <p:nvSpPr>
+          <p:cNvPr id="12" name="TextBox 11"/>
+          <p:cNvSpPr txBox="1"/>
+          <p:nvPr/>
+        </p:nvSpPr>
+        <p:spPr>
+          <a:xfrm>
+            <a:off x="274320" y="2093976"/>
+            <a:ext cx="228600" cy="384048"/>
+          </a:xfrm>
+          <a:prstGeom prst="rect">
+            <a:avLst/>
+          </a:prstGeom>
+          <a:noFill/>
+        </p:spPr>
+        <p:txBody>
+          <a:bodyPr wrap="square">
+            <a:spAutoFit/>
+          </a:bodyPr>
+          <a:lstStyle/>
+          <a:p>
+            <a:pPr algn="l"/>
             <a:r>
               <a:rPr sz="1400" b="1">
                 <a:solidFill>
@@ -5827,125 +7541,129 @@
       </p:sp>
       <p:sp>
         <p:nvSpPr>
-          <p:cNvPr id="12" name="TextBox 11"/>
-          <p:cNvSpPr txBox="1"/>
-          <p:nvPr/>
-        </p:nvSpPr>
-        <p:spPr>
-          <a:xfrm>
-            <a:off x="548640" y="1965960"/>
-            <a:ext cx="2011680" cy="411480"/>
-          </a:xfrm>
-          <a:prstGeom prst="rect">
-            <a:avLst/>
-          </a:prstGeom>
-          <a:noFill/>
-        </p:spPr>
-        <p:txBody>
-          <a:bodyPr wrap="none">
-            <a:spAutoFit/>
-          </a:bodyPr>
-          <a:lstStyle/>
-          <a:p>
-            <a:r>
-              <a:rPr sz="1200" b="1">
+          <p:cNvPr id="13" name="TextBox 12"/>
+          <p:cNvSpPr txBox="1"/>
+          <p:nvPr/>
+        </p:nvSpPr>
+        <p:spPr>
+          <a:xfrm>
+            <a:off x="548640" y="2093976"/>
+            <a:ext cx="2011680" cy="384048"/>
+          </a:xfrm>
+          <a:prstGeom prst="rect">
+            <a:avLst/>
+          </a:prstGeom>
+          <a:noFill/>
+        </p:spPr>
+        <p:txBody>
+          <a:bodyPr wrap="square">
+            <a:spAutoFit/>
+          </a:bodyPr>
+          <a:lstStyle/>
+          <a:p>
+            <a:pPr algn="l"/>
+            <a:r>
+              <a:rPr sz="1100" b="1">
                 <a:solidFill>
                   <a:srgbClr val="FFFFFF"/>
                 </a:solidFill>
               </a:rPr>
-              <a:t>Trend (LinReg)</a:t>
-            </a:r>
-          </a:p>
-        </p:txBody>
-      </p:sp>
-      <p:sp>
-        <p:nvSpPr>
-          <p:cNvPr id="13" name="TextBox 12"/>
-          <p:cNvSpPr txBox="1"/>
-          <p:nvPr/>
-        </p:nvSpPr>
-        <p:spPr>
-          <a:xfrm>
-            <a:off x="2651760" y="1965960"/>
-            <a:ext cx="1645920" cy="411480"/>
-          </a:xfrm>
-          <a:prstGeom prst="rect">
-            <a:avLst/>
-          </a:prstGeom>
-          <a:noFill/>
-        </p:spPr>
-        <p:txBody>
-          <a:bodyPr wrap="none">
-            <a:spAutoFit/>
-          </a:bodyPr>
-          <a:lstStyle/>
-          <a:p>
+              <a:t>Trend (Linear Regression)</a:t>
+            </a:r>
+          </a:p>
+        </p:txBody>
+      </p:sp>
+      <p:sp>
+        <p:nvSpPr>
+          <p:cNvPr id="14" name="TextBox 13"/>
+          <p:cNvSpPr txBox="1"/>
+          <p:nvPr/>
+        </p:nvSpPr>
+        <p:spPr>
+          <a:xfrm>
+            <a:off x="2606040" y="2093976"/>
+            <a:ext cx="1645920" cy="384048"/>
+          </a:xfrm>
+          <a:prstGeom prst="rect">
+            <a:avLst/>
+          </a:prstGeom>
+          <a:noFill/>
+        </p:spPr>
+        <p:txBody>
+          <a:bodyPr wrap="square">
+            <a:spAutoFit/>
+          </a:bodyPr>
+          <a:lstStyle/>
+          <a:p>
+            <a:pPr algn="l"/>
             <a:r>
               <a:rPr sz="1000" b="0">
                 <a:solidFill>
                   <a:srgbClr val="FF9400"/>
                 </a:solidFill>
               </a:rPr>
-              <a:t>Statistical / temporal</a:t>
-            </a:r>
-          </a:p>
-        </p:txBody>
-      </p:sp>
-      <p:sp>
-        <p:nvSpPr>
-          <p:cNvPr id="14" name="TextBox 13"/>
-          <p:cNvSpPr txBox="1"/>
-          <p:nvPr/>
-        </p:nvSpPr>
-        <p:spPr>
-          <a:xfrm>
-            <a:off x="4389120" y="1965960"/>
-            <a:ext cx="4480560" cy="411480"/>
-          </a:xfrm>
-          <a:prstGeom prst="rect">
-            <a:avLst/>
-          </a:prstGeom>
-          <a:noFill/>
-        </p:spPr>
-        <p:txBody>
-          <a:bodyPr wrap="none">
-            <a:spAutoFit/>
-          </a:bodyPr>
-          <a:lstStyle/>
-          <a:p>
+              <a:t>Temporal / slope</a:t>
+            </a:r>
+          </a:p>
+        </p:txBody>
+      </p:sp>
+      <p:sp>
+        <p:nvSpPr>
+          <p:cNvPr id="15" name="TextBox 14"/>
+          <p:cNvSpPr txBox="1"/>
+          <p:nvPr/>
+        </p:nvSpPr>
+        <p:spPr>
+          <a:xfrm>
+            <a:off x="4297680" y="2093976"/>
+            <a:ext cx="4572000" cy="384048"/>
+          </a:xfrm>
+          <a:prstGeom prst="rect">
+            <a:avLst/>
+          </a:prstGeom>
+          <a:noFill/>
+        </p:spPr>
+        <p:txBody>
+          <a:bodyPr wrap="square">
+            <a:spAutoFit/>
+          </a:bodyPr>
+          <a:lstStyle/>
+          <a:p>
+            <a:pPr algn="l"/>
             <a:r>
               <a:rPr sz="1000" b="0">
                 <a:solidFill>
                   <a:srgbClr val="AAAAAA"/>
                 </a:solidFill>
               </a:rPr>
-              <a:t>Slope &gt; 0.5 unit/hr = actionable even if still 'green'. Early warning for degradation.</a:t>
-            </a:r>
-          </a:p>
-        </p:txBody>
-      </p:sp>
-      <p:sp>
-        <p:nvSpPr>
-          <p:cNvPr id="15" name="TextBox 14"/>
-          <p:cNvSpPr txBox="1"/>
-          <p:nvPr/>
-        </p:nvSpPr>
-        <p:spPr>
-          <a:xfrm>
-            <a:off x="274320" y="2560320"/>
-            <a:ext cx="228600" cy="411480"/>
-          </a:xfrm>
-          <a:prstGeom prst="rect">
-            <a:avLst/>
-          </a:prstGeom>
-          <a:noFill/>
-        </p:spPr>
-        <p:txBody>
-          <a:bodyPr wrap="none">
-            <a:spAutoFit/>
-          </a:bodyPr>
-          <a:lstStyle/>
-          <a:p>
+              <a:t>Slope &gt; 0.5 unit/hr = actionable degradation even if current value looks 'green'. Early-warning signal.</a:t>
+            </a:r>
+          </a:p>
+        </p:txBody>
+      </p:sp>
+      <p:sp>
+        <p:nvSpPr>
+          <p:cNvPr id="16" name="TextBox 15"/>
+          <p:cNvSpPr txBox="1"/>
+          <p:nvPr/>
+        </p:nvSpPr>
+        <p:spPr>
+          <a:xfrm>
+            <a:off x="274320" y="2660904"/>
+            <a:ext cx="228600" cy="384048"/>
+          </a:xfrm>
+          <a:prstGeom prst="rect">
+            <a:avLst/>
+          </a:prstGeom>
+          <a:noFill/>
+        </p:spPr>
+        <p:txBody>
+          <a:bodyPr wrap="square">
+            <a:spAutoFit/>
+          </a:bodyPr>
+          <a:lstStyle/>
+          <a:p>
+            <a:pPr algn="l"/>
             <a:r>
               <a:rPr sz="1400" b="1">
                 <a:solidFill>
@@ -5959,28 +7677,29 @@
       </p:sp>
       <p:sp>
         <p:nvSpPr>
-          <p:cNvPr id="16" name="TextBox 15"/>
-          <p:cNvSpPr txBox="1"/>
-          <p:nvPr/>
-        </p:nvSpPr>
-        <p:spPr>
-          <a:xfrm>
-            <a:off x="548640" y="2560320"/>
-            <a:ext cx="2011680" cy="411480"/>
-          </a:xfrm>
-          <a:prstGeom prst="rect">
-            <a:avLst/>
-          </a:prstGeom>
-          <a:noFill/>
-        </p:spPr>
-        <p:txBody>
-          <a:bodyPr wrap="none">
-            <a:spAutoFit/>
-          </a:bodyPr>
-          <a:lstStyle/>
-          <a:p>
-            <a:r>
-              <a:rPr sz="1200" b="1">
+          <p:cNvPr id="17" name="TextBox 16"/>
+          <p:cNvSpPr txBox="1"/>
+          <p:nvPr/>
+        </p:nvSpPr>
+        <p:spPr>
+          <a:xfrm>
+            <a:off x="548640" y="2660904"/>
+            <a:ext cx="2011680" cy="384048"/>
+          </a:xfrm>
+          <a:prstGeom prst="rect">
+            <a:avLst/>
+          </a:prstGeom>
+          <a:noFill/>
+        </p:spPr>
+        <p:txBody>
+          <a:bodyPr wrap="square">
+            <a:spAutoFit/>
+          </a:bodyPr>
+          <a:lstStyle/>
+          <a:p>
+            <a:pPr algn="l"/>
+            <a:r>
+              <a:rPr sz="1100" b="1">
                 <a:solidFill>
                   <a:srgbClr val="FFFFFF"/>
                 </a:solidFill>
@@ -5992,26 +7711,27 @@
       </p:sp>
       <p:sp>
         <p:nvSpPr>
-          <p:cNvPr id="17" name="TextBox 16"/>
-          <p:cNvSpPr txBox="1"/>
-          <p:nvPr/>
-        </p:nvSpPr>
-        <p:spPr>
-          <a:xfrm>
-            <a:off x="2651760" y="2560320"/>
-            <a:ext cx="1645920" cy="411480"/>
-          </a:xfrm>
-          <a:prstGeom prst="rect">
-            <a:avLst/>
-          </a:prstGeom>
-          <a:noFill/>
-        </p:spPr>
-        <p:txBody>
-          <a:bodyPr wrap="none">
-            <a:spAutoFit/>
-          </a:bodyPr>
-          <a:lstStyle/>
-          <a:p>
+          <p:cNvPr id="18" name="TextBox 17"/>
+          <p:cNvSpPr txBox="1"/>
+          <p:nvPr/>
+        </p:nvSpPr>
+        <p:spPr>
+          <a:xfrm>
+            <a:off x="2606040" y="2660904"/>
+            <a:ext cx="1645920" cy="384048"/>
+          </a:xfrm>
+          <a:prstGeom prst="rect">
+            <a:avLst/>
+          </a:prstGeom>
+          <a:noFill/>
+        </p:spPr>
+        <p:txBody>
+          <a:bodyPr wrap="square">
+            <a:spAutoFit/>
+          </a:bodyPr>
+          <a:lstStyle/>
+          <a:p>
+            <a:pPr algn="l"/>
             <a:r>
               <a:rPr sz="1000" b="0">
                 <a:solidFill>
@@ -6025,59 +7745,61 @@
       </p:sp>
       <p:sp>
         <p:nvSpPr>
-          <p:cNvPr id="18" name="TextBox 17"/>
-          <p:cNvSpPr txBox="1"/>
-          <p:nvPr/>
-        </p:nvSpPr>
-        <p:spPr>
-          <a:xfrm>
-            <a:off x="4389120" y="2560320"/>
-            <a:ext cx="4480560" cy="411480"/>
-          </a:xfrm>
-          <a:prstGeom prst="rect">
-            <a:avLst/>
-          </a:prstGeom>
-          <a:noFill/>
-        </p:spPr>
-        <p:txBody>
-          <a:bodyPr wrap="none">
-            <a:spAutoFit/>
-          </a:bodyPr>
-          <a:lstStyle/>
-          <a:p>
+          <p:cNvPr id="19" name="TextBox 18"/>
+          <p:cNvSpPr txBox="1"/>
+          <p:nvPr/>
+        </p:nvSpPr>
+        <p:spPr>
+          <a:xfrm>
+            <a:off x="4297680" y="2660904"/>
+            <a:ext cx="4572000" cy="384048"/>
+          </a:xfrm>
+          <a:prstGeom prst="rect">
+            <a:avLst/>
+          </a:prstGeom>
+          <a:noFill/>
+        </p:spPr>
+        <p:txBody>
+          <a:bodyPr wrap="square">
+            <a:spAutoFit/>
+          </a:bodyPr>
+          <a:lstStyle/>
+          <a:p>
+            <a:pPr algn="l"/>
             <a:r>
               <a:rPr sz="1000" b="0">
                 <a:solidFill>
                   <a:srgbClr val="AAAAAA"/>
                 </a:solidFill>
               </a:rPr>
-              <a:t>No Gaussian assumption. Works on skewed KPIs (PRB right-skewed, CQI during interference left-skewed).</a:t>
-            </a:r>
-          </a:p>
-        </p:txBody>
-      </p:sp>
-      <p:sp>
-        <p:nvSpPr>
-          <p:cNvPr id="19" name="TextBox 18"/>
-          <p:cNvSpPr txBox="1"/>
-          <p:nvPr/>
-        </p:nvSpPr>
-        <p:spPr>
-          <a:xfrm>
-            <a:off x="274320" y="3154680"/>
-            <a:ext cx="228600" cy="411480"/>
-          </a:xfrm>
-          <a:prstGeom prst="rect">
-            <a:avLst/>
-          </a:prstGeom>
-          <a:noFill/>
-        </p:spPr>
-        <p:txBody>
-          <a:bodyPr wrap="none">
-            <a:spAutoFit/>
-          </a:bodyPr>
-          <a:lstStyle/>
-          <a:p>
+              <a:t>No Gaussian assumption. Works on skewed KPIs — PRB right-skewed, CQI left-skewed during interference.</a:t>
+            </a:r>
+          </a:p>
+        </p:txBody>
+      </p:sp>
+      <p:sp>
+        <p:nvSpPr>
+          <p:cNvPr id="20" name="TextBox 19"/>
+          <p:cNvSpPr txBox="1"/>
+          <p:nvPr/>
+        </p:nvSpPr>
+        <p:spPr>
+          <a:xfrm>
+            <a:off x="274320" y="3227832"/>
+            <a:ext cx="228600" cy="384048"/>
+          </a:xfrm>
+          <a:prstGeom prst="rect">
+            <a:avLst/>
+          </a:prstGeom>
+          <a:noFill/>
+        </p:spPr>
+        <p:txBody>
+          <a:bodyPr wrap="square">
+            <a:spAutoFit/>
+          </a:bodyPr>
+          <a:lstStyle/>
+          <a:p>
+            <a:pPr algn="l"/>
             <a:r>
               <a:rPr sz="1400" b="1">
                 <a:solidFill>
@@ -6091,28 +7813,29 @@
       </p:sp>
       <p:sp>
         <p:nvSpPr>
-          <p:cNvPr id="20" name="TextBox 19"/>
-          <p:cNvSpPr txBox="1"/>
-          <p:nvPr/>
-        </p:nvSpPr>
-        <p:spPr>
-          <a:xfrm>
-            <a:off x="548640" y="3154680"/>
-            <a:ext cx="2011680" cy="411480"/>
-          </a:xfrm>
-          <a:prstGeom prst="rect">
-            <a:avLst/>
-          </a:prstGeom>
-          <a:noFill/>
-        </p:spPr>
-        <p:txBody>
-          <a:bodyPr wrap="none">
-            <a:spAutoFit/>
-          </a:bodyPr>
-          <a:lstStyle/>
-          <a:p>
-            <a:r>
-              <a:rPr sz="1200" b="1">
+          <p:cNvPr id="21" name="TextBox 20"/>
+          <p:cNvSpPr txBox="1"/>
+          <p:nvPr/>
+        </p:nvSpPr>
+        <p:spPr>
+          <a:xfrm>
+            <a:off x="548640" y="3227832"/>
+            <a:ext cx="2011680" cy="384048"/>
+          </a:xfrm>
+          <a:prstGeom prst="rect">
+            <a:avLst/>
+          </a:prstGeom>
+          <a:noFill/>
+        </p:spPr>
+        <p:txBody>
+          <a:bodyPr wrap="square">
+            <a:spAutoFit/>
+          </a:bodyPr>
+          <a:lstStyle/>
+          <a:p>
+            <a:pPr algn="l"/>
+            <a:r>
+              <a:rPr sz="1100" b="1">
                 <a:solidFill>
                   <a:srgbClr val="FFFFFF"/>
                 </a:solidFill>
@@ -6124,26 +7847,27 @@
       </p:sp>
       <p:sp>
         <p:nvSpPr>
-          <p:cNvPr id="21" name="TextBox 20"/>
-          <p:cNvSpPr txBox="1"/>
-          <p:nvPr/>
-        </p:nvSpPr>
-        <p:spPr>
-          <a:xfrm>
-            <a:off x="2651760" y="3154680"/>
-            <a:ext cx="1645920" cy="411480"/>
-          </a:xfrm>
-          <a:prstGeom prst="rect">
-            <a:avLst/>
-          </a:prstGeom>
-          <a:noFill/>
-        </p:spPr>
-        <p:txBody>
-          <a:bodyPr wrap="none">
-            <a:spAutoFit/>
-          </a:bodyPr>
-          <a:lstStyle/>
-          <a:p>
+          <p:cNvPr id="22" name="TextBox 21"/>
+          <p:cNvSpPr txBox="1"/>
+          <p:nvPr/>
+        </p:nvSpPr>
+        <p:spPr>
+          <a:xfrm>
+            <a:off x="2606040" y="3227832"/>
+            <a:ext cx="1645920" cy="384048"/>
+          </a:xfrm>
+          <a:prstGeom prst="rect">
+            <a:avLst/>
+          </a:prstGeom>
+          <a:noFill/>
+        </p:spPr>
+        <p:txBody>
+          <a:bodyPr wrap="square">
+            <a:spAutoFit/>
+          </a:bodyPr>
+          <a:lstStyle/>
+          <a:p>
+            <a:pPr algn="l"/>
             <a:r>
               <a:rPr sz="1000" b="0">
                 <a:solidFill>
@@ -6157,59 +7881,61 @@
       </p:sp>
       <p:sp>
         <p:nvSpPr>
-          <p:cNvPr id="22" name="TextBox 21"/>
-          <p:cNvSpPr txBox="1"/>
-          <p:nvPr/>
-        </p:nvSpPr>
-        <p:spPr>
-          <a:xfrm>
-            <a:off x="4389120" y="3154680"/>
-            <a:ext cx="4480560" cy="411480"/>
-          </a:xfrm>
-          <a:prstGeom prst="rect">
-            <a:avLst/>
-          </a:prstGeom>
-          <a:noFill/>
-        </p:spPr>
-        <p:txBody>
-          <a:bodyPr wrap="none">
-            <a:spAutoFit/>
-          </a:bodyPr>
-          <a:lstStyle/>
-          <a:p>
+          <p:cNvPr id="23" name="TextBox 22"/>
+          <p:cNvSpPr txBox="1"/>
+          <p:nvPr/>
+        </p:nvSpPr>
+        <p:spPr>
+          <a:xfrm>
+            <a:off x="4297680" y="3227832"/>
+            <a:ext cx="4572000" cy="384048"/>
+          </a:xfrm>
+          <a:prstGeom prst="rect">
+            <a:avLst/>
+          </a:prstGeom>
+          <a:noFill/>
+        </p:spPr>
+        <p:txBody>
+          <a:bodyPr wrap="square">
+            <a:spAutoFit/>
+          </a:bodyPr>
+          <a:lstStyle/>
+          <a:p>
+            <a:pPr algn="l"/>
             <a:r>
               <a:rPr sz="1000" b="0">
                 <a:solidFill>
                   <a:srgbClr val="AAAAAA"/>
                 </a:solidFill>
               </a:rPr>
-              <a:t>Accumulates small deviations. Catches RRC SR 99.5%→98.2% drift before any threshold fires.</a:t>
-            </a:r>
-          </a:p>
-        </p:txBody>
-      </p:sp>
-      <p:sp>
-        <p:nvSpPr>
-          <p:cNvPr id="23" name="TextBox 22"/>
-          <p:cNvSpPr txBox="1"/>
-          <p:nvPr/>
-        </p:nvSpPr>
-        <p:spPr>
-          <a:xfrm>
-            <a:off x="274320" y="3749039"/>
-            <a:ext cx="228600" cy="411480"/>
-          </a:xfrm>
-          <a:prstGeom prst="rect">
-            <a:avLst/>
-          </a:prstGeom>
-          <a:noFill/>
-        </p:spPr>
-        <p:txBody>
-          <a:bodyPr wrap="none">
-            <a:spAutoFit/>
-          </a:bodyPr>
-          <a:lstStyle/>
-          <a:p>
+              <a:t>Accumulates small deviations. Catches RRC SR 99.5%→98.2% drift 5+ hours before threshold fires.</a:t>
+            </a:r>
+          </a:p>
+        </p:txBody>
+      </p:sp>
+      <p:sp>
+        <p:nvSpPr>
+          <p:cNvPr id="24" name="TextBox 23"/>
+          <p:cNvSpPr txBox="1"/>
+          <p:nvPr/>
+        </p:nvSpPr>
+        <p:spPr>
+          <a:xfrm>
+            <a:off x="274320" y="3794760"/>
+            <a:ext cx="228600" cy="384048"/>
+          </a:xfrm>
+          <a:prstGeom prst="rect">
+            <a:avLst/>
+          </a:prstGeom>
+          <a:noFill/>
+        </p:spPr>
+        <p:txBody>
+          <a:bodyPr wrap="square">
+            <a:spAutoFit/>
+          </a:bodyPr>
+          <a:lstStyle/>
+          <a:p>
+            <a:pPr algn="l"/>
             <a:r>
               <a:rPr sz="1400" b="1">
                 <a:solidFill>
@@ -6223,28 +7949,29 @@
       </p:sp>
       <p:sp>
         <p:nvSpPr>
-          <p:cNvPr id="24" name="TextBox 23"/>
-          <p:cNvSpPr txBox="1"/>
-          <p:nvPr/>
-        </p:nvSpPr>
-        <p:spPr>
-          <a:xfrm>
-            <a:off x="548640" y="3749039"/>
-            <a:ext cx="2011680" cy="411480"/>
-          </a:xfrm>
-          <a:prstGeom prst="rect">
-            <a:avLst/>
-          </a:prstGeom>
-          <a:noFill/>
-        </p:spPr>
-        <p:txBody>
-          <a:bodyPr wrap="none">
-            <a:spAutoFit/>
-          </a:bodyPr>
-          <a:lstStyle/>
-          <a:p>
-            <a:r>
-              <a:rPr sz="1200" b="1">
+          <p:cNvPr id="25" name="TextBox 24"/>
+          <p:cNvSpPr txBox="1"/>
+          <p:nvPr/>
+        </p:nvSpPr>
+        <p:spPr>
+          <a:xfrm>
+            <a:off x="548640" y="3794760"/>
+            <a:ext cx="2011680" cy="384048"/>
+          </a:xfrm>
+          <a:prstGeom prst="rect">
+            <a:avLst/>
+          </a:prstGeom>
+          <a:noFill/>
+        </p:spPr>
+        <p:txBody>
+          <a:bodyPr wrap="square">
+            <a:spAutoFit/>
+          </a:bodyPr>
+          <a:lstStyle/>
+          <a:p>
+            <a:pPr algn="l"/>
+            <a:r>
+              <a:rPr sz="1100" b="1">
                 <a:solidFill>
                   <a:srgbClr val="FFFFFF"/>
                 </a:solidFill>
@@ -6256,26 +7983,27 @@
       </p:sp>
       <p:sp>
         <p:nvSpPr>
-          <p:cNvPr id="25" name="TextBox 24"/>
-          <p:cNvSpPr txBox="1"/>
-          <p:nvPr/>
-        </p:nvSpPr>
-        <p:spPr>
-          <a:xfrm>
-            <a:off x="2651760" y="3749039"/>
-            <a:ext cx="1645920" cy="411480"/>
-          </a:xfrm>
-          <a:prstGeom prst="rect">
-            <a:avLst/>
-          </a:prstGeom>
-          <a:noFill/>
-        </p:spPr>
-        <p:txBody>
-          <a:bodyPr wrap="none">
-            <a:spAutoFit/>
-          </a:bodyPr>
-          <a:lstStyle/>
-          <a:p>
+          <p:cNvPr id="26" name="TextBox 25"/>
+          <p:cNvSpPr txBox="1"/>
+          <p:nvPr/>
+        </p:nvSpPr>
+        <p:spPr>
+          <a:xfrm>
+            <a:off x="2606040" y="3794760"/>
+            <a:ext cx="1645920" cy="384048"/>
+          </a:xfrm>
+          <a:prstGeom prst="rect">
+            <a:avLst/>
+          </a:prstGeom>
+          <a:noFill/>
+        </p:spPr>
+        <p:txBody>
+          <a:bodyPr wrap="square">
+            <a:spAutoFit/>
+          </a:bodyPr>
+          <a:lstStyle/>
+          <a:p>
+            <a:pPr algn="l"/>
             <a:r>
               <a:rPr sz="1000" b="0">
                 <a:solidFill>
@@ -6289,33 +8017,34 @@
       </p:sp>
       <p:sp>
         <p:nvSpPr>
-          <p:cNvPr id="26" name="TextBox 25"/>
-          <p:cNvSpPr txBox="1"/>
-          <p:nvPr/>
-        </p:nvSpPr>
-        <p:spPr>
-          <a:xfrm>
-            <a:off x="4389120" y="3749039"/>
-            <a:ext cx="4480560" cy="411480"/>
-          </a:xfrm>
-          <a:prstGeom prst="rect">
-            <a:avLst/>
-          </a:prstGeom>
-          <a:noFill/>
-        </p:spPr>
-        <p:txBody>
-          <a:bodyPr wrap="none">
-            <a:spAutoFit/>
-          </a:bodyPr>
-          <a:lstStyle/>
-          <a:p>
+          <p:cNvPr id="27" name="TextBox 26"/>
+          <p:cNvSpPr txBox="1"/>
+          <p:nvPr/>
+        </p:nvSpPr>
+        <p:spPr>
+          <a:xfrm>
+            <a:off x="4297680" y="3794760"/>
+            <a:ext cx="4572000" cy="384048"/>
+          </a:xfrm>
+          <a:prstGeom prst="rect">
+            <a:avLst/>
+          </a:prstGeom>
+          <a:noFill/>
+        </p:spPr>
+        <p:txBody>
+          <a:bodyPr wrap="square">
+            <a:spAutoFit/>
+          </a:bodyPr>
+          <a:lstStyle/>
+          <a:p>
+            <a:pPr algn="l"/>
             <a:r>
               <a:rPr sz="1000" b="0">
                 <a:solidFill>
                   <a:srgbClr val="AAAAAA"/>
                 </a:solidFill>
               </a:rPr>
-              <a:t>Catches sudden spikes invisible to trend methods. Window=5 gives local context.</a:t>
+              <a:t>Catches single-timestamp spikes invisible to trend methods. Rolling window gives local context.</a:t>
             </a:r>
           </a:p>
         </p:txBody>
@@ -6354,7 +8083,7 @@
         </p:nvSpPr>
         <p:spPr>
           <a:xfrm>
-            <a:off x="274320" y="182880"/>
+            <a:off x="274320" y="137160"/>
             <a:ext cx="8595360" cy="457200"/>
           </a:xfrm>
           <a:prstGeom prst="rect">
@@ -6363,13 +8092,14 @@
           <a:noFill/>
         </p:spPr>
         <p:txBody>
-          <a:bodyPr wrap="none">
-            <a:spAutoFit/>
-          </a:bodyPr>
-          <a:lstStyle/>
-          <a:p>
-            <a:r>
-              <a:rPr sz="2200" b="1">
+          <a:bodyPr wrap="square">
+            <a:spAutoFit/>
+          </a:bodyPr>
+          <a:lstStyle/>
+          <a:p>
+            <a:pPr algn="l"/>
+            <a:r>
+              <a:rPr sz="2400" b="1">
                 <a:solidFill>
                   <a:srgbClr val="00B4D8"/>
                 </a:solidFill>
@@ -6387,27 +8117,28 @@
         </p:nvSpPr>
         <p:spPr>
           <a:xfrm>
-            <a:off x="274320" y="777240"/>
-            <a:ext cx="1188720" cy="384048"/>
-          </a:xfrm>
-          <a:prstGeom prst="rect">
-            <a:avLst/>
-          </a:prstGeom>
-          <a:noFill/>
-        </p:spPr>
-        <p:txBody>
-          <a:bodyPr wrap="none">
-            <a:spAutoFit/>
-          </a:bodyPr>
-          <a:lstStyle/>
-          <a:p>
+            <a:off x="274320" y="749808"/>
+            <a:ext cx="1280160" cy="384048"/>
+          </a:xfrm>
+          <a:prstGeom prst="rect">
+            <a:avLst/>
+          </a:prstGeom>
+          <a:noFill/>
+        </p:spPr>
+        <p:txBody>
+          <a:bodyPr wrap="square">
+            <a:spAutoFit/>
+          </a:bodyPr>
+          <a:lstStyle/>
+          <a:p>
+            <a:pPr algn="l"/>
             <a:r>
               <a:rPr sz="1200" b="1">
                 <a:solidFill>
                   <a:srgbClr val="00B4D8"/>
                 </a:solidFill>
               </a:rPr>
-              <a:t>1  Anomaly</a:t>
+              <a:t>1  Anomaly input</a:t>
             </a:r>
           </a:p>
         </p:txBody>
@@ -6420,7 +8151,7 @@
         </p:nvSpPr>
         <p:spPr>
           <a:xfrm>
-            <a:off x="1554480" y="777240"/>
+            <a:off x="1645920" y="749808"/>
             <a:ext cx="4389120" cy="384048"/>
           </a:xfrm>
           <a:prstGeom prst="rect">
@@ -6429,18 +8160,19 @@
           <a:noFill/>
         </p:spPr>
         <p:txBody>
-          <a:bodyPr wrap="none">
-            <a:spAutoFit/>
-          </a:bodyPr>
-          <a:lstStyle/>
-          <a:p>
+          <a:bodyPr wrap="square">
+            <a:spAutoFit/>
+          </a:bodyPr>
+          <a:lstStyle/>
+          <a:p>
+            <a:pPr algn="l"/>
             <a:r>
               <a:rPr sz="1100" b="0">
                 <a:solidFill>
                   <a:srgbClr val="FFFFFF"/>
                 </a:solidFill>
               </a:rPr>
-              <a:t>procedure + severity + failure_causes + evidence</a:t>
+              <a:t>procedure + severity + failure_causes + evidence dict</a:t>
             </a:r>
           </a:p>
         </p:txBody>
@@ -6453,27 +8185,28 @@
         </p:nvSpPr>
         <p:spPr>
           <a:xfrm>
-            <a:off x="6035040" y="777240"/>
-            <a:ext cx="2834640" cy="384048"/>
-          </a:xfrm>
-          <a:prstGeom prst="rect">
-            <a:avLst/>
-          </a:prstGeom>
-          <a:noFill/>
-        </p:spPr>
-        <p:txBody>
-          <a:bodyPr wrap="none">
-            <a:spAutoFit/>
-          </a:bodyPr>
-          <a:lstStyle/>
-          <a:p>
+            <a:off x="6126480" y="749808"/>
+            <a:ext cx="2743200" cy="384048"/>
+          </a:xfrm>
+          <a:prstGeom prst="rect">
+            <a:avLst/>
+          </a:prstGeom>
+          <a:noFill/>
+        </p:spPr>
+        <p:txBody>
+          <a:bodyPr wrap="square">
+            <a:spAutoFit/>
+          </a:bodyPr>
+          <a:lstStyle/>
+          <a:p>
+            <a:pPr algn="l"/>
             <a:r>
               <a:rPr sz="900" b="0">
                 <a:solidFill>
                   <a:srgbClr val="AAAAAA"/>
                 </a:solidFill>
               </a:rPr>
-              <a:t>Input to pipeline</a:t>
+              <a:t>from PCAP / KPI / Stats detector</a:t>
             </a:r>
           </a:p>
         </p:txBody>
@@ -6486,27 +8219,28 @@
         </p:nvSpPr>
         <p:spPr>
           <a:xfrm>
-            <a:off x="274320" y="1325880"/>
-            <a:ext cx="1188720" cy="384048"/>
-          </a:xfrm>
-          <a:prstGeom prst="rect">
-            <a:avLst/>
-          </a:prstGeom>
-          <a:noFill/>
-        </p:spPr>
-        <p:txBody>
-          <a:bodyPr wrap="none">
-            <a:spAutoFit/>
-          </a:bodyPr>
-          <a:lstStyle/>
-          <a:p>
+            <a:off x="274320" y="1280160"/>
+            <a:ext cx="1280160" cy="384048"/>
+          </a:xfrm>
+          <a:prstGeom prst="rect">
+            <a:avLst/>
+          </a:prstGeom>
+          <a:noFill/>
+        </p:spPr>
+        <p:txBody>
+          <a:bodyPr wrap="square">
+            <a:spAutoFit/>
+          </a:bodyPr>
+          <a:lstStyle/>
+          <a:p>
+            <a:pPr algn="l"/>
             <a:r>
               <a:rPr sz="1200" b="1">
                 <a:solidFill>
                   <a:srgbClr val="00B4D8"/>
                 </a:solidFill>
               </a:rPr>
-              <a:t>2  Query Build</a:t>
+              <a:t>2  Query build</a:t>
             </a:r>
           </a:p>
         </p:txBody>
@@ -6519,7 +8253,7 @@
         </p:nvSpPr>
         <p:spPr>
           <a:xfrm>
-            <a:off x="1554480" y="1325880"/>
+            <a:off x="1645920" y="1280160"/>
             <a:ext cx="4389120" cy="384048"/>
           </a:xfrm>
           <a:prstGeom prst="rect">
@@ -6528,11 +8262,12 @@
           <a:noFill/>
         </p:spPr>
         <p:txBody>
-          <a:bodyPr wrap="none">
-            <a:spAutoFit/>
-          </a:bodyPr>
-          <a:lstStyle/>
-          <a:p>
+          <a:bodyPr wrap="square">
+            <a:spAutoFit/>
+          </a:bodyPr>
+          <a:lstStyle/>
+          <a:p>
+            <a:pPr algn="l"/>
             <a:r>
               <a:rPr sz="1100" b="0">
                 <a:solidFill>
@@ -6552,20 +8287,21 @@
         </p:nvSpPr>
         <p:spPr>
           <a:xfrm>
-            <a:off x="6035040" y="1325880"/>
-            <a:ext cx="2834640" cy="384048"/>
-          </a:xfrm>
-          <a:prstGeom prst="rect">
-            <a:avLst/>
-          </a:prstGeom>
-          <a:noFill/>
-        </p:spPr>
-        <p:txBody>
-          <a:bodyPr wrap="none">
-            <a:spAutoFit/>
-          </a:bodyPr>
-          <a:lstStyle/>
-          <a:p>
+            <a:off x="6126480" y="1280160"/>
+            <a:ext cx="2743200" cy="384048"/>
+          </a:xfrm>
+          <a:prstGeom prst="rect">
+            <a:avLst/>
+          </a:prstGeom>
+          <a:noFill/>
+        </p:spPr>
+        <p:txBody>
+          <a:bodyPr wrap="square">
+            <a:spAutoFit/>
+          </a:bodyPr>
+          <a:lstStyle/>
+          <a:p>
+            <a:pPr algn="l"/>
             <a:r>
               <a:rPr sz="900" b="0">
                 <a:solidFill>
@@ -6585,20 +8321,21 @@
         </p:nvSpPr>
         <p:spPr>
           <a:xfrm>
-            <a:off x="274320" y="1874519"/>
-            <a:ext cx="1188720" cy="384048"/>
-          </a:xfrm>
-          <a:prstGeom prst="rect">
-            <a:avLst/>
-          </a:prstGeom>
-          <a:noFill/>
-        </p:spPr>
-        <p:txBody>
-          <a:bodyPr wrap="none">
-            <a:spAutoFit/>
-          </a:bodyPr>
-          <a:lstStyle/>
-          <a:p>
+            <a:off x="274320" y="1810512"/>
+            <a:ext cx="1280160" cy="384048"/>
+          </a:xfrm>
+          <a:prstGeom prst="rect">
+            <a:avLst/>
+          </a:prstGeom>
+          <a:noFill/>
+        </p:spPr>
+        <p:txBody>
+          <a:bodyPr wrap="square">
+            <a:spAutoFit/>
+          </a:bodyPr>
+          <a:lstStyle/>
+          <a:p>
+            <a:pPr algn="l"/>
             <a:r>
               <a:rPr sz="1200" b="1">
                 <a:solidFill>
@@ -6618,7 +8355,7 @@
         </p:nvSpPr>
         <p:spPr>
           <a:xfrm>
-            <a:off x="1554480" y="1874519"/>
+            <a:off x="1645920" y="1810512"/>
             <a:ext cx="4389120" cy="384048"/>
           </a:xfrm>
           <a:prstGeom prst="rect">
@@ -6627,11 +8364,12 @@
           <a:noFill/>
         </p:spPr>
         <p:txBody>
-          <a:bodyPr wrap="none">
-            <a:spAutoFit/>
-          </a:bodyPr>
-          <a:lstStyle/>
-          <a:p>
+          <a:bodyPr wrap="square">
+            <a:spAutoFit/>
+          </a:bodyPr>
+          <a:lstStyle/>
+          <a:p>
+            <a:pPr algn="l"/>
             <a:r>
               <a:rPr sz="1100" b="0">
                 <a:solidFill>
@@ -6651,27 +8389,28 @@
         </p:nvSpPr>
         <p:spPr>
           <a:xfrm>
-            <a:off x="6035040" y="1874519"/>
-            <a:ext cx="2834640" cy="384048"/>
-          </a:xfrm>
-          <a:prstGeom prst="rect">
-            <a:avLst/>
-          </a:prstGeom>
-          <a:noFill/>
-        </p:spPr>
-        <p:txBody>
-          <a:bodyPr wrap="none">
-            <a:spAutoFit/>
-          </a:bodyPr>
-          <a:lstStyle/>
-          <a:p>
+            <a:off x="6126480" y="1810512"/>
+            <a:ext cx="2743200" cy="384048"/>
+          </a:xfrm>
+          <a:prstGeom prst="rect">
+            <a:avLst/>
+          </a:prstGeom>
+          <a:noFill/>
+        </p:spPr>
+        <p:txBody>
+          <a:bodyPr wrap="square">
+            <a:spAutoFit/>
+          </a:bodyPr>
+          <a:lstStyle/>
+          <a:p>
+            <a:pPr algn="l"/>
             <a:r>
               <a:rPr sz="900" b="0">
                 <a:solidFill>
                   <a:srgbClr val="AAAAAA"/>
                 </a:solidFill>
               </a:rPr>
-              <a:t>all-MiniLM-L6-v2 embeddings (80 MB)</a:t>
+              <a:t>all-MiniLM-L6-v2 (80 MB), 38 curated chunks</a:t>
             </a:r>
           </a:p>
         </p:txBody>
@@ -6684,20 +8423,21 @@
         </p:nvSpPr>
         <p:spPr>
           <a:xfrm>
-            <a:off x="274320" y="2423160"/>
-            <a:ext cx="1188720" cy="384048"/>
-          </a:xfrm>
-          <a:prstGeom prst="rect">
-            <a:avLst/>
-          </a:prstGeom>
-          <a:noFill/>
-        </p:spPr>
-        <p:txBody>
-          <a:bodyPr wrap="none">
-            <a:spAutoFit/>
-          </a:bodyPr>
-          <a:lstStyle/>
-          <a:p>
+            <a:off x="274320" y="2340863"/>
+            <a:ext cx="1280160" cy="384048"/>
+          </a:xfrm>
+          <a:prstGeom prst="rect">
+            <a:avLst/>
+          </a:prstGeom>
+          <a:noFill/>
+        </p:spPr>
+        <p:txBody>
+          <a:bodyPr wrap="square">
+            <a:spAutoFit/>
+          </a:bodyPr>
+          <a:lstStyle/>
+          <a:p>
+            <a:pPr algn="l"/>
             <a:r>
               <a:rPr sz="1200" b="1">
                 <a:solidFill>
@@ -6717,7 +8457,7 @@
         </p:nvSpPr>
         <p:spPr>
           <a:xfrm>
-            <a:off x="1554480" y="2423160"/>
+            <a:off x="1645920" y="2340863"/>
             <a:ext cx="4389120" cy="384048"/>
           </a:xfrm>
           <a:prstGeom prst="rect">
@@ -6726,18 +8466,19 @@
           <a:noFill/>
         </p:spPr>
         <p:txBody>
-          <a:bodyPr wrap="none">
-            <a:spAutoFit/>
-          </a:bodyPr>
-          <a:lstStyle/>
-          <a:p>
+          <a:bodyPr wrap="square">
+            <a:spAutoFit/>
+          </a:bodyPr>
+          <a:lstStyle/>
+          <a:p>
+            <a:pPr algn="l"/>
             <a:r>
               <a:rPr sz="1100" b="0">
                 <a:solidFill>
                   <a:srgbClr val="FFFFFF"/>
                 </a:solidFill>
               </a:rPr>
-              <a:t>anomaly + spec context → structured JSON prompt</a:t>
+              <a:t>anomaly + retrieved spec context → structured JSON prompt</a:t>
             </a:r>
           </a:p>
         </p:txBody>
@@ -6750,27 +8491,28 @@
         </p:nvSpPr>
         <p:spPr>
           <a:xfrm>
-            <a:off x="6035040" y="2423160"/>
-            <a:ext cx="2834640" cy="384048"/>
-          </a:xfrm>
-          <a:prstGeom prst="rect">
-            <a:avLst/>
-          </a:prstGeom>
-          <a:noFill/>
-        </p:spPr>
-        <p:txBody>
-          <a:bodyPr wrap="none">
-            <a:spAutoFit/>
-          </a:bodyPr>
-          <a:lstStyle/>
-          <a:p>
+            <a:off x="6126480" y="2340863"/>
+            <a:ext cx="2743200" cy="384048"/>
+          </a:xfrm>
+          <a:prstGeom prst="rect">
+            <a:avLst/>
+          </a:prstGeom>
+          <a:noFill/>
+        </p:spPr>
+        <p:txBody>
+          <a:bodyPr wrap="square">
+            <a:spAutoFit/>
+          </a:bodyPr>
+          <a:lstStyle/>
+          <a:p>
+            <a:pPr algn="l"/>
             <a:r>
               <a:rPr sz="900" b="0">
                 <a:solidFill>
                   <a:srgbClr val="AAAAAA"/>
                 </a:solidFill>
               </a:rPr>
-              <a:t>_build_prompt()</a:t>
+              <a:t>_build_prompt()  |  temperature=0.2</a:t>
             </a:r>
           </a:p>
         </p:txBody>
@@ -6783,27 +8525,28 @@
         </p:nvSpPr>
         <p:spPr>
           <a:xfrm>
-            <a:off x="274320" y="2971800"/>
-            <a:ext cx="1188720" cy="384048"/>
-          </a:xfrm>
-          <a:prstGeom prst="rect">
-            <a:avLst/>
-          </a:prstGeom>
-          <a:noFill/>
-        </p:spPr>
-        <p:txBody>
-          <a:bodyPr wrap="none">
-            <a:spAutoFit/>
-          </a:bodyPr>
-          <a:lstStyle/>
-          <a:p>
+            <a:off x="274320" y="2871215"/>
+            <a:ext cx="1280160" cy="384048"/>
+          </a:xfrm>
+          <a:prstGeom prst="rect">
+            <a:avLst/>
+          </a:prstGeom>
+          <a:noFill/>
+        </p:spPr>
+        <p:txBody>
+          <a:bodyPr wrap="square">
+            <a:spAutoFit/>
+          </a:bodyPr>
+          <a:lstStyle/>
+          <a:p>
+            <a:pPr algn="l"/>
             <a:r>
               <a:rPr sz="1200" b="1">
                 <a:solidFill>
                   <a:srgbClr val="00B4D8"/>
                 </a:solidFill>
               </a:rPr>
-              <a:t>5  LLM Call</a:t>
+              <a:t>5  LLM call</a:t>
             </a:r>
           </a:p>
         </p:txBody>
@@ -6816,7 +8559,7 @@
         </p:nvSpPr>
         <p:spPr>
           <a:xfrm>
-            <a:off x="1554480" y="2971800"/>
+            <a:off x="1645920" y="2871215"/>
             <a:ext cx="4389120" cy="384048"/>
           </a:xfrm>
           <a:prstGeom prst="rect">
@@ -6825,18 +8568,19 @@
           <a:noFill/>
         </p:spPr>
         <p:txBody>
-          <a:bodyPr wrap="none">
-            <a:spAutoFit/>
-          </a:bodyPr>
-          <a:lstStyle/>
-          <a:p>
+          <a:bodyPr wrap="square">
+            <a:spAutoFit/>
+          </a:bodyPr>
+          <a:lstStyle/>
+          <a:p>
+            <a:pPr algn="l"/>
             <a:r>
               <a:rPr sz="1100" b="0">
                 <a:solidFill>
                   <a:srgbClr val="FFFFFF"/>
                 </a:solidFill>
               </a:rPr>
-              <a:t>Ollama (phi3:mini / llama3.2 / mistral fallback chain)</a:t>
+              <a:t>Ollama: phi3:mini → llama3.2:1b → mistral:7b  (preference chain)</a:t>
             </a:r>
           </a:p>
         </p:txBody>
@@ -6849,27 +8593,28 @@
         </p:nvSpPr>
         <p:spPr>
           <a:xfrm>
-            <a:off x="6035040" y="2971800"/>
-            <a:ext cx="2834640" cy="384048"/>
-          </a:xfrm>
-          <a:prstGeom prst="rect">
-            <a:avLst/>
-          </a:prstGeom>
-          <a:noFill/>
-        </p:spPr>
-        <p:txBody>
-          <a:bodyPr wrap="none">
-            <a:spAutoFit/>
-          </a:bodyPr>
-          <a:lstStyle/>
-          <a:p>
+            <a:off x="6126480" y="2871215"/>
+            <a:ext cx="2743200" cy="384048"/>
+          </a:xfrm>
+          <a:prstGeom prst="rect">
+            <a:avLst/>
+          </a:prstGeom>
+          <a:noFill/>
+        </p:spPr>
+        <p:txBody>
+          <a:bodyPr wrap="square">
+            <a:spAutoFit/>
+          </a:bodyPr>
+          <a:lstStyle/>
+          <a:p>
+            <a:pPr algn="l"/>
             <a:r>
               <a:rPr sz="900" b="0">
                 <a:solidFill>
                   <a:srgbClr val="AAAAAA"/>
                 </a:solidFill>
               </a:rPr>
-              <a:t>temperature=0.2, num_predict=600</a:t>
+              <a:t>Runs fully LOCAL — no cloud API, no data leaves premises</a:t>
             </a:r>
           </a:p>
         </p:txBody>
@@ -6882,27 +8627,28 @@
         </p:nvSpPr>
         <p:spPr>
           <a:xfrm>
-            <a:off x="274320" y="3520440"/>
-            <a:ext cx="1188720" cy="384048"/>
-          </a:xfrm>
-          <a:prstGeom prst="rect">
-            <a:avLst/>
-          </a:prstGeom>
-          <a:noFill/>
-        </p:spPr>
-        <p:txBody>
-          <a:bodyPr wrap="none">
-            <a:spAutoFit/>
-          </a:bodyPr>
-          <a:lstStyle/>
-          <a:p>
+            <a:off x="274320" y="3401568"/>
+            <a:ext cx="1280160" cy="384048"/>
+          </a:xfrm>
+          <a:prstGeom prst="rect">
+            <a:avLst/>
+          </a:prstGeom>
+          <a:noFill/>
+        </p:spPr>
+        <p:txBody>
+          <a:bodyPr wrap="square">
+            <a:spAutoFit/>
+          </a:bodyPr>
+          <a:lstStyle/>
+          <a:p>
+            <a:pPr algn="l"/>
             <a:r>
               <a:rPr sz="1200" b="1">
                 <a:solidFill>
                   <a:srgbClr val="00B4D8"/>
                 </a:solidFill>
               </a:rPr>
-              <a:t>6  Fallback</a:t>
+              <a:t>6  Rule-based fallback</a:t>
             </a:r>
           </a:p>
         </p:txBody>
@@ -6915,7 +8661,7 @@
         </p:nvSpPr>
         <p:spPr>
           <a:xfrm>
-            <a:off x="1554480" y="3520440"/>
+            <a:off x="1645920" y="3401568"/>
             <a:ext cx="4389120" cy="384048"/>
           </a:xfrm>
           <a:prstGeom prst="rect">
@@ -6924,18 +8670,19 @@
           <a:noFill/>
         </p:spPr>
         <p:txBody>
-          <a:bodyPr wrap="none">
-            <a:spAutoFit/>
-          </a:bodyPr>
-          <a:lstStyle/>
-          <a:p>
+          <a:bodyPr wrap="square">
+            <a:spAutoFit/>
+          </a:bodyPr>
+          <a:lstStyle/>
+          <a:p>
+            <a:pPr algn="l"/>
             <a:r>
               <a:rPr sz="1100" b="0">
                 <a:solidFill>
                   <a:srgbClr val="FFFFFF"/>
                 </a:solidFill>
               </a:rPr>
-              <a:t>rule-based explanation from retrieved chunks</a:t>
+              <a:t>template explanation built from retrieved chunks</a:t>
             </a:r>
           </a:p>
         </p:txBody>
@@ -6948,27 +8695,28 @@
         </p:nvSpPr>
         <p:spPr>
           <a:xfrm>
-            <a:off x="6035040" y="3520440"/>
-            <a:ext cx="2834640" cy="384048"/>
-          </a:xfrm>
-          <a:prstGeom prst="rect">
-            <a:avLst/>
-          </a:prstGeom>
-          <a:noFill/>
-        </p:spPr>
-        <p:txBody>
-          <a:bodyPr wrap="none">
-            <a:spAutoFit/>
-          </a:bodyPr>
-          <a:lstStyle/>
-          <a:p>
+            <a:off x="6126480" y="3401568"/>
+            <a:ext cx="2743200" cy="384048"/>
+          </a:xfrm>
+          <a:prstGeom prst="rect">
+            <a:avLst/>
+          </a:prstGeom>
+          <a:noFill/>
+        </p:spPr>
+        <p:txBody>
+          <a:bodyPr wrap="square">
+            <a:spAutoFit/>
+          </a:bodyPr>
+          <a:lstStyle/>
+          <a:p>
+            <a:pPr algn="l"/>
             <a:r>
               <a:rPr sz="900" b="0">
                 <a:solidFill>
                   <a:srgbClr val="AAAAAA"/>
                 </a:solidFill>
               </a:rPr>
-              <a:t>if Ollama unavailable — still uses real 3GPP content</a:t>
+              <a:t>fires automatically if Ollama unavailable</a:t>
             </a:r>
           </a:p>
         </p:txBody>
@@ -6981,20 +8729,21 @@
         </p:nvSpPr>
         <p:spPr>
           <a:xfrm>
-            <a:off x="274320" y="4069079"/>
-            <a:ext cx="1188720" cy="384048"/>
-          </a:xfrm>
-          <a:prstGeom prst="rect">
-            <a:avLst/>
-          </a:prstGeom>
-          <a:noFill/>
-        </p:spPr>
-        <p:txBody>
-          <a:bodyPr wrap="none">
-            <a:spAutoFit/>
-          </a:bodyPr>
-          <a:lstStyle/>
-          <a:p>
+            <a:off x="274320" y="3931920"/>
+            <a:ext cx="1280160" cy="384048"/>
+          </a:xfrm>
+          <a:prstGeom prst="rect">
+            <a:avLst/>
+          </a:prstGeom>
+          <a:noFill/>
+        </p:spPr>
+        <p:txBody>
+          <a:bodyPr wrap="square">
+            <a:spAutoFit/>
+          </a:bodyPr>
+          <a:lstStyle/>
+          <a:p>
+            <a:pPr algn="l"/>
             <a:r>
               <a:rPr sz="1200" b="1">
                 <a:solidFill>
@@ -7014,7 +8763,7 @@
         </p:nvSpPr>
         <p:spPr>
           <a:xfrm>
-            <a:off x="1554480" y="4069079"/>
+            <a:off x="1645920" y="3931920"/>
             <a:ext cx="4389120" cy="384048"/>
           </a:xfrm>
           <a:prstGeom prst="rect">
@@ -7023,18 +8772,19 @@
           <a:noFill/>
         </p:spPr>
         <p:txBody>
-          <a:bodyPr wrap="none">
-            <a:spAutoFit/>
-          </a:bodyPr>
-          <a:lstStyle/>
-          <a:p>
+          <a:bodyPr wrap="square">
+            <a:spAutoFit/>
+          </a:bodyPr>
+          <a:lstStyle/>
+          <a:p>
+            <a:pPr algn="l"/>
             <a:r>
               <a:rPr sz="1100" b="0">
                 <a:solidFill>
                   <a:srgbClr val="FFFFFF"/>
                 </a:solidFill>
               </a:rPr>
-              <a:t>hypothesis · citations · investigation_hints · source</a:t>
+              <a:t>hypothesis · severity · citations (spec §) · investigation_hints</a:t>
             </a:r>
           </a:p>
         </p:txBody>
@@ -7047,27 +8797,28 @@
         </p:nvSpPr>
         <p:spPr>
           <a:xfrm>
-            <a:off x="6035040" y="4069079"/>
-            <a:ext cx="2834640" cy="384048"/>
-          </a:xfrm>
-          <a:prstGeom prst="rect">
-            <a:avLst/>
-          </a:prstGeom>
-          <a:noFill/>
-        </p:spPr>
-        <p:txBody>
-          <a:bodyPr wrap="none">
-            <a:spAutoFit/>
-          </a:bodyPr>
-          <a:lstStyle/>
-          <a:p>
+            <a:off x="6126480" y="3931920"/>
+            <a:ext cx="2743200" cy="384048"/>
+          </a:xfrm>
+          <a:prstGeom prst="rect">
+            <a:avLst/>
+          </a:prstGeom>
+          <a:noFill/>
+        </p:spPr>
+        <p:txBody>
+          <a:bodyPr wrap="square">
+            <a:spAutoFit/>
+          </a:bodyPr>
+          <a:lstStyle/>
+          <a:p>
+            <a:pPr algn="l"/>
             <a:r>
               <a:rPr sz="900" b="0">
                 <a:solidFill>
                   <a:srgbClr val="AAAAAA"/>
                 </a:solidFill>
               </a:rPr>
-              <a:t>Displayed in dashboard + returned by API</a:t>
+              <a:t>dashboard + REST API response</a:t>
             </a:r>
           </a:p>
         </p:txBody>
@@ -7080,27 +8831,28 @@
         </p:nvSpPr>
         <p:spPr>
           <a:xfrm>
-            <a:off x="274320" y="4663440"/>
-            <a:ext cx="8412480" cy="274320"/>
-          </a:xfrm>
-          <a:prstGeom prst="rect">
-            <a:avLst/>
-          </a:prstGeom>
-          <a:noFill/>
-        </p:spPr>
-        <p:txBody>
-          <a:bodyPr wrap="none">
-            <a:spAutoFit/>
-          </a:bodyPr>
-          <a:lstStyle/>
-          <a:p>
-            <a:r>
-              <a:rPr sz="1000">
+            <a:off x="274320" y="4572000"/>
+            <a:ext cx="8595360" cy="256032"/>
+          </a:xfrm>
+          <a:prstGeom prst="rect">
+            <a:avLst/>
+          </a:prstGeom>
+          <a:noFill/>
+        </p:spPr>
+        <p:txBody>
+          <a:bodyPr wrap="square">
+            <a:spAutoFit/>
+          </a:bodyPr>
+          <a:lstStyle/>
+          <a:p>
+            <a:pPr algn="l"/>
+            <a:r>
+              <a:rPr sz="1000" b="0">
                 <a:solidFill>
                   <a:srgbClr val="FF9400"/>
                 </a:solidFill>
               </a:rPr>
-              <a:t>Knowledge base: 38 curated 3GPP spec chunks (TS 24.501 · 38.413 · 38.331 · 38.473 · 38.463 · 38.423 · 38.913)</a:t>
+              <a:t>Knowledge base: 38 curated chunks — TS 24.501 · 38.413 · 38.331 · 38.473 · 38.463 · 38.423 · 38.913</a:t>
             </a:r>
           </a:p>
         </p:txBody>
@@ -7139,7 +8891,7 @@
         </p:nvSpPr>
         <p:spPr>
           <a:xfrm>
-            <a:off x="274320" y="182880"/>
+            <a:off x="274320" y="137160"/>
             <a:ext cx="8595360" cy="457200"/>
           </a:xfrm>
           <a:prstGeom prst="rect">
@@ -7148,18 +8900,19 @@
           <a:noFill/>
         </p:spPr>
         <p:txBody>
-          <a:bodyPr wrap="none">
-            <a:spAutoFit/>
-          </a:bodyPr>
-          <a:lstStyle/>
-          <a:p>
-            <a:r>
-              <a:rPr sz="2200" b="1">
+          <a:bodyPr wrap="square">
+            <a:spAutoFit/>
+          </a:bodyPr>
+          <a:lstStyle/>
+          <a:p>
+            <a:pPr algn="l"/>
+            <a:r>
+              <a:rPr sz="2400" b="1">
                 <a:solidFill>
                   <a:srgbClr val="00B4D8"/>
                 </a:solidFill>
               </a:rPr>
-              <a:t>🌐  Output Interfaces — Dashboard · REST API · CLI</a:t>
+              <a:t>🔄  MLOps Pipeline — Feedback Loop + Prediction Layer</a:t>
             </a:r>
           </a:p>
         </p:txBody>
@@ -7172,27 +8925,28 @@
         </p:nvSpPr>
         <p:spPr>
           <a:xfrm>
-            <a:off x="274320" y="777240"/>
-            <a:ext cx="8412480" cy="320040"/>
-          </a:xfrm>
-          <a:prstGeom prst="rect">
-            <a:avLst/>
-          </a:prstGeom>
-          <a:noFill/>
-        </p:spPr>
-        <p:txBody>
-          <a:bodyPr wrap="none">
-            <a:spAutoFit/>
-          </a:bodyPr>
-          <a:lstStyle/>
-          <a:p>
-            <a:r>
-              <a:rPr sz="1300" b="1">
+            <a:off x="274320" y="658368"/>
+            <a:ext cx="4114800" cy="274320"/>
+          </a:xfrm>
+          <a:prstGeom prst="rect">
+            <a:avLst/>
+          </a:prstGeom>
+          <a:noFill/>
+        </p:spPr>
+        <p:txBody>
+          <a:bodyPr wrap="square">
+            <a:spAutoFit/>
+          </a:bodyPr>
+          <a:lstStyle/>
+          <a:p>
+            <a:pPr algn="l"/>
+            <a:r>
+              <a:rPr sz="1400" b="1">
                 <a:solidFill>
                   <a:srgbClr val="2DC653"/>
                 </a:solidFill>
               </a:rPr>
-              <a:t>▶  Streamlit Dashboard  —  make dev  →  http://localhost:8501</a:t>
+              <a:t>Feedback Loop (Tier 5)</a:t>
             </a:r>
           </a:p>
         </p:txBody>
@@ -7205,27 +8959,28 @@
         </p:nvSpPr>
         <p:spPr>
           <a:xfrm>
-            <a:off x="640080" y="1097280"/>
-            <a:ext cx="8046720" cy="256032"/>
-          </a:xfrm>
-          <a:prstGeom prst="rect">
-            <a:avLst/>
-          </a:prstGeom>
-          <a:noFill/>
-        </p:spPr>
-        <p:txBody>
-          <a:bodyPr wrap="none">
-            <a:spAutoFit/>
-          </a:bodyPr>
-          <a:lstStyle/>
-          <a:p>
-            <a:r>
-              <a:rPr sz="1100">
+            <a:off x="457200" y="960120"/>
+            <a:ext cx="3931920" cy="274320"/>
+          </a:xfrm>
+          <a:prstGeom prst="rect">
+            <a:avLst/>
+          </a:prstGeom>
+          <a:noFill/>
+        </p:spPr>
+        <p:txBody>
+          <a:bodyPr wrap="square">
+            <a:spAutoFit/>
+          </a:bodyPr>
+          <a:lstStyle/>
+          <a:p>
+            <a:pPr algn="l"/>
+            <a:r>
+              <a:rPr sz="1000" b="0">
                 <a:solidFill>
                   <a:srgbClr val="FFFFFF"/>
                 </a:solidFill>
               </a:rPr>
-              <a:t>• Upload PCAP or KPI file</a:t>
+              <a:t>• Engineer marks each anomaly:  👍 Correct / 👎 False Positive / ❓ Uncertain</a:t>
             </a:r>
           </a:p>
         </p:txBody>
@@ -7238,27 +8993,28 @@
         </p:nvSpPr>
         <p:spPr>
           <a:xfrm>
-            <a:off x="640080" y="1353312"/>
-            <a:ext cx="8046720" cy="256032"/>
-          </a:xfrm>
-          <a:prstGeom prst="rect">
-            <a:avLst/>
-          </a:prstGeom>
-          <a:noFill/>
-        </p:spPr>
-        <p:txBody>
-          <a:bodyPr wrap="none">
-            <a:spAutoFit/>
-          </a:bodyPr>
-          <a:lstStyle/>
-          <a:p>
-            <a:r>
-              <a:rPr sz="1100">
+            <a:off x="457200" y="1252728"/>
+            <a:ext cx="3931920" cy="274320"/>
+          </a:xfrm>
+          <a:prstGeom prst="rect">
+            <a:avLst/>
+          </a:prstGeom>
+          <a:noFill/>
+        </p:spPr>
+        <p:txBody>
+          <a:bodyPr wrap="square">
+            <a:spAutoFit/>
+          </a:bodyPr>
+          <a:lstStyle/>
+          <a:p>
+            <a:pPr algn="l"/>
+            <a:r>
+              <a:rPr sz="1000" b="0">
                 <a:solidFill>
                   <a:srgbClr val="FFFFFF"/>
                 </a:solidFill>
               </a:rPr>
-              <a:t>• 6 protocol tabs + failure cause breakdown + IE inspector</a:t>
+              <a:t>• Feedback stored to JSONL log  (src/feedback/store.py)</a:t>
             </a:r>
           </a:p>
         </p:txBody>
@@ -7271,27 +9027,28 @@
         </p:nvSpPr>
         <p:spPr>
           <a:xfrm>
-            <a:off x="640080" y="1609344"/>
-            <a:ext cx="8046720" cy="256032"/>
-          </a:xfrm>
-          <a:prstGeom prst="rect">
-            <a:avLst/>
-          </a:prstGeom>
-          <a:noFill/>
-        </p:spPr>
-        <p:txBody>
-          <a:bodyPr wrap="none">
-            <a:spAutoFit/>
-          </a:bodyPr>
-          <a:lstStyle/>
-          <a:p>
-            <a:r>
-              <a:rPr sz="1100">
+            <a:off x="457200" y="1545336"/>
+            <a:ext cx="3931920" cy="274320"/>
+          </a:xfrm>
+          <a:prstGeom prst="rect">
+            <a:avLst/>
+          </a:prstGeom>
+          <a:noFill/>
+        </p:spPr>
+        <p:txBody>
+          <a:bodyPr wrap="square">
+            <a:spAutoFit/>
+          </a:bodyPr>
+          <a:lstStyle/>
+          <a:p>
+            <a:pPr algn="l"/>
+            <a:r>
+              <a:rPr sz="1000" b="0">
                 <a:solidFill>
                   <a:srgbClr val="FFFFFF"/>
                 </a:solidFill>
               </a:rPr>
-              <a:t>• 6-detector method comparison matrix</a:t>
+              <a:t>• Nightly retrainer reads FP rate per detector</a:t>
             </a:r>
           </a:p>
         </p:txBody>
@@ -7304,27 +9061,28 @@
         </p:nvSpPr>
         <p:spPr>
           <a:xfrm>
-            <a:off x="640080" y="1865376"/>
-            <a:ext cx="8046720" cy="256032"/>
-          </a:xfrm>
-          <a:prstGeom prst="rect">
-            <a:avLst/>
-          </a:prstGeom>
-          <a:noFill/>
-        </p:spPr>
-        <p:txBody>
-          <a:bodyPr wrap="none">
-            <a:spAutoFit/>
-          </a:bodyPr>
-          <a:lstStyle/>
-          <a:p>
-            <a:r>
-              <a:rPr sz="1100">
+            <a:off x="457200" y="1837943"/>
+            <a:ext cx="3931920" cy="274320"/>
+          </a:xfrm>
+          <a:prstGeom prst="rect">
+            <a:avLst/>
+          </a:prstGeom>
+          <a:noFill/>
+        </p:spPr>
+        <p:txBody>
+          <a:bodyPr wrap="square">
+            <a:spAutoFit/>
+          </a:bodyPr>
+          <a:lstStyle/>
+          <a:p>
+            <a:pPr algn="l"/>
+            <a:r>
+              <a:rPr sz="1000" b="0">
                 <a:solidFill>
                   <a:srgbClr val="FFFFFF"/>
                 </a:solidFill>
               </a:rPr>
-              <a:t>• LLM explanation with 3GPP citations</a:t>
+              <a:t>• Adjusts contamination (IF/SVM/LOF/EE), sensitivity (Statistical), threshold (LSTM)</a:t>
             </a:r>
           </a:p>
         </p:txBody>
@@ -7337,27 +9095,28 @@
         </p:nvSpPr>
         <p:spPr>
           <a:xfrm>
-            <a:off x="274320" y="2395728"/>
-            <a:ext cx="8412480" cy="320040"/>
-          </a:xfrm>
-          <a:prstGeom prst="rect">
-            <a:avLst/>
-          </a:prstGeom>
-          <a:noFill/>
-        </p:spPr>
-        <p:txBody>
-          <a:bodyPr wrap="none">
-            <a:spAutoFit/>
-          </a:bodyPr>
-          <a:lstStyle/>
-          <a:p>
-            <a:r>
-              <a:rPr sz="1300" b="1">
-                <a:solidFill>
-                  <a:srgbClr val="2DC653"/>
-                </a:solidFill>
-              </a:rPr>
-              <a:t>▶  FastAPI REST API  —  make api  →  http://localhost:8000</a:t>
+            <a:off x="457200" y="2130552"/>
+            <a:ext cx="3931920" cy="274320"/>
+          </a:xfrm>
+          <a:prstGeom prst="rect">
+            <a:avLst/>
+          </a:prstGeom>
+          <a:noFill/>
+        </p:spPr>
+        <p:txBody>
+          <a:bodyPr wrap="square">
+            <a:spAutoFit/>
+          </a:bodyPr>
+          <a:lstStyle/>
+          <a:p>
+            <a:pPr algn="l"/>
+            <a:r>
+              <a:rPr sz="1000" b="0">
+                <a:solidFill>
+                  <a:srgbClr val="FFFFFF"/>
+                </a:solidFill>
+              </a:rPr>
+              <a:t>• Formula:  new_param = base + α × (fp_rate − target_fp_rate)  [clamped 0.02–0.40]</a:t>
             </a:r>
           </a:p>
         </p:txBody>
@@ -7370,27 +9129,28 @@
         </p:nvSpPr>
         <p:spPr>
           <a:xfrm>
-            <a:off x="640080" y="2715768"/>
-            <a:ext cx="8046720" cy="256032"/>
-          </a:xfrm>
-          <a:prstGeom prst="rect">
-            <a:avLst/>
-          </a:prstGeom>
-          <a:noFill/>
-        </p:spPr>
-        <p:txBody>
-          <a:bodyPr wrap="none">
-            <a:spAutoFit/>
-          </a:bodyPr>
-          <a:lstStyle/>
-          <a:p>
-            <a:r>
-              <a:rPr sz="1100">
+            <a:off x="457200" y="2423160"/>
+            <a:ext cx="3931920" cy="274320"/>
+          </a:xfrm>
+          <a:prstGeom prst="rect">
+            <a:avLst/>
+          </a:prstGeom>
+          <a:noFill/>
+        </p:spPr>
+        <p:txBody>
+          <a:bodyPr wrap="square">
+            <a:spAutoFit/>
+          </a:bodyPr>
+          <a:lstStyle/>
+          <a:p>
+            <a:pPr algn="l"/>
+            <a:r>
+              <a:rPr sz="1000" b="0">
                 <a:solidFill>
                   <a:srgbClr val="FFFFFF"/>
                 </a:solidFill>
               </a:rPr>
-              <a:t>• POST /analyze/pcap  — upload PCAP, returns JSON</a:t>
+              <a:t>• Cron: 0 2 * * *  cd /mnt/e/telecom-analyzer &amp;&amp; make retrain</a:t>
             </a:r>
           </a:p>
         </p:txBody>
@@ -7403,126 +9163,130 @@
         </p:nvSpPr>
         <p:spPr>
           <a:xfrm>
-            <a:off x="640080" y="2971800"/>
-            <a:ext cx="8046720" cy="256032"/>
-          </a:xfrm>
-          <a:prstGeom prst="rect">
-            <a:avLst/>
-          </a:prstGeom>
-          <a:noFill/>
-        </p:spPr>
-        <p:txBody>
-          <a:bodyPr wrap="none">
-            <a:spAutoFit/>
-          </a:bodyPr>
-          <a:lstStyle/>
-          <a:p>
-            <a:r>
-              <a:rPr sz="1100">
+            <a:off x="4572000" y="658368"/>
+            <a:ext cx="4297680" cy="274320"/>
+          </a:xfrm>
+          <a:prstGeom prst="rect">
+            <a:avLst/>
+          </a:prstGeom>
+          <a:noFill/>
+        </p:spPr>
+        <p:txBody>
+          <a:bodyPr wrap="square">
+            <a:spAutoFit/>
+          </a:bodyPr>
+          <a:lstStyle/>
+          <a:p>
+            <a:pPr algn="l"/>
+            <a:r>
+              <a:rPr sz="1400" b="1">
+                <a:solidFill>
+                  <a:srgbClr val="A060FF"/>
+                </a:solidFill>
+              </a:rPr>
+              <a:t>Prediction Layer — 4h Ahead</a:t>
+            </a:r>
+          </a:p>
+        </p:txBody>
+      </p:sp>
+      <p:sp>
+        <p:nvSpPr>
+          <p:cNvPr id="11" name="TextBox 10"/>
+          <p:cNvSpPr txBox="1"/>
+          <p:nvPr/>
+        </p:nvSpPr>
+        <p:spPr>
+          <a:xfrm>
+            <a:off x="4754880" y="960120"/>
+            <a:ext cx="4114800" cy="274320"/>
+          </a:xfrm>
+          <a:prstGeom prst="rect">
+            <a:avLst/>
+          </a:prstGeom>
+          <a:noFill/>
+        </p:spPr>
+        <p:txBody>
+          <a:bodyPr wrap="square">
+            <a:spAutoFit/>
+          </a:bodyPr>
+          <a:lstStyle/>
+          <a:p>
+            <a:pPr algn="l"/>
+            <a:r>
+              <a:rPr sz="1000" b="0">
                 <a:solidFill>
                   <a:srgbClr val="FFFFFF"/>
                 </a:solidFill>
               </a:rPr>
-              <a:t>• POST /analyze/kpi   — upload KPI file, returns JSON</a:t>
-            </a:r>
-          </a:p>
-        </p:txBody>
-      </p:sp>
-      <p:sp>
-        <p:nvSpPr>
-          <p:cNvPr id="11" name="TextBox 10"/>
-          <p:cNvSpPr txBox="1"/>
-          <p:nvPr/>
-        </p:nvSpPr>
-        <p:spPr>
-          <a:xfrm>
-            <a:off x="640080" y="3227832"/>
-            <a:ext cx="8046720" cy="256032"/>
-          </a:xfrm>
-          <a:prstGeom prst="rect">
-            <a:avLst/>
-          </a:prstGeom>
-          <a:noFill/>
-        </p:spPr>
-        <p:txBody>
-          <a:bodyPr wrap="none">
-            <a:spAutoFit/>
-          </a:bodyPr>
-          <a:lstStyle/>
-          <a:p>
-            <a:r>
-              <a:rPr sz="1100">
+              <a:t>• Prophet — Bayesian structural time-series</a:t>
+            </a:r>
+          </a:p>
+        </p:txBody>
+      </p:sp>
+      <p:sp>
+        <p:nvSpPr>
+          <p:cNvPr id="12" name="TextBox 11"/>
+          <p:cNvSpPr txBox="1"/>
+          <p:nvPr/>
+        </p:nvSpPr>
+        <p:spPr>
+          <a:xfrm>
+            <a:off x="4754880" y="1252728"/>
+            <a:ext cx="4114800" cy="274320"/>
+          </a:xfrm>
+          <a:prstGeom prst="rect">
+            <a:avLst/>
+          </a:prstGeom>
+          <a:noFill/>
+        </p:spPr>
+        <p:txBody>
+          <a:bodyPr wrap="square">
+            <a:spAutoFit/>
+          </a:bodyPr>
+          <a:lstStyle/>
+          <a:p>
+            <a:pPr algn="l"/>
+            <a:r>
+              <a:rPr sz="1000" b="0">
                 <a:solidFill>
                   <a:srgbClr val="FFFFFF"/>
                 </a:solidFill>
               </a:rPr>
-              <a:t>• GET  /analyze/{job_id}  — retrieve cached result</a:t>
-            </a:r>
-          </a:p>
-        </p:txBody>
-      </p:sp>
-      <p:sp>
-        <p:nvSpPr>
-          <p:cNvPr id="12" name="TextBox 11"/>
-          <p:cNvSpPr txBox="1"/>
-          <p:nvPr/>
-        </p:nvSpPr>
-        <p:spPr>
-          <a:xfrm>
-            <a:off x="640080" y="3483864"/>
-            <a:ext cx="8046720" cy="256032"/>
-          </a:xfrm>
-          <a:prstGeom prst="rect">
-            <a:avLst/>
-          </a:prstGeom>
-          <a:noFill/>
-        </p:spPr>
-        <p:txBody>
-          <a:bodyPr wrap="none">
-            <a:spAutoFit/>
-          </a:bodyPr>
-          <a:lstStyle/>
-          <a:p>
-            <a:r>
-              <a:rPr sz="1100">
+              <a:t>•   Handles seasonality · trends · missing data</a:t>
+            </a:r>
+          </a:p>
+        </p:txBody>
+      </p:sp>
+      <p:sp>
+        <p:nvSpPr>
+          <p:cNvPr id="13" name="TextBox 12"/>
+          <p:cNvSpPr txBox="1"/>
+          <p:nvPr/>
+        </p:nvSpPr>
+        <p:spPr>
+          <a:xfrm>
+            <a:off x="4754880" y="1545336"/>
+            <a:ext cx="4114800" cy="274320"/>
+          </a:xfrm>
+          <a:prstGeom prst="rect">
+            <a:avLst/>
+          </a:prstGeom>
+          <a:noFill/>
+        </p:spPr>
+        <p:txBody>
+          <a:bodyPr wrap="square">
+            <a:spAutoFit/>
+          </a:bodyPr>
+          <a:lstStyle/>
+          <a:p>
+            <a:pPr algn="l"/>
+            <a:r>
+              <a:rPr sz="1000" b="0">
                 <a:solidFill>
                   <a:srgbClr val="FFFFFF"/>
                 </a:solidFill>
               </a:rPr>
-              <a:t>• GET  /health  — Ollama status + version</a:t>
-            </a:r>
-          </a:p>
-        </p:txBody>
-      </p:sp>
-      <p:sp>
-        <p:nvSpPr>
-          <p:cNvPr id="13" name="TextBox 12"/>
-          <p:cNvSpPr txBox="1"/>
-          <p:nvPr/>
-        </p:nvSpPr>
-        <p:spPr>
-          <a:xfrm>
-            <a:off x="274320" y="4014216"/>
-            <a:ext cx="8412480" cy="320040"/>
-          </a:xfrm>
-          <a:prstGeom prst="rect">
-            <a:avLst/>
-          </a:prstGeom>
-          <a:noFill/>
-        </p:spPr>
-        <p:txBody>
-          <a:bodyPr wrap="none">
-            <a:spAutoFit/>
-          </a:bodyPr>
-          <a:lstStyle/>
-          <a:p>
-            <a:r>
-              <a:rPr sz="1300" b="1">
-                <a:solidFill>
-                  <a:srgbClr val="2DC653"/>
-                </a:solidFill>
-              </a:rPr>
-              <a:t>▶  CLI Pipeline Runner  —  python -m src.orchestrator.pipeline --input file.pcap</a:t>
+              <a:t>•   Best for KPIs with daily/weekly cycles (PRB, throughput)</a:t>
             </a:r>
           </a:p>
         </p:txBody>
@@ -7535,27 +9299,28 @@
         </p:nvSpPr>
         <p:spPr>
           <a:xfrm>
-            <a:off x="640080" y="4334256"/>
-            <a:ext cx="8046720" cy="256032"/>
-          </a:xfrm>
-          <a:prstGeom prst="rect">
-            <a:avLst/>
-          </a:prstGeom>
-          <a:noFill/>
-        </p:spPr>
-        <p:txBody>
-          <a:bodyPr wrap="none">
-            <a:spAutoFit/>
-          </a:bodyPr>
-          <a:lstStyle/>
-          <a:p>
-            <a:r>
-              <a:rPr sz="1100">
+            <a:off x="4754880" y="1837943"/>
+            <a:ext cx="4114800" cy="274320"/>
+          </a:xfrm>
+          <a:prstGeom prst="rect">
+            <a:avLst/>
+          </a:prstGeom>
+          <a:noFill/>
+        </p:spPr>
+        <p:txBody>
+          <a:bodyPr wrap="square">
+            <a:spAutoFit/>
+          </a:bodyPr>
+          <a:lstStyle/>
+          <a:p>
+            <a:pPr algn="l"/>
+            <a:r>
+              <a:rPr sz="1000" b="0">
                 <a:solidFill>
                   <a:srgbClr val="FFFFFF"/>
                 </a:solidFill>
               </a:rPr>
-              <a:t>• Auto-detects PCAP vs KPI from file extension</a:t>
+              <a:t>• LSTM Sequence Model — nonlinear dependencies</a:t>
             </a:r>
           </a:p>
         </p:txBody>
@@ -7568,27 +9333,28 @@
         </p:nvSpPr>
         <p:spPr>
           <a:xfrm>
-            <a:off x="640080" y="4590288"/>
-            <a:ext cx="8046720" cy="256032"/>
-          </a:xfrm>
-          <a:prstGeom prst="rect">
-            <a:avLst/>
-          </a:prstGeom>
-          <a:noFill/>
-        </p:spPr>
-        <p:txBody>
-          <a:bodyPr wrap="none">
-            <a:spAutoFit/>
-          </a:bodyPr>
-          <a:lstStyle/>
-          <a:p>
-            <a:r>
-              <a:rPr sz="1100">
+            <a:off x="4754880" y="2130552"/>
+            <a:ext cx="4114800" cy="274320"/>
+          </a:xfrm>
+          <a:prstGeom prst="rect">
+            <a:avLst/>
+          </a:prstGeom>
+          <a:noFill/>
+        </p:spPr>
+        <p:txBody>
+          <a:bodyPr wrap="square">
+            <a:spAutoFit/>
+          </a:bodyPr>
+          <a:lstStyle/>
+          <a:p>
+            <a:pPr algn="l"/>
+            <a:r>
+              <a:rPr sz="1000" b="0">
                 <a:solidFill>
                   <a:srgbClr val="FFFFFF"/>
                 </a:solidFill>
               </a:rPr>
-              <a:t>• --no-llm flag skips LLM (fast mode)</a:t>
+              <a:t>•   Catches abrupt non-seasonal shifts (HARQ NACK, BLER)</a:t>
             </a:r>
           </a:p>
         </p:txBody>
@@ -7601,27 +9367,28 @@
         </p:nvSpPr>
         <p:spPr>
           <a:xfrm>
-            <a:off x="640080" y="4846320"/>
-            <a:ext cx="8046720" cy="256032"/>
-          </a:xfrm>
-          <a:prstGeom prst="rect">
-            <a:avLst/>
-          </a:prstGeom>
-          <a:noFill/>
-        </p:spPr>
-        <p:txBody>
-          <a:bodyPr wrap="none">
-            <a:spAutoFit/>
-          </a:bodyPr>
-          <a:lstStyle/>
-          <a:p>
-            <a:r>
-              <a:rPr sz="1100">
+            <a:off x="4754880" y="2423160"/>
+            <a:ext cx="4114800" cy="274320"/>
+          </a:xfrm>
+          <a:prstGeom prst="rect">
+            <a:avLst/>
+          </a:prstGeom>
+          <a:noFill/>
+        </p:spPr>
+        <p:txBody>
+          <a:bodyPr wrap="square">
+            <a:spAutoFit/>
+          </a:bodyPr>
+          <a:lstStyle/>
+          <a:p>
+            <a:pPr algn="l"/>
+            <a:r>
+              <a:rPr sz="1000" b="0">
                 <a:solidFill>
                   <a:srgbClr val="FFFFFF"/>
                 </a:solidFill>
               </a:rPr>
-              <a:t>• --output report.json writes JSON report</a:t>
+              <a:t>• Output: anomaly dicts tagged  state='predicted'  + lead_time_h</a:t>
             </a:r>
           </a:p>
         </p:txBody>
@@ -7634,27 +9401,62 @@
         </p:nvSpPr>
         <p:spPr>
           <a:xfrm>
-            <a:off x="640080" y="5102352"/>
-            <a:ext cx="8046720" cy="256032"/>
-          </a:xfrm>
-          <a:prstGeom prst="rect">
-            <a:avLst/>
-          </a:prstGeom>
-          <a:noFill/>
-        </p:spPr>
-        <p:txBody>
-          <a:bodyPr wrap="none">
-            <a:spAutoFit/>
-          </a:bodyPr>
-          <a:lstStyle/>
-          <a:p>
-            <a:r>
-              <a:rPr sz="1100">
+            <a:off x="4754880" y="2715768"/>
+            <a:ext cx="4114800" cy="274320"/>
+          </a:xfrm>
+          <a:prstGeom prst="rect">
+            <a:avLst/>
+          </a:prstGeom>
+          <a:noFill/>
+        </p:spPr>
+        <p:txBody>
+          <a:bodyPr wrap="square">
+            <a:spAutoFit/>
+          </a:bodyPr>
+          <a:lstStyle/>
+          <a:p>
+            <a:pPr algn="l"/>
+            <a:r>
+              <a:rPr sz="1000" b="0">
                 <a:solidFill>
                   <a:srgbClr val="FFFFFF"/>
                 </a:solidFill>
               </a:rPr>
-              <a:t>• Used in CI tests + batch processing</a:t>
+              <a:t>• Dashboard: 🔮 Prediction Layer section with horizon slider</a:t>
+            </a:r>
+          </a:p>
+        </p:txBody>
+      </p:sp>
+      <p:sp>
+        <p:nvSpPr>
+          <p:cNvPr id="18" name="TextBox 17"/>
+          <p:cNvSpPr txBox="1"/>
+          <p:nvPr/>
+        </p:nvSpPr>
+        <p:spPr>
+          <a:xfrm>
+            <a:off x="274320" y="4617720"/>
+            <a:ext cx="8595360" cy="256032"/>
+          </a:xfrm>
+          <a:prstGeom prst="rect">
+            <a:avLst/>
+          </a:prstGeom>
+          <a:noFill/>
+        </p:spPr>
+        <p:txBody>
+          <a:bodyPr wrap="square">
+            <a:spAutoFit/>
+          </a:bodyPr>
+          <a:lstStyle/>
+          <a:p>
+            <a:pPr algn="l"/>
+            <a:r>
+              <a:rPr sz="1000" b="0">
+                <a:solidFill>
+                  <a:srgbClr val="AAAAAA"/>
+                </a:solidFill>
+              </a:rPr>
+              <a:t>make retrain  |  scripts/nightly_retrain.py  |  data/models/retrain_config.json stores tuned params</a:t>
             </a:r>
           </a:p>
         </p:txBody>
@@ -7693,7 +9495,7 @@
         </p:nvSpPr>
         <p:spPr>
           <a:xfrm>
-            <a:off x="274320" y="182880"/>
+            <a:off x="274320" y="137160"/>
             <a:ext cx="8595360" cy="457200"/>
           </a:xfrm>
           <a:prstGeom prst="rect">
@@ -7702,18 +9504,19 @@
           <a:noFill/>
         </p:spPr>
         <p:txBody>
-          <a:bodyPr wrap="none">
-            <a:spAutoFit/>
-          </a:bodyPr>
-          <a:lstStyle/>
-          <a:p>
-            <a:r>
-              <a:rPr sz="2600" b="1">
+          <a:bodyPr wrap="square">
+            <a:spAutoFit/>
+          </a:bodyPr>
+          <a:lstStyle/>
+          <a:p>
+            <a:pPr algn="l"/>
+            <a:r>
+              <a:rPr sz="2400" b="1">
                 <a:solidFill>
                   <a:srgbClr val="00B4D8"/>
                 </a:solidFill>
               </a:rPr>
-              <a:t>✅  Test Results — 20 Tests, All Passing</a:t>
+              <a:t>🌐  Output Interfaces — Dashboard · REST API · CLI</a:t>
             </a:r>
           </a:p>
         </p:txBody>
@@ -7726,27 +9529,28 @@
         </p:nvSpPr>
         <p:spPr>
           <a:xfrm>
-            <a:off x="274320" y="822960"/>
-            <a:ext cx="8412480" cy="320040"/>
-          </a:xfrm>
-          <a:prstGeom prst="rect">
-            <a:avLst/>
-          </a:prstGeom>
-          <a:noFill/>
-        </p:spPr>
-        <p:txBody>
-          <a:bodyPr wrap="none">
-            <a:spAutoFit/>
-          </a:bodyPr>
-          <a:lstStyle/>
-          <a:p>
-            <a:r>
-              <a:rPr sz="1400" b="1">
-                <a:solidFill>
-                  <a:srgbClr val="00B4D8"/>
-                </a:solidFill>
-              </a:rPr>
-              <a:t>test_walking_skeleton.py  (4 tests)</a:t>
+            <a:off x="274320" y="685800"/>
+            <a:ext cx="8412480" cy="274320"/>
+          </a:xfrm>
+          <a:prstGeom prst="rect">
+            <a:avLst/>
+          </a:prstGeom>
+          <a:noFill/>
+        </p:spPr>
+        <p:txBody>
+          <a:bodyPr wrap="square">
+            <a:spAutoFit/>
+          </a:bodyPr>
+          <a:lstStyle/>
+          <a:p>
+            <a:pPr algn="l"/>
+            <a:r>
+              <a:rPr sz="1200" b="1">
+                <a:solidFill>
+                  <a:srgbClr val="2DC653"/>
+                </a:solidFill>
+              </a:rPr>
+              <a:t>▶  Streamlit Dashboard  —  make dev  →  http://localhost:8501</a:t>
             </a:r>
           </a:p>
         </p:txBody>
@@ -7759,324 +9563,334 @@
         </p:nvSpPr>
         <p:spPr>
           <a:xfrm>
-            <a:off x="457200" y="1188720"/>
-            <a:ext cx="8046720" cy="274320"/>
-          </a:xfrm>
-          <a:prstGeom prst="rect">
-            <a:avLst/>
-          </a:prstGeom>
-          <a:noFill/>
-        </p:spPr>
-        <p:txBody>
-          <a:bodyPr wrap="none">
-            <a:spAutoFit/>
-          </a:bodyPr>
-          <a:lstStyle/>
-          <a:p>
-            <a:r>
-              <a:rPr sz="1100">
+            <a:off x="640080" y="978408"/>
+            <a:ext cx="8229600" cy="256032"/>
+          </a:xfrm>
+          <a:prstGeom prst="rect">
+            <a:avLst/>
+          </a:prstGeom>
+          <a:noFill/>
+        </p:spPr>
+        <p:txBody>
+          <a:bodyPr wrap="square">
+            <a:spAutoFit/>
+          </a:bodyPr>
+          <a:lstStyle/>
+          <a:p>
+            <a:pPr algn="l"/>
+            <a:r>
+              <a:rPr sz="1000" b="0">
+                <a:solidFill>
+                  <a:srgbClr val="FFFFFF"/>
+                </a:solidFill>
+              </a:rPr>
+              <a:t>• Upload PCAP, Stats CSV, or KPI Excel in one interface</a:t>
+            </a:r>
+          </a:p>
+        </p:txBody>
+      </p:sp>
+      <p:sp>
+        <p:nvSpPr>
+          <p:cNvPr id="5" name="TextBox 4"/>
+          <p:cNvSpPr txBox="1"/>
+          <p:nvPr/>
+        </p:nvSpPr>
+        <p:spPr>
+          <a:xfrm>
+            <a:off x="640080" y="1234440"/>
+            <a:ext cx="8229600" cy="256032"/>
+          </a:xfrm>
+          <a:prstGeom prst="rect">
+            <a:avLst/>
+          </a:prstGeom>
+          <a:noFill/>
+        </p:spPr>
+        <p:txBody>
+          <a:bodyPr wrap="square">
+            <a:spAutoFit/>
+          </a:bodyPr>
+          <a:lstStyle/>
+          <a:p>
+            <a:pPr algn="l"/>
+            <a:r>
+              <a:rPr sz="1000" b="0">
+                <a:solidFill>
+                  <a:srgbClr val="FFFFFF"/>
+                </a:solidFill>
+              </a:rPr>
+              <a:t>• 6 protocol tabs · failure cause breakdown · IE inspector</a:t>
+            </a:r>
+          </a:p>
+        </p:txBody>
+      </p:sp>
+      <p:sp>
+        <p:nvSpPr>
+          <p:cNvPr id="6" name="TextBox 5"/>
+          <p:cNvSpPr txBox="1"/>
+          <p:nvPr/>
+        </p:nvSpPr>
+        <p:spPr>
+          <a:xfrm>
+            <a:off x="640080" y="1490472"/>
+            <a:ext cx="8229600" cy="256032"/>
+          </a:xfrm>
+          <a:prstGeom prst="rect">
+            <a:avLst/>
+          </a:prstGeom>
+          <a:noFill/>
+        </p:spPr>
+        <p:txBody>
+          <a:bodyPr wrap="square">
+            <a:spAutoFit/>
+          </a:bodyPr>
+          <a:lstStyle/>
+          <a:p>
+            <a:pPr algn="l"/>
+            <a:r>
+              <a:rPr sz="1000" b="0">
+                <a:solidFill>
+                  <a:srgbClr val="FFFFFF"/>
+                </a:solidFill>
+              </a:rPr>
+              <a:t>• 6-detector method comparison matrix + rationale expanders</a:t>
+            </a:r>
+          </a:p>
+        </p:txBody>
+      </p:sp>
+      <p:sp>
+        <p:nvSpPr>
+          <p:cNvPr id="7" name="TextBox 6"/>
+          <p:cNvSpPr txBox="1"/>
+          <p:nvPr/>
+        </p:nvSpPr>
+        <p:spPr>
+          <a:xfrm>
+            <a:off x="640080" y="1746504"/>
+            <a:ext cx="8229600" cy="256032"/>
+          </a:xfrm>
+          <a:prstGeom prst="rect">
+            <a:avLst/>
+          </a:prstGeom>
+          <a:noFill/>
+        </p:spPr>
+        <p:txBody>
+          <a:bodyPr wrap="square">
+            <a:spAutoFit/>
+          </a:bodyPr>
+          <a:lstStyle/>
+          <a:p>
+            <a:pPr algn="l"/>
+            <a:r>
+              <a:rPr sz="1000" b="0">
+                <a:solidFill>
+                  <a:srgbClr val="FFFFFF"/>
+                </a:solidFill>
+              </a:rPr>
+              <a:t>• LLM explanation with 3GPP spec citations</a:t>
+            </a:r>
+          </a:p>
+        </p:txBody>
+      </p:sp>
+      <p:sp>
+        <p:nvSpPr>
+          <p:cNvPr id="8" name="TextBox 7"/>
+          <p:cNvSpPr txBox="1"/>
+          <p:nvPr/>
+        </p:nvSpPr>
+        <p:spPr>
+          <a:xfrm>
+            <a:off x="640080" y="2002536"/>
+            <a:ext cx="8229600" cy="256032"/>
+          </a:xfrm>
+          <a:prstGeom prst="rect">
+            <a:avLst/>
+          </a:prstGeom>
+          <a:noFill/>
+        </p:spPr>
+        <p:txBody>
+          <a:bodyPr wrap="square">
+            <a:spAutoFit/>
+          </a:bodyPr>
+          <a:lstStyle/>
+          <a:p>
+            <a:pPr algn="l"/>
+            <a:r>
+              <a:rPr sz="1000" b="0">
+                <a:solidFill>
+                  <a:srgbClr val="FFFFFF"/>
+                </a:solidFill>
+              </a:rPr>
+              <a:t>• Prediction panel (LSTM + Prophet) · Feedback buttons · Event Router</a:t>
+            </a:r>
+          </a:p>
+        </p:txBody>
+      </p:sp>
+      <p:sp>
+        <p:nvSpPr>
+          <p:cNvPr id="9" name="TextBox 8"/>
+          <p:cNvSpPr txBox="1"/>
+          <p:nvPr/>
+        </p:nvSpPr>
+        <p:spPr>
+          <a:xfrm>
+            <a:off x="274320" y="2459736"/>
+            <a:ext cx="8412480" cy="274320"/>
+          </a:xfrm>
+          <a:prstGeom prst="rect">
+            <a:avLst/>
+          </a:prstGeom>
+          <a:noFill/>
+        </p:spPr>
+        <p:txBody>
+          <a:bodyPr wrap="square">
+            <a:spAutoFit/>
+          </a:bodyPr>
+          <a:lstStyle/>
+          <a:p>
+            <a:pPr algn="l"/>
+            <a:r>
+              <a:rPr sz="1200" b="1">
                 <a:solidFill>
                   <a:srgbClr val="2DC653"/>
                 </a:solidFill>
               </a:rPr>
-              <a:t>✅  parse_pcap_stub returns correct keys</a:t>
-            </a:r>
-          </a:p>
-        </p:txBody>
-      </p:sp>
-      <p:sp>
-        <p:nvSpPr>
-          <p:cNvPr id="5" name="TextBox 4"/>
-          <p:cNvSpPr txBox="1"/>
-          <p:nvPr/>
-        </p:nvSpPr>
-        <p:spPr>
-          <a:xfrm>
-            <a:off x="457200" y="1463040"/>
-            <a:ext cx="8046720" cy="274320"/>
-          </a:xfrm>
-          <a:prstGeom prst="rect">
-            <a:avLst/>
-          </a:prstGeom>
-          <a:noFill/>
-        </p:spPr>
-        <p:txBody>
-          <a:bodyPr wrap="none">
-            <a:spAutoFit/>
-          </a:bodyPr>
-          <a:lstStyle/>
-          <a:p>
-            <a:r>
-              <a:rPr sz="1100">
+              <a:t>▶  FastAPI REST API  —  make api  →  http://localhost:8000/docs</a:t>
+            </a:r>
+          </a:p>
+        </p:txBody>
+      </p:sp>
+      <p:sp>
+        <p:nvSpPr>
+          <p:cNvPr id="10" name="TextBox 9"/>
+          <p:cNvSpPr txBox="1"/>
+          <p:nvPr/>
+        </p:nvSpPr>
+        <p:spPr>
+          <a:xfrm>
+            <a:off x="640080" y="2752344"/>
+            <a:ext cx="8229600" cy="256032"/>
+          </a:xfrm>
+          <a:prstGeom prst="rect">
+            <a:avLst/>
+          </a:prstGeom>
+          <a:noFill/>
+        </p:spPr>
+        <p:txBody>
+          <a:bodyPr wrap="square">
+            <a:spAutoFit/>
+          </a:bodyPr>
+          <a:lstStyle/>
+          <a:p>
+            <a:pPr algn="l"/>
+            <a:r>
+              <a:rPr sz="1000" b="0">
+                <a:solidFill>
+                  <a:srgbClr val="FFFFFF"/>
+                </a:solidFill>
+              </a:rPr>
+              <a:t>• POST /analyze/pcap  — upload PCAP, returns full anomaly JSON</a:t>
+            </a:r>
+          </a:p>
+        </p:txBody>
+      </p:sp>
+      <p:sp>
+        <p:nvSpPr>
+          <p:cNvPr id="11" name="TextBox 10"/>
+          <p:cNvSpPr txBox="1"/>
+          <p:nvPr/>
+        </p:nvSpPr>
+        <p:spPr>
+          <a:xfrm>
+            <a:off x="640080" y="3008376"/>
+            <a:ext cx="8229600" cy="256032"/>
+          </a:xfrm>
+          <a:prstGeom prst="rect">
+            <a:avLst/>
+          </a:prstGeom>
+          <a:noFill/>
+        </p:spPr>
+        <p:txBody>
+          <a:bodyPr wrap="square">
+            <a:spAutoFit/>
+          </a:bodyPr>
+          <a:lstStyle/>
+          <a:p>
+            <a:pPr algn="l"/>
+            <a:r>
+              <a:rPr sz="1000" b="0">
+                <a:solidFill>
+                  <a:srgbClr val="FFFFFF"/>
+                </a:solidFill>
+              </a:rPr>
+              <a:t>• POST /analyze/kpi   — upload KPI file, returns anomaly JSON</a:t>
+            </a:r>
+          </a:p>
+        </p:txBody>
+      </p:sp>
+      <p:sp>
+        <p:nvSpPr>
+          <p:cNvPr id="12" name="TextBox 11"/>
+          <p:cNvSpPr txBox="1"/>
+          <p:nvPr/>
+        </p:nvSpPr>
+        <p:spPr>
+          <a:xfrm>
+            <a:off x="640080" y="3264408"/>
+            <a:ext cx="8229600" cy="256032"/>
+          </a:xfrm>
+          <a:prstGeom prst="rect">
+            <a:avLst/>
+          </a:prstGeom>
+          <a:noFill/>
+        </p:spPr>
+        <p:txBody>
+          <a:bodyPr wrap="square">
+            <a:spAutoFit/>
+          </a:bodyPr>
+          <a:lstStyle/>
+          <a:p>
+            <a:pPr algn="l"/>
+            <a:r>
+              <a:rPr sz="1000" b="0">
+                <a:solidFill>
+                  <a:srgbClr val="FFFFFF"/>
+                </a:solidFill>
+              </a:rPr>
+              <a:t>• GET  /health        — Ollama status · model · version</a:t>
+            </a:r>
+          </a:p>
+        </p:txBody>
+      </p:sp>
+      <p:sp>
+        <p:nvSpPr>
+          <p:cNvPr id="13" name="TextBox 12"/>
+          <p:cNvSpPr txBox="1"/>
+          <p:nvPr/>
+        </p:nvSpPr>
+        <p:spPr>
+          <a:xfrm>
+            <a:off x="274320" y="3721608"/>
+            <a:ext cx="8412480" cy="274320"/>
+          </a:xfrm>
+          <a:prstGeom prst="rect">
+            <a:avLst/>
+          </a:prstGeom>
+          <a:noFill/>
+        </p:spPr>
+        <p:txBody>
+          <a:bodyPr wrap="square">
+            <a:spAutoFit/>
+          </a:bodyPr>
+          <a:lstStyle/>
+          <a:p>
+            <a:pPr algn="l"/>
+            <a:r>
+              <a:rPr sz="1200" b="1">
                 <a:solidFill>
                   <a:srgbClr val="2DC653"/>
                 </a:solidFill>
               </a:rPr>
-              <a:t>✅  detect_anomalies_stub returns anomaly list</a:t>
-            </a:r>
-          </a:p>
-        </p:txBody>
-      </p:sp>
-      <p:sp>
-        <p:nvSpPr>
-          <p:cNvPr id="6" name="TextBox 5"/>
-          <p:cNvSpPr txBox="1"/>
-          <p:nvPr/>
-        </p:nvSpPr>
-        <p:spPr>
-          <a:xfrm>
-            <a:off x="457200" y="1737360"/>
-            <a:ext cx="8046720" cy="274320"/>
-          </a:xfrm>
-          <a:prstGeom prst="rect">
-            <a:avLst/>
-          </a:prstGeom>
-          <a:noFill/>
-        </p:spPr>
-        <p:txBody>
-          <a:bodyPr wrap="none">
-            <a:spAutoFit/>
-          </a:bodyPr>
-          <a:lstStyle/>
-          <a:p>
-            <a:r>
-              <a:rPr sz="1100">
-                <a:solidFill>
-                  <a:srgbClr val="2DC653"/>
-                </a:solidFill>
-              </a:rPr>
-              <a:t>✅  explain_anomaly_stub returns citations</a:t>
-            </a:r>
-          </a:p>
-        </p:txBody>
-      </p:sp>
-      <p:sp>
-        <p:nvSpPr>
-          <p:cNvPr id="7" name="TextBox 6"/>
-          <p:cNvSpPr txBox="1"/>
-          <p:nvPr/>
-        </p:nvSpPr>
-        <p:spPr>
-          <a:xfrm>
-            <a:off x="457200" y="2011680"/>
-            <a:ext cx="8046720" cy="274320"/>
-          </a:xfrm>
-          <a:prstGeom prst="rect">
-            <a:avLst/>
-          </a:prstGeom>
-          <a:noFill/>
-        </p:spPr>
-        <p:txBody>
-          <a:bodyPr wrap="none">
-            <a:spAutoFit/>
-          </a:bodyPr>
-          <a:lstStyle/>
-          <a:p>
-            <a:r>
-              <a:rPr sz="1100">
-                <a:solidFill>
-                  <a:srgbClr val="2DC653"/>
-                </a:solidFill>
-              </a:rPr>
-              <a:t>✅  Full stub pipeline runs end-to-end</a:t>
-            </a:r>
-          </a:p>
-        </p:txBody>
-      </p:sp>
-      <p:sp>
-        <p:nvSpPr>
-          <p:cNvPr id="8" name="TextBox 7"/>
-          <p:cNvSpPr txBox="1"/>
-          <p:nvPr/>
-        </p:nvSpPr>
-        <p:spPr>
-          <a:xfrm>
-            <a:off x="274320" y="2560320"/>
-            <a:ext cx="8412480" cy="320040"/>
-          </a:xfrm>
-          <a:prstGeom prst="rect">
-            <a:avLst/>
-          </a:prstGeom>
-          <a:noFill/>
-        </p:spPr>
-        <p:txBody>
-          <a:bodyPr wrap="none">
-            <a:spAutoFit/>
-          </a:bodyPr>
-          <a:lstStyle/>
-          <a:p>
-            <a:r>
-              <a:rPr sz="1400" b="1">
-                <a:solidFill>
-                  <a:srgbClr val="00B4D8"/>
-                </a:solidFill>
-              </a:rPr>
-              <a:t>test_real_pipeline.py  (16 tests)</a:t>
-            </a:r>
-          </a:p>
-        </p:txBody>
-      </p:sp>
-      <p:sp>
-        <p:nvSpPr>
-          <p:cNvPr id="9" name="TextBox 8"/>
-          <p:cNvSpPr txBox="1"/>
-          <p:nvPr/>
-        </p:nvSpPr>
-        <p:spPr>
-          <a:xfrm>
-            <a:off x="457200" y="2926080"/>
-            <a:ext cx="8046720" cy="274320"/>
-          </a:xfrm>
-          <a:prstGeom prst="rect">
-            <a:avLst/>
-          </a:prstGeom>
-          <a:noFill/>
-        </p:spPr>
-        <p:txBody>
-          <a:bodyPr wrap="none">
-            <a:spAutoFit/>
-          </a:bodyPr>
-          <a:lstStyle/>
-          <a:p>
-            <a:r>
-              <a:rPr sz="1100">
-                <a:solidFill>
-                  <a:srgbClr val="2DC653"/>
-                </a:solidFill>
-              </a:rPr>
-              <a:t>✅  Real PCAP parser — keys, procedures, schema</a:t>
-            </a:r>
-          </a:p>
-        </p:txBody>
-      </p:sp>
-      <p:sp>
-        <p:nvSpPr>
-          <p:cNvPr id="10" name="TextBox 9"/>
-          <p:cNvSpPr txBox="1"/>
-          <p:nvPr/>
-        </p:nvSpPr>
-        <p:spPr>
-          <a:xfrm>
-            <a:off x="457200" y="3200400"/>
-            <a:ext cx="8046720" cy="274320"/>
-          </a:xfrm>
-          <a:prstGeom prst="rect">
-            <a:avLst/>
-          </a:prstGeom>
-          <a:noFill/>
-        </p:spPr>
-        <p:txBody>
-          <a:bodyPr wrap="none">
-            <a:spAutoFit/>
-          </a:bodyPr>
-          <a:lstStyle/>
-          <a:p>
-            <a:r>
-              <a:rPr sz="1100">
-                <a:solidFill>
-                  <a:srgbClr val="2DC653"/>
-                </a:solidFill>
-              </a:rPr>
-              <a:t>✅  Real PCAP detectors — 6 detectors return correct dict</a:t>
-            </a:r>
-          </a:p>
-        </p:txBody>
-      </p:sp>
-      <p:sp>
-        <p:nvSpPr>
-          <p:cNvPr id="11" name="TextBox 10"/>
-          <p:cNvSpPr txBox="1"/>
-          <p:nvPr/>
-        </p:nvSpPr>
-        <p:spPr>
-          <a:xfrm>
-            <a:off x="457200" y="3474720"/>
-            <a:ext cx="8046720" cy="274320"/>
-          </a:xfrm>
-          <a:prstGeom prst="rect">
-            <a:avLst/>
-          </a:prstGeom>
-          <a:noFill/>
-        </p:spPr>
-        <p:txBody>
-          <a:bodyPr wrap="none">
-            <a:spAutoFit/>
-          </a:bodyPr>
-          <a:lstStyle/>
-          <a:p>
-            <a:r>
-              <a:rPr sz="1100">
-                <a:solidFill>
-                  <a:srgbClr val="2DC653"/>
-                </a:solidFill>
-              </a:rPr>
-              <a:t>✅  Real KPI parser — keys, KPI columns</a:t>
-            </a:r>
-          </a:p>
-        </p:txBody>
-      </p:sp>
-      <p:sp>
-        <p:nvSpPr>
-          <p:cNvPr id="12" name="TextBox 11"/>
-          <p:cNvSpPr txBox="1"/>
-          <p:nvPr/>
-        </p:nvSpPr>
-        <p:spPr>
-          <a:xfrm>
-            <a:off x="457200" y="3749039"/>
-            <a:ext cx="8046720" cy="274320"/>
-          </a:xfrm>
-          <a:prstGeom prst="rect">
-            <a:avLst/>
-          </a:prstGeom>
-          <a:noFill/>
-        </p:spPr>
-        <p:txBody>
-          <a:bodyPr wrap="none">
-            <a:spAutoFit/>
-          </a:bodyPr>
-          <a:lstStyle/>
-          <a:p>
-            <a:r>
-              <a:rPr sz="1100">
-                <a:solidFill>
-                  <a:srgbClr val="2DC653"/>
-                </a:solidFill>
-              </a:rPr>
-              <a:t>✅  Real KPI detectors — schema validated</a:t>
-            </a:r>
-          </a:p>
-        </p:txBody>
-      </p:sp>
-      <p:sp>
-        <p:nvSpPr>
-          <p:cNvPr id="13" name="TextBox 12"/>
-          <p:cNvSpPr txBox="1"/>
-          <p:nvPr/>
-        </p:nvSpPr>
-        <p:spPr>
-          <a:xfrm>
-            <a:off x="457200" y="4023360"/>
-            <a:ext cx="8046720" cy="274320"/>
-          </a:xfrm>
-          <a:prstGeom prst="rect">
-            <a:avLst/>
-          </a:prstGeom>
-          <a:noFill/>
-        </p:spPr>
-        <p:txBody>
-          <a:bodyPr wrap="none">
-            <a:spAutoFit/>
-          </a:bodyPr>
-          <a:lstStyle/>
-          <a:p>
-            <a:r>
-              <a:rPr sz="1100">
-                <a:solidFill>
-                  <a:srgbClr val="2DC653"/>
-                </a:solidFill>
-              </a:rPr>
-              <a:t>✅  RAG retriever — chunks, relevance ordering</a:t>
+              <a:t>▶  CLI Pipeline Runner  —  python -m src.orchestrator.pipeline --input file.pcap [--no-llm] [--output report.json]</a:t>
             </a:r>
           </a:p>
         </p:txBody>
@@ -8089,27 +9903,28 @@
         </p:nvSpPr>
         <p:spPr>
           <a:xfrm>
-            <a:off x="457200" y="4297680"/>
-            <a:ext cx="8046720" cy="274320"/>
-          </a:xfrm>
-          <a:prstGeom prst="rect">
-            <a:avLst/>
-          </a:prstGeom>
-          <a:noFill/>
-        </p:spPr>
-        <p:txBody>
-          <a:bodyPr wrap="none">
-            <a:spAutoFit/>
-          </a:bodyPr>
-          <a:lstStyle/>
-          <a:p>
-            <a:r>
-              <a:rPr sz="1100">
-                <a:solidFill>
-                  <a:srgbClr val="2DC653"/>
-                </a:solidFill>
-              </a:rPr>
-              <a:t>✅  LLM explainer — rule-based output schema</a:t>
+            <a:off x="640080" y="4014216"/>
+            <a:ext cx="8229600" cy="256032"/>
+          </a:xfrm>
+          <a:prstGeom prst="rect">
+            <a:avLst/>
+          </a:prstGeom>
+          <a:noFill/>
+        </p:spPr>
+        <p:txBody>
+          <a:bodyPr wrap="square">
+            <a:spAutoFit/>
+          </a:bodyPr>
+          <a:lstStyle/>
+          <a:p>
+            <a:pPr algn="l"/>
+            <a:r>
+              <a:rPr sz="1000" b="0">
+                <a:solidFill>
+                  <a:srgbClr val="FFFFFF"/>
+                </a:solidFill>
+              </a:rPr>
+              <a:t>• Auto-detects PCAP / KPI / Stats from file extension</a:t>
             </a:r>
           </a:p>
         </p:txBody>
@@ -8122,27 +9937,28 @@
         </p:nvSpPr>
         <p:spPr>
           <a:xfrm>
-            <a:off x="457200" y="4572000"/>
-            <a:ext cx="8046720" cy="274320"/>
-          </a:xfrm>
-          <a:prstGeom prst="rect">
-            <a:avLst/>
-          </a:prstGeom>
-          <a:noFill/>
-        </p:spPr>
-        <p:txBody>
-          <a:bodyPr wrap="none">
-            <a:spAutoFit/>
-          </a:bodyPr>
-          <a:lstStyle/>
-          <a:p>
-            <a:r>
-              <a:rPr sz="1100">
-                <a:solidFill>
-                  <a:srgbClr val="2DC653"/>
-                </a:solidFill>
-              </a:rPr>
-              <a:t>✅  Orchestrator run_pcap_pipeline() end-to-end</a:t>
+            <a:off x="640080" y="4270248"/>
+            <a:ext cx="8229600" cy="256032"/>
+          </a:xfrm>
+          <a:prstGeom prst="rect">
+            <a:avLst/>
+          </a:prstGeom>
+          <a:noFill/>
+        </p:spPr>
+        <p:txBody>
+          <a:bodyPr wrap="square">
+            <a:spAutoFit/>
+          </a:bodyPr>
+          <a:lstStyle/>
+          <a:p>
+            <a:pPr algn="l"/>
+            <a:r>
+              <a:rPr sz="1000" b="0">
+                <a:solidFill>
+                  <a:srgbClr val="FFFFFF"/>
+                </a:solidFill>
+              </a:rPr>
+              <a:t>• --no-llm skips LLM (fast mode for CI)</a:t>
             </a:r>
           </a:p>
         </p:txBody>
@@ -8155,60 +9971,28 @@
         </p:nvSpPr>
         <p:spPr>
           <a:xfrm>
-            <a:off x="457200" y="4846320"/>
-            <a:ext cx="8046720" cy="274320"/>
-          </a:xfrm>
-          <a:prstGeom prst="rect">
-            <a:avLst/>
-          </a:prstGeom>
-          <a:noFill/>
-        </p:spPr>
-        <p:txBody>
-          <a:bodyPr wrap="none">
-            <a:spAutoFit/>
-          </a:bodyPr>
-          <a:lstStyle/>
-          <a:p>
-            <a:r>
-              <a:rPr sz="1100">
-                <a:solidFill>
-                  <a:srgbClr val="2DC653"/>
-                </a:solidFill>
-              </a:rPr>
-              <a:t>✅  Orchestrator run_kpi_pipeline() end-to-end</a:t>
-            </a:r>
-          </a:p>
-        </p:txBody>
-      </p:sp>
-      <p:sp>
-        <p:nvSpPr>
-          <p:cNvPr id="17" name="TextBox 16"/>
-          <p:cNvSpPr txBox="1"/>
-          <p:nvPr/>
-        </p:nvSpPr>
-        <p:spPr>
-          <a:xfrm>
-            <a:off x="457200" y="5120640"/>
-            <a:ext cx="8046720" cy="274320"/>
-          </a:xfrm>
-          <a:prstGeom prst="rect">
-            <a:avLst/>
-          </a:prstGeom>
-          <a:noFill/>
-        </p:spPr>
-        <p:txBody>
-          <a:bodyPr wrap="none">
-            <a:spAutoFit/>
-          </a:bodyPr>
-          <a:lstStyle/>
-          <a:p>
-            <a:r>
-              <a:rPr sz="1100">
-                <a:solidFill>
-                  <a:srgbClr val="2DC653"/>
-                </a:solidFill>
-              </a:rPr>
-              <a:t>✅  run_pipeline() auto-detects file type</a:t>
+            <a:off x="640080" y="4526280"/>
+            <a:ext cx="8229600" cy="256032"/>
+          </a:xfrm>
+          <a:prstGeom prst="rect">
+            <a:avLst/>
+          </a:prstGeom>
+          <a:noFill/>
+        </p:spPr>
+        <p:txBody>
+          <a:bodyPr wrap="square">
+            <a:spAutoFit/>
+          </a:bodyPr>
+          <a:lstStyle/>
+          <a:p>
+            <a:pPr algn="l"/>
+            <a:r>
+              <a:rPr sz="1000" b="0">
+                <a:solidFill>
+                  <a:srgbClr val="FFFFFF"/>
+                </a:solidFill>
+              </a:rPr>
+              <a:t>• --output writes full JSON report for batch processing</a:t>
             </a:r>
           </a:p>
         </p:txBody>
@@ -8247,7 +10031,7 @@
         </p:nvSpPr>
         <p:spPr>
           <a:xfrm>
-            <a:off x="274320" y="182880"/>
+            <a:off x="274320" y="137160"/>
             <a:ext cx="8595360" cy="457200"/>
           </a:xfrm>
           <a:prstGeom prst="rect">
@@ -8256,18 +10040,19 @@
           <a:noFill/>
         </p:spPr>
         <p:txBody>
-          <a:bodyPr wrap="none">
-            <a:spAutoFit/>
-          </a:bodyPr>
-          <a:lstStyle/>
-          <a:p>
-            <a:r>
-              <a:rPr sz="2200" b="1">
+          <a:bodyPr wrap="square">
+            <a:spAutoFit/>
+          </a:bodyPr>
+          <a:lstStyle/>
+          <a:p>
+            <a:pPr algn="l"/>
+            <a:r>
+              <a:rPr sz="2400" b="1">
                 <a:solidFill>
                   <a:srgbClr val="00B4D8"/>
                 </a:solidFill>
               </a:rPr>
-              <a:t>🎯  Reviewer Q&amp;A — Anticipated Questions</a:t>
+              <a:t>🎬  Demo Flow — Live Walkthrough (15 min)</a:t>
             </a:r>
           </a:p>
         </p:txBody>
@@ -8280,258 +10065,606 @@
         </p:nvSpPr>
         <p:spPr>
           <a:xfrm>
-            <a:off x="274320" y="777240"/>
-            <a:ext cx="8412480" cy="274320"/>
-          </a:xfrm>
-          <a:prstGeom prst="rect">
-            <a:avLst/>
-          </a:prstGeom>
-          <a:noFill/>
-        </p:spPr>
-        <p:txBody>
-          <a:bodyPr wrap="none">
-            <a:spAutoFit/>
-          </a:bodyPr>
-          <a:lstStyle/>
-          <a:p>
-            <a:r>
-              <a:rPr sz="1200" b="1">
+            <a:off x="274320" y="713232"/>
+            <a:ext cx="1097280" cy="256032"/>
+          </a:xfrm>
+          <a:prstGeom prst="rect">
+            <a:avLst/>
+          </a:prstGeom>
+          <a:noFill/>
+        </p:spPr>
+        <p:txBody>
+          <a:bodyPr wrap="square">
+            <a:spAutoFit/>
+          </a:bodyPr>
+          <a:lstStyle/>
+          <a:p>
+            <a:pPr algn="l"/>
+            <a:r>
+              <a:rPr sz="1000" b="1">
+                <a:solidFill>
+                  <a:srgbClr val="00B4D8"/>
+                </a:solidFill>
+              </a:rPr>
+              <a:t>Step 1  (2 min)</a:t>
+            </a:r>
+          </a:p>
+        </p:txBody>
+      </p:sp>
+      <p:sp>
+        <p:nvSpPr>
+          <p:cNvPr id="4" name="TextBox 3"/>
+          <p:cNvSpPr txBox="1"/>
+          <p:nvPr/>
+        </p:nvSpPr>
+        <p:spPr>
+          <a:xfrm>
+            <a:off x="1417320" y="713232"/>
+            <a:ext cx="3200400" cy="256032"/>
+          </a:xfrm>
+          <a:prstGeom prst="rect">
+            <a:avLst/>
+          </a:prstGeom>
+          <a:noFill/>
+        </p:spPr>
+        <p:txBody>
+          <a:bodyPr wrap="square">
+            <a:spAutoFit/>
+          </a:bodyPr>
+          <a:lstStyle/>
+          <a:p>
+            <a:pPr algn="l"/>
+            <a:r>
+              <a:rPr sz="1100" b="1">
+                <a:solidFill>
+                  <a:srgbClr val="FFFFFF"/>
+                </a:solidFill>
+              </a:rPr>
+              <a:t>Architecture intro</a:t>
+            </a:r>
+          </a:p>
+        </p:txBody>
+      </p:sp>
+      <p:sp>
+        <p:nvSpPr>
+          <p:cNvPr id="5" name="TextBox 4"/>
+          <p:cNvSpPr txBox="1"/>
+          <p:nvPr/>
+        </p:nvSpPr>
+        <p:spPr>
+          <a:xfrm>
+            <a:off x="1417320" y="987552"/>
+            <a:ext cx="7406640" cy="292608"/>
+          </a:xfrm>
+          <a:prstGeom prst="rect">
+            <a:avLst/>
+          </a:prstGeom>
+          <a:noFill/>
+        </p:spPr>
+        <p:txBody>
+          <a:bodyPr wrap="square">
+            <a:spAutoFit/>
+          </a:bodyPr>
+          <a:lstStyle/>
+          <a:p>
+            <a:pPr algn="l"/>
+            <a:r>
+              <a:rPr sz="900" b="0">
+                <a:solidFill>
+                  <a:srgbClr val="AAAAAA"/>
+                </a:solidFill>
+              </a:rPr>
+              <a:t>Show README diagram. Explain 3 data paths, 18 detectors, LLM explainer.</a:t>
+            </a:r>
+          </a:p>
+        </p:txBody>
+      </p:sp>
+      <p:sp>
+        <p:nvSpPr>
+          <p:cNvPr id="6" name="TextBox 5"/>
+          <p:cNvSpPr txBox="1"/>
+          <p:nvPr/>
+        </p:nvSpPr>
+        <p:spPr>
+          <a:xfrm>
+            <a:off x="274320" y="1380744"/>
+            <a:ext cx="1097280" cy="256032"/>
+          </a:xfrm>
+          <a:prstGeom prst="rect">
+            <a:avLst/>
+          </a:prstGeom>
+          <a:noFill/>
+        </p:spPr>
+        <p:txBody>
+          <a:bodyPr wrap="square">
+            <a:spAutoFit/>
+          </a:bodyPr>
+          <a:lstStyle/>
+          <a:p>
+            <a:pPr algn="l"/>
+            <a:r>
+              <a:rPr sz="1000" b="1">
+                <a:solidFill>
+                  <a:srgbClr val="2DC653"/>
+                </a:solidFill>
+              </a:rPr>
+              <a:t>Step 2  (5 min)</a:t>
+            </a:r>
+          </a:p>
+        </p:txBody>
+      </p:sp>
+      <p:sp>
+        <p:nvSpPr>
+          <p:cNvPr id="7" name="TextBox 6"/>
+          <p:cNvSpPr txBox="1"/>
+          <p:nvPr/>
+        </p:nvSpPr>
+        <p:spPr>
+          <a:xfrm>
+            <a:off x="1417320" y="1380744"/>
+            <a:ext cx="3200400" cy="256032"/>
+          </a:xfrm>
+          <a:prstGeom prst="rect">
+            <a:avLst/>
+          </a:prstGeom>
+          <a:noFill/>
+        </p:spPr>
+        <p:txBody>
+          <a:bodyPr wrap="square">
+            <a:spAutoFit/>
+          </a:bodyPr>
+          <a:lstStyle/>
+          <a:p>
+            <a:pPr algn="l"/>
+            <a:r>
+              <a:rPr sz="1100" b="1">
+                <a:solidFill>
+                  <a:srgbClr val="FFFFFF"/>
+                </a:solidFill>
+              </a:rPr>
+              <a:t>PCAP Demo  →  upload test_5g_full.pcap</a:t>
+            </a:r>
+          </a:p>
+        </p:txBody>
+      </p:sp>
+      <p:sp>
+        <p:nvSpPr>
+          <p:cNvPr id="8" name="TextBox 7"/>
+          <p:cNvSpPr txBox="1"/>
+          <p:nvPr/>
+        </p:nvSpPr>
+        <p:spPr>
+          <a:xfrm>
+            <a:off x="1417320" y="1655064"/>
+            <a:ext cx="7406640" cy="292608"/>
+          </a:xfrm>
+          <a:prstGeom prst="rect">
+            <a:avLst/>
+          </a:prstGeom>
+          <a:noFill/>
+        </p:spPr>
+        <p:txBody>
+          <a:bodyPr wrap="square">
+            <a:spAutoFit/>
+          </a:bodyPr>
+          <a:lstStyle/>
+          <a:p>
+            <a:pPr algn="l"/>
+            <a:r>
+              <a:rPr sz="900" b="0">
+                <a:solidFill>
+                  <a:srgbClr val="AAAAAA"/>
+                </a:solidFill>
+              </a:rPr>
+              <a:t>Parsed Summary → Procedure Counters → Failure Cause Breakdown → 6-Detector Ensemble → Method Comparison Matrix → LLM Explanation</a:t>
+            </a:r>
+          </a:p>
+        </p:txBody>
+      </p:sp>
+      <p:sp>
+        <p:nvSpPr>
+          <p:cNvPr id="9" name="TextBox 8"/>
+          <p:cNvSpPr txBox="1"/>
+          <p:nvPr/>
+        </p:nvSpPr>
+        <p:spPr>
+          <a:xfrm>
+            <a:off x="274320" y="2048256"/>
+            <a:ext cx="1097280" cy="256032"/>
+          </a:xfrm>
+          <a:prstGeom prst="rect">
+            <a:avLst/>
+          </a:prstGeom>
+          <a:noFill/>
+        </p:spPr>
+        <p:txBody>
+          <a:bodyPr wrap="square">
+            <a:spAutoFit/>
+          </a:bodyPr>
+          <a:lstStyle/>
+          <a:p>
+            <a:pPr algn="l"/>
+            <a:r>
+              <a:rPr sz="1000" b="1">
                 <a:solidFill>
                   <a:srgbClr val="FF9400"/>
                 </a:solidFill>
               </a:rPr>
-              <a:t>Q: Why 6 detectors instead of 1?</a:t>
-            </a:r>
-          </a:p>
-        </p:txBody>
-      </p:sp>
-      <p:sp>
-        <p:nvSpPr>
-          <p:cNvPr id="4" name="TextBox 3"/>
-          <p:cNvSpPr txBox="1"/>
-          <p:nvPr/>
-        </p:nvSpPr>
-        <p:spPr>
-          <a:xfrm>
-            <a:off x="457200" y="1051560"/>
-            <a:ext cx="8229600" cy="457200"/>
-          </a:xfrm>
-          <a:prstGeom prst="rect">
-            <a:avLst/>
-          </a:prstGeom>
-          <a:noFill/>
-        </p:spPr>
-        <p:txBody>
-          <a:bodyPr wrap="square">
-            <a:spAutoFit/>
-          </a:bodyPr>
-          <a:lstStyle/>
-          <a:p>
-            <a:r>
-              <a:rPr sz="1000">
+              <a:t>Step 3  (3 min)</a:t>
+            </a:r>
+          </a:p>
+        </p:txBody>
+      </p:sp>
+      <p:sp>
+        <p:nvSpPr>
+          <p:cNvPr id="10" name="TextBox 9"/>
+          <p:cNvSpPr txBox="1"/>
+          <p:nvPr/>
+        </p:nvSpPr>
+        <p:spPr>
+          <a:xfrm>
+            <a:off x="1417320" y="2048256"/>
+            <a:ext cx="3200400" cy="256032"/>
+          </a:xfrm>
+          <a:prstGeom prst="rect">
+            <a:avLst/>
+          </a:prstGeom>
+          <a:noFill/>
+        </p:spPr>
+        <p:txBody>
+          <a:bodyPr wrap="square">
+            <a:spAutoFit/>
+          </a:bodyPr>
+          <a:lstStyle/>
+          <a:p>
+            <a:pPr algn="l"/>
+            <a:r>
+              <a:rPr sz="1100" b="1">
                 <a:solidFill>
                   <a:srgbClr val="FFFFFF"/>
                 </a:solidFill>
               </a:rPr>
-              <a:t>A: No single method catches all anomaly types. IF+SVM are global; LOF is local. Threshold is deterministic; ML adapts. LSTM catches sequences. Multi-detector agreement = higher confidence. See Method Comparison Matrix in the dashboard.</a:t>
-            </a:r>
-          </a:p>
-        </p:txBody>
-      </p:sp>
-      <p:sp>
-        <p:nvSpPr>
-          <p:cNvPr id="5" name="TextBox 4"/>
-          <p:cNvSpPr txBox="1"/>
-          <p:nvPr/>
-        </p:nvSpPr>
-        <p:spPr>
-          <a:xfrm>
-            <a:off x="274320" y="1691640"/>
-            <a:ext cx="8412480" cy="274320"/>
-          </a:xfrm>
-          <a:prstGeom prst="rect">
-            <a:avLst/>
-          </a:prstGeom>
-          <a:noFill/>
-        </p:spPr>
-        <p:txBody>
-          <a:bodyPr wrap="none">
-            <a:spAutoFit/>
-          </a:bodyPr>
-          <a:lstStyle/>
-          <a:p>
-            <a:r>
-              <a:rPr sz="1200" b="1">
-                <a:solidFill>
-                  <a:srgbClr val="FF9400"/>
-                </a:solidFill>
-              </a:rPr>
-              <a:t>Q: Why Ollama (local LLM) not OpenAI?</a:t>
-            </a:r>
-          </a:p>
-        </p:txBody>
-      </p:sp>
-      <p:sp>
-        <p:nvSpPr>
-          <p:cNvPr id="6" name="TextBox 5"/>
-          <p:cNvSpPr txBox="1"/>
-          <p:nvPr/>
-        </p:nvSpPr>
-        <p:spPr>
-          <a:xfrm>
-            <a:off x="457200" y="1965960"/>
-            <a:ext cx="8229600" cy="457200"/>
-          </a:xfrm>
-          <a:prstGeom prst="rect">
-            <a:avLst/>
-          </a:prstGeom>
-          <a:noFill/>
-        </p:spPr>
-        <p:txBody>
-          <a:bodyPr wrap="square">
-            <a:spAutoFit/>
-          </a:bodyPr>
-          <a:lstStyle/>
-          <a:p>
-            <a:r>
-              <a:rPr sz="1000">
+              <a:t>KPI Demo  →  upload 5G_Network_KPI_Sample.xlsx</a:t>
+            </a:r>
+          </a:p>
+        </p:txBody>
+      </p:sp>
+      <p:sp>
+        <p:nvSpPr>
+          <p:cNvPr id="11" name="TextBox 10"/>
+          <p:cNvSpPr txBox="1"/>
+          <p:nvPr/>
+        </p:nvSpPr>
+        <p:spPr>
+          <a:xfrm>
+            <a:off x="1417320" y="2322576"/>
+            <a:ext cx="7406640" cy="292608"/>
+          </a:xfrm>
+          <a:prstGeom prst="rect">
+            <a:avLst/>
+          </a:prstGeom>
+          <a:noFill/>
+        </p:spPr>
+        <p:txBody>
+          <a:bodyPr wrap="square">
+            <a:spAutoFit/>
+          </a:bodyPr>
+          <a:lstStyle/>
+          <a:p>
+            <a:pPr algn="l"/>
+            <a:r>
+              <a:rPr sz="900" b="0">
+                <a:solidFill>
+                  <a:srgbClr val="AAAAAA"/>
+                </a:solidFill>
+              </a:rPr>
+              <a:t>KPI Health Summary heatmap → Trend Explorer → Per-Cell Breakdown → 6-Method Ensemble → Feedback buttons (👍/👎)</a:t>
+            </a:r>
+          </a:p>
+        </p:txBody>
+      </p:sp>
+      <p:sp>
+        <p:nvSpPr>
+          <p:cNvPr id="12" name="TextBox 11"/>
+          <p:cNvSpPr txBox="1"/>
+          <p:nvPr/>
+        </p:nvSpPr>
+        <p:spPr>
+          <a:xfrm>
+            <a:off x="274320" y="2715768"/>
+            <a:ext cx="1097280" cy="256032"/>
+          </a:xfrm>
+          <a:prstGeom prst="rect">
+            <a:avLst/>
+          </a:prstGeom>
+          <a:noFill/>
+        </p:spPr>
+        <p:txBody>
+          <a:bodyPr wrap="square">
+            <a:spAutoFit/>
+          </a:bodyPr>
+          <a:lstStyle/>
+          <a:p>
+            <a:pPr algn="l"/>
+            <a:r>
+              <a:rPr sz="1000" b="1">
+                <a:solidFill>
+                  <a:srgbClr val="A060FF"/>
+                </a:solidFill>
+              </a:rPr>
+              <a:t>Step 4  (2 min)</a:t>
+            </a:r>
+          </a:p>
+        </p:txBody>
+      </p:sp>
+      <p:sp>
+        <p:nvSpPr>
+          <p:cNvPr id="13" name="TextBox 12"/>
+          <p:cNvSpPr txBox="1"/>
+          <p:nvPr/>
+        </p:nvSpPr>
+        <p:spPr>
+          <a:xfrm>
+            <a:off x="1417320" y="2715768"/>
+            <a:ext cx="3200400" cy="256032"/>
+          </a:xfrm>
+          <a:prstGeom prst="rect">
+            <a:avLst/>
+          </a:prstGeom>
+          <a:noFill/>
+        </p:spPr>
+        <p:txBody>
+          <a:bodyPr wrap="square">
+            <a:spAutoFit/>
+          </a:bodyPr>
+          <a:lstStyle/>
+          <a:p>
+            <a:pPr algn="l"/>
+            <a:r>
+              <a:rPr sz="1100" b="1">
                 <a:solidFill>
                   <a:srgbClr val="FFFFFF"/>
                 </a:solidFill>
               </a:rPr>
-              <a:t>A: Telecom data is sensitive — operator configurations, failure rates, cell IDs cannot leave the premises. Local Ollama keeps all data on-site. Rule-based fallback ensures the system works even without GPU/model.</a:t>
-            </a:r>
-          </a:p>
-        </p:txBody>
-      </p:sp>
-      <p:sp>
-        <p:nvSpPr>
-          <p:cNvPr id="7" name="TextBox 6"/>
-          <p:cNvSpPr txBox="1"/>
-          <p:nvPr/>
-        </p:nvSpPr>
-        <p:spPr>
-          <a:xfrm>
-            <a:off x="274320" y="2606040"/>
-            <a:ext cx="8412480" cy="274320"/>
-          </a:xfrm>
-          <a:prstGeom prst="rect">
-            <a:avLst/>
-          </a:prstGeom>
-          <a:noFill/>
-        </p:spPr>
-        <p:txBody>
-          <a:bodyPr wrap="none">
-            <a:spAutoFit/>
-          </a:bodyPr>
-          <a:lstStyle/>
-          <a:p>
-            <a:r>
-              <a:rPr sz="1200" b="1">
-                <a:solidFill>
-                  <a:srgbClr val="FF9400"/>
-                </a:solidFill>
-              </a:rPr>
-              <a:t>Q: Why FAISS for RAG, not a vector DB?</a:t>
-            </a:r>
-          </a:p>
-        </p:txBody>
-      </p:sp>
-      <p:sp>
-        <p:nvSpPr>
-          <p:cNvPr id="8" name="TextBox 7"/>
-          <p:cNvSpPr txBox="1"/>
-          <p:nvPr/>
-        </p:nvSpPr>
-        <p:spPr>
-          <a:xfrm>
-            <a:off x="457200" y="2880360"/>
-            <a:ext cx="8229600" cy="457200"/>
-          </a:xfrm>
-          <a:prstGeom prst="rect">
-            <a:avLst/>
-          </a:prstGeom>
-          <a:noFill/>
-        </p:spPr>
-        <p:txBody>
-          <a:bodyPr wrap="square">
-            <a:spAutoFit/>
-          </a:bodyPr>
-          <a:lstStyle/>
-          <a:p>
-            <a:r>
-              <a:rPr sz="1000">
+              <a:t>Stats Demo  →  upload srsran_stats.csv</a:t>
+            </a:r>
+          </a:p>
+        </p:txBody>
+      </p:sp>
+      <p:sp>
+        <p:nvSpPr>
+          <p:cNvPr id="14" name="TextBox 13"/>
+          <p:cNvSpPr txBox="1"/>
+          <p:nvPr/>
+        </p:nvSpPr>
+        <p:spPr>
+          <a:xfrm>
+            <a:off x="1417320" y="2990087"/>
+            <a:ext cx="7406640" cy="292608"/>
+          </a:xfrm>
+          <a:prstGeom prst="rect">
+            <a:avLst/>
+          </a:prstGeom>
+          <a:noFill/>
+        </p:spPr>
+        <p:txBody>
+          <a:bodyPr wrap="square">
+            <a:spAutoFit/>
+          </a:bodyPr>
+          <a:lstStyle/>
+          <a:p>
+            <a:pPr algn="l"/>
+            <a:r>
+              <a:rPr sz="900" b="0">
+                <a:solidFill>
+                  <a:srgbClr val="AAAAAA"/>
+                </a:solidFill>
+              </a:rPr>
+              <a:t>L1/L2 metrics (BLER, HARQ, SNR, PRB) → anomaly detection at physical layer</a:t>
+            </a:r>
+          </a:p>
+        </p:txBody>
+      </p:sp>
+      <p:sp>
+        <p:nvSpPr>
+          <p:cNvPr id="15" name="TextBox 14"/>
+          <p:cNvSpPr txBox="1"/>
+          <p:nvPr/>
+        </p:nvSpPr>
+        <p:spPr>
+          <a:xfrm>
+            <a:off x="274320" y="3383280"/>
+            <a:ext cx="1097280" cy="256032"/>
+          </a:xfrm>
+          <a:prstGeom prst="rect">
+            <a:avLst/>
+          </a:prstGeom>
+          <a:noFill/>
+        </p:spPr>
+        <p:txBody>
+          <a:bodyPr wrap="square">
+            <a:spAutoFit/>
+          </a:bodyPr>
+          <a:lstStyle/>
+          <a:p>
+            <a:pPr algn="l"/>
+            <a:r>
+              <a:rPr sz="1000" b="1">
+                <a:solidFill>
+                  <a:srgbClr val="FF4D9F"/>
+                </a:solidFill>
+              </a:rPr>
+              <a:t>Step 5  (2 min)</a:t>
+            </a:r>
+          </a:p>
+        </p:txBody>
+      </p:sp>
+      <p:sp>
+        <p:nvSpPr>
+          <p:cNvPr id="16" name="TextBox 15"/>
+          <p:cNvSpPr txBox="1"/>
+          <p:nvPr/>
+        </p:nvSpPr>
+        <p:spPr>
+          <a:xfrm>
+            <a:off x="1417320" y="3383280"/>
+            <a:ext cx="3200400" cy="256032"/>
+          </a:xfrm>
+          <a:prstGeom prst="rect">
+            <a:avLst/>
+          </a:prstGeom>
+          <a:noFill/>
+        </p:spPr>
+        <p:txBody>
+          <a:bodyPr wrap="square">
+            <a:spAutoFit/>
+          </a:bodyPr>
+          <a:lstStyle/>
+          <a:p>
+            <a:pPr algn="l"/>
+            <a:r>
+              <a:rPr sz="1100" b="1">
                 <a:solidFill>
                   <a:srgbClr val="FFFFFF"/>
                 </a:solidFill>
               </a:rPr>
-              <a:t>A: Corpus is small (38 spec chunks). FAISS is in-process, zero infra, sub-millisecond retrieval. A vector DB (Pinecone, Weaviate) adds operational complexity with no benefit at this scale.</a:t>
-            </a:r>
-          </a:p>
-        </p:txBody>
-      </p:sp>
-      <p:sp>
-        <p:nvSpPr>
-          <p:cNvPr id="9" name="TextBox 8"/>
-          <p:cNvSpPr txBox="1"/>
-          <p:nvPr/>
-        </p:nvSpPr>
-        <p:spPr>
-          <a:xfrm>
-            <a:off x="274320" y="3520440"/>
-            <a:ext cx="8412480" cy="274320"/>
-          </a:xfrm>
-          <a:prstGeom prst="rect">
-            <a:avLst/>
-          </a:prstGeom>
-          <a:noFill/>
-        </p:spPr>
-        <p:txBody>
-          <a:bodyPr wrap="none">
-            <a:spAutoFit/>
-          </a:bodyPr>
-          <a:lstStyle/>
-          <a:p>
-            <a:r>
-              <a:rPr sz="1200" b="1">
-                <a:solidFill>
-                  <a:srgbClr val="FF9400"/>
-                </a:solidFill>
-              </a:rPr>
-              <a:t>Q: Why pyshark over scapy for PCAP?</a:t>
-            </a:r>
-          </a:p>
-        </p:txBody>
-      </p:sp>
-      <p:sp>
-        <p:nvSpPr>
-          <p:cNvPr id="10" name="TextBox 9"/>
-          <p:cNvSpPr txBox="1"/>
-          <p:nvPr/>
-        </p:nvSpPr>
-        <p:spPr>
-          <a:xfrm>
-            <a:off x="457200" y="3794760"/>
-            <a:ext cx="8229600" cy="457200"/>
-          </a:xfrm>
-          <a:prstGeom prst="rect">
-            <a:avLst/>
-          </a:prstGeom>
-          <a:noFill/>
-        </p:spPr>
-        <p:txBody>
-          <a:bodyPr wrap="square">
-            <a:spAutoFit/>
-          </a:bodyPr>
-          <a:lstStyle/>
-          <a:p>
-            <a:r>
-              <a:rPr sz="1000">
+              <a:t>MLOps + REST API</a:t>
+            </a:r>
+          </a:p>
+        </p:txBody>
+      </p:sp>
+      <p:sp>
+        <p:nvSpPr>
+          <p:cNvPr id="17" name="TextBox 16"/>
+          <p:cNvSpPr txBox="1"/>
+          <p:nvPr/>
+        </p:nvSpPr>
+        <p:spPr>
+          <a:xfrm>
+            <a:off x="1417320" y="3657600"/>
+            <a:ext cx="7406640" cy="292608"/>
+          </a:xfrm>
+          <a:prstGeom prst="rect">
+            <a:avLst/>
+          </a:prstGeom>
+          <a:noFill/>
+        </p:spPr>
+        <p:txBody>
+          <a:bodyPr wrap="square">
+            <a:spAutoFit/>
+          </a:bodyPr>
+          <a:lstStyle/>
+          <a:p>
+            <a:pPr algn="l"/>
+            <a:r>
+              <a:rPr sz="900" b="0">
+                <a:solidFill>
+                  <a:srgbClr val="AAAAAA"/>
+                </a:solidFill>
+              </a:rPr>
+              <a:t>Show Prediction Layer (4h forecast) · Feedback History · Open http://localhost:8000/docs → POST /analyze/pcap live</a:t>
+            </a:r>
+          </a:p>
+        </p:txBody>
+      </p:sp>
+      <p:sp>
+        <p:nvSpPr>
+          <p:cNvPr id="18" name="TextBox 17"/>
+          <p:cNvSpPr txBox="1"/>
+          <p:nvPr/>
+        </p:nvSpPr>
+        <p:spPr>
+          <a:xfrm>
+            <a:off x="274320" y="4050791"/>
+            <a:ext cx="1097280" cy="256032"/>
+          </a:xfrm>
+          <a:prstGeom prst="rect">
+            <a:avLst/>
+          </a:prstGeom>
+          <a:noFill/>
+        </p:spPr>
+        <p:txBody>
+          <a:bodyPr wrap="square">
+            <a:spAutoFit/>
+          </a:bodyPr>
+          <a:lstStyle/>
+          <a:p>
+            <a:pPr algn="l"/>
+            <a:r>
+              <a:rPr sz="1000" b="1">
+                <a:solidFill>
+                  <a:srgbClr val="AAAAAA"/>
+                </a:solidFill>
+              </a:rPr>
+              <a:t>Step 6  (1 min)</a:t>
+            </a:r>
+          </a:p>
+        </p:txBody>
+      </p:sp>
+      <p:sp>
+        <p:nvSpPr>
+          <p:cNvPr id="19" name="TextBox 18"/>
+          <p:cNvSpPr txBox="1"/>
+          <p:nvPr/>
+        </p:nvSpPr>
+        <p:spPr>
+          <a:xfrm>
+            <a:off x="1417320" y="4050791"/>
+            <a:ext cx="3200400" cy="256032"/>
+          </a:xfrm>
+          <a:prstGeom prst="rect">
+            <a:avLst/>
+          </a:prstGeom>
+          <a:noFill/>
+        </p:spPr>
+        <p:txBody>
+          <a:bodyPr wrap="square">
+            <a:spAutoFit/>
+          </a:bodyPr>
+          <a:lstStyle/>
+          <a:p>
+            <a:pPr algn="l"/>
+            <a:r>
+              <a:rPr sz="1100" b="1">
                 <a:solidFill>
                   <a:srgbClr val="FFFFFF"/>
                 </a:solidFill>
               </a:rPr>
-              <a:t>A: Pyshark wraps Wireshark's tshark — provides full 3GPP ASN.1 dissection of NAS/NGAP/RRC out of the box. Scapy has no 5G-NR dissectors; we'd need to implement ASN.1 decoding from scratch. See PCAP_Parsing_Methods.pptx.</a:t>
+              <a:t>Test suite</a:t>
+            </a:r>
+          </a:p>
+        </p:txBody>
+      </p:sp>
+      <p:sp>
+        <p:nvSpPr>
+          <p:cNvPr id="20" name="TextBox 19"/>
+          <p:cNvSpPr txBox="1"/>
+          <p:nvPr/>
+        </p:nvSpPr>
+        <p:spPr>
+          <a:xfrm>
+            <a:off x="1417320" y="4325112"/>
+            <a:ext cx="7406640" cy="292608"/>
+          </a:xfrm>
+          <a:prstGeom prst="rect">
+            <a:avLst/>
+          </a:prstGeom>
+          <a:noFill/>
+        </p:spPr>
+        <p:txBody>
+          <a:bodyPr wrap="square">
+            <a:spAutoFit/>
+          </a:bodyPr>
+          <a:lstStyle/>
+          <a:p>
+            <a:pPr algn="l"/>
+            <a:r>
+              <a:rPr sz="900" b="0">
+                <a:solidFill>
+                  <a:srgbClr val="AAAAAA"/>
+                </a:solidFill>
+              </a:rPr>
+              <a:t>Run  make test  in terminal → show 56 passing tests</a:t>
             </a:r>
           </a:p>
         </p:txBody>
